--- a/docs/中期汇报ppt/汇编中期_含仿真补充_三人答辩补充版_修复版.pptx
+++ b/docs/中期汇报ppt/汇编中期_含仿真补充_三人答辩补充版_修复版.pptx
@@ -1829,7 +1829,7 @@
               <a:buNone/>
             </a:pPr>
             <a:r>
-              <a:rPr sz="1350">
+              <a:rPr lang="en-US" sz="1350" dirty="0">
                 <a:solidFill>
                   <a:srgbClr val="B9C8E6"/>
                 </a:solidFill>
@@ -1837,9 +1837,42 @@
                 <a:ea typeface="Microsoft YaHei"/>
                 <a:cs typeface="Microsoft YaHei"/>
               </a:rPr>
-              <a:t>阶段目标：接口协议、控制器、MMIO 与最小汇编驱动正确</a:t>
-            </a:r>
-            <a:endParaRPr sz="1350"/>
+              <a:t>  </a:t>
+            </a:r>
+            <a:r>
+              <a:rPr sz="1350" dirty="0" err="1">
+                <a:solidFill>
+                  <a:srgbClr val="B9C8E6"/>
+                </a:solidFill>
+                <a:latin typeface="Microsoft YaHei"/>
+                <a:ea typeface="Microsoft YaHei"/>
+                <a:cs typeface="Microsoft YaHei"/>
+              </a:rPr>
+              <a:t>阶段目标：接口协议、控制器、MMIO</a:t>
+            </a:r>
+            <a:r>
+              <a:rPr sz="1350" dirty="0">
+                <a:solidFill>
+                  <a:srgbClr val="B9C8E6"/>
+                </a:solidFill>
+                <a:latin typeface="Microsoft YaHei"/>
+                <a:ea typeface="Microsoft YaHei"/>
+                <a:cs typeface="Microsoft YaHei"/>
+              </a:rPr>
+              <a:t> </a:t>
+            </a:r>
+            <a:r>
+              <a:rPr sz="1350" dirty="0" err="1">
+                <a:solidFill>
+                  <a:srgbClr val="B9C8E6"/>
+                </a:solidFill>
+                <a:latin typeface="Microsoft YaHei"/>
+                <a:ea typeface="Microsoft YaHei"/>
+                <a:cs typeface="Microsoft YaHei"/>
+              </a:rPr>
+              <a:t>与最小汇编驱动正确</a:t>
+            </a:r>
+            <a:endParaRPr sz="1350" dirty="0"/>
           </a:p>
         </p:txBody>
       </p:sp>
@@ -1884,7 +1917,7 @@
               <a:buNone/>
             </a:pPr>
             <a:r>
-              <a:rPr sz="1050">
+              <a:rPr lang="en-US" sz="1050" dirty="0">
                 <a:solidFill>
                   <a:srgbClr val="8392B7"/>
                 </a:solidFill>
@@ -1892,9 +1925,31 @@
                 <a:ea typeface="Microsoft YaHei"/>
                 <a:cs typeface="Microsoft YaHei"/>
               </a:rPr>
-              <a:t>成员：王建乐、张晓行、钱博傲    日期：2026 年 9 月</a:t>
-            </a:r>
-            <a:endParaRPr sz="1050"/>
+              <a:t>  </a:t>
+            </a:r>
+            <a:r>
+              <a:rPr sz="1050" dirty="0" err="1">
+                <a:solidFill>
+                  <a:srgbClr val="8392B7"/>
+                </a:solidFill>
+                <a:latin typeface="Microsoft YaHei"/>
+                <a:ea typeface="Microsoft YaHei"/>
+                <a:cs typeface="Microsoft YaHei"/>
+              </a:rPr>
+              <a:t>成员：王建乐、张晓行、钱博傲</a:t>
+            </a:r>
+            <a:r>
+              <a:rPr sz="1050" dirty="0">
+                <a:solidFill>
+                  <a:srgbClr val="8392B7"/>
+                </a:solidFill>
+                <a:latin typeface="Microsoft YaHei"/>
+                <a:ea typeface="Microsoft YaHei"/>
+                <a:cs typeface="Microsoft YaHei"/>
+              </a:rPr>
+              <a:t>    日期：2026 年 9 月</a:t>
+            </a:r>
+            <a:endParaRPr sz="1050" dirty="0"/>
           </a:p>
         </p:txBody>
       </p:sp>
@@ -8627,17 +8682,61 @@
               <a:buNone/>
             </a:pPr>
             <a:r>
-              <a:rPr sz="1400">
-                <a:solidFill>
-                  <a:srgbClr val="F7FAFF"/>
-                </a:solidFill>
-                <a:latin typeface="Microsoft YaHei"/>
-                <a:ea typeface="Microsoft YaHei"/>
-                <a:cs typeface="Microsoft YaHei"/>
-              </a:rPr>
-              <a:t>协议包含复位等待、命令序列和连续数据传输，能完整体现外设接口控制器的状态机与握手设计。</a:t>
-            </a:r>
-            <a:endParaRPr sz="1400"/>
+              <a:rPr lang="en-US" sz="1400" dirty="0">
+                <a:solidFill>
+                  <a:srgbClr val="F7FAFF"/>
+                </a:solidFill>
+                <a:latin typeface="Microsoft YaHei"/>
+                <a:ea typeface="Microsoft YaHei"/>
+                <a:cs typeface="Microsoft YaHei"/>
+              </a:rPr>
+              <a:t>  </a:t>
+            </a:r>
+            <a:r>
+              <a:rPr sz="1400" dirty="0" err="1">
+                <a:solidFill>
+                  <a:srgbClr val="F7FAFF"/>
+                </a:solidFill>
+                <a:latin typeface="Microsoft YaHei"/>
+                <a:ea typeface="Microsoft YaHei"/>
+                <a:cs typeface="Microsoft YaHei"/>
+              </a:rPr>
+              <a:t>协议包含复位等待、命令序列和连续数据传输，能完整体现外设</a:t>
+            </a:r>
+            <a:r>
+              <a:rPr lang="en-US" sz="1400" dirty="0">
+                <a:solidFill>
+                  <a:srgbClr val="F7FAFF"/>
+                </a:solidFill>
+                <a:latin typeface="Microsoft YaHei"/>
+                <a:ea typeface="Microsoft YaHei"/>
+                <a:cs typeface="Microsoft YaHei"/>
+              </a:rPr>
+              <a:t>  </a:t>
+            </a:r>
+            <a:r>
+              <a:rPr sz="1400" dirty="0" err="1">
+                <a:solidFill>
+                  <a:srgbClr val="F7FAFF"/>
+                </a:solidFill>
+                <a:latin typeface="Microsoft YaHei"/>
+                <a:ea typeface="Microsoft YaHei"/>
+                <a:cs typeface="Microsoft YaHei"/>
+              </a:rPr>
+              <a:t>接口控制器的状态机与握手设计</a:t>
+            </a:r>
+            <a:r>
+              <a:rPr sz="1400" dirty="0">
+                <a:solidFill>
+                  <a:srgbClr val="F7FAFF"/>
+                </a:solidFill>
+                <a:latin typeface="Microsoft YaHei"/>
+                <a:ea typeface="Microsoft YaHei"/>
+                <a:cs typeface="Microsoft YaHei"/>
+              </a:rPr>
+              <a:t>。</a:t>
+            </a:r>
+            <a:endParaRPr sz="1400" dirty="0"/>
           </a:p>
         </p:txBody>
       </p:sp>
@@ -8682,7 +8781,7 @@
               <a:buNone/>
             </a:pPr>
             <a:r>
-              <a:rPr sz="1300">
+              <a:rPr lang="en-US" sz="1300" dirty="0">
                 <a:solidFill>
                   <a:srgbClr val="DBFBEA"/>
                 </a:solidFill>
@@ -8690,9 +8789,31 @@
                 <a:ea typeface="Microsoft YaHei"/>
                 <a:cs typeface="Microsoft YaHei"/>
               </a:rPr>
-              <a:t>硬件处理精确时序，汇编软件通过寄存器接口发送高层操作。</a:t>
-            </a:r>
-            <a:endParaRPr sz="1300"/>
+              <a:t>  </a:t>
+            </a:r>
+            <a:r>
+              <a:rPr sz="1300" dirty="0" err="1">
+                <a:solidFill>
+                  <a:srgbClr val="DBFBEA"/>
+                </a:solidFill>
+                <a:latin typeface="Microsoft YaHei"/>
+                <a:ea typeface="Microsoft YaHei"/>
+                <a:cs typeface="Microsoft YaHei"/>
+              </a:rPr>
+              <a:t>硬件处理精确时序，汇编软件通过寄存器接口发送高层操作</a:t>
+            </a:r>
+            <a:r>
+              <a:rPr sz="1300" dirty="0">
+                <a:solidFill>
+                  <a:srgbClr val="DBFBEA"/>
+                </a:solidFill>
+                <a:latin typeface="Microsoft YaHei"/>
+                <a:ea typeface="Microsoft YaHei"/>
+                <a:cs typeface="Microsoft YaHei"/>
+              </a:rPr>
+              <a:t>。</a:t>
+            </a:r>
+            <a:endParaRPr sz="1300" dirty="0"/>
           </a:p>
         </p:txBody>
       </p:sp>
@@ -14326,17 +14447,83 @@
               <a:buNone/>
             </a:pPr>
             <a:r>
-              <a:rPr sz="1300">
-                <a:solidFill>
-                  <a:srgbClr val="F7FAFF"/>
-                </a:solidFill>
-                <a:latin typeface="Microsoft YaHei"/>
-                <a:ea typeface="Microsoft YaHei"/>
-                <a:cs typeface="Microsoft YaHei"/>
-              </a:rPr>
-              <a:t>lcd_rst_n 在 RESET_LOW 保持为 0；initialized 只在初始化和清屏完成后置 1</a:t>
-            </a:r>
-            <a:endParaRPr sz="1300"/>
+              <a:rPr lang="en-US" sz="1300" dirty="0">
+                <a:solidFill>
+                  <a:srgbClr val="F7FAFF"/>
+                </a:solidFill>
+                <a:latin typeface="Microsoft YaHei"/>
+                <a:ea typeface="Microsoft YaHei"/>
+                <a:cs typeface="Microsoft YaHei"/>
+              </a:rPr>
+              <a:t>  </a:t>
+            </a:r>
+            <a:r>
+              <a:rPr sz="1300" dirty="0" err="1">
+                <a:solidFill>
+                  <a:srgbClr val="F7FAFF"/>
+                </a:solidFill>
+                <a:latin typeface="Microsoft YaHei"/>
+                <a:ea typeface="Microsoft YaHei"/>
+                <a:cs typeface="Microsoft YaHei"/>
+              </a:rPr>
+              <a:t>lcd_rst_n</a:t>
+            </a:r>
+            <a:r>
+              <a:rPr sz="1300" dirty="0">
+                <a:solidFill>
+                  <a:srgbClr val="F7FAFF"/>
+                </a:solidFill>
+                <a:latin typeface="Microsoft YaHei"/>
+                <a:ea typeface="Microsoft YaHei"/>
+                <a:cs typeface="Microsoft YaHei"/>
+              </a:rPr>
+              <a:t> 在 RESET_LOW </a:t>
+            </a:r>
+            <a:r>
+              <a:rPr sz="1300" dirty="0" err="1">
+                <a:solidFill>
+                  <a:srgbClr val="F7FAFF"/>
+                </a:solidFill>
+                <a:latin typeface="Microsoft YaHei"/>
+                <a:ea typeface="Microsoft YaHei"/>
+                <a:cs typeface="Microsoft YaHei"/>
+              </a:rPr>
+              <a:t>保持为</a:t>
+            </a:r>
+            <a:r>
+              <a:rPr sz="1300" dirty="0">
+                <a:solidFill>
+                  <a:srgbClr val="F7FAFF"/>
+                </a:solidFill>
+                <a:latin typeface="Microsoft YaHei"/>
+                <a:ea typeface="Microsoft YaHei"/>
+                <a:cs typeface="Microsoft YaHei"/>
+              </a:rPr>
+              <a:t> 0；initialized </a:t>
+            </a:r>
+            <a:r>
+              <a:rPr sz="1300" dirty="0" err="1">
+                <a:solidFill>
+                  <a:srgbClr val="F7FAFF"/>
+                </a:solidFill>
+                <a:latin typeface="Microsoft YaHei"/>
+                <a:ea typeface="Microsoft YaHei"/>
+                <a:cs typeface="Microsoft YaHei"/>
+              </a:rPr>
+              <a:t>只在初始化和清屏完成后置</a:t>
+            </a:r>
+            <a:r>
+              <a:rPr sz="1300" dirty="0">
+                <a:solidFill>
+                  <a:srgbClr val="F7FAFF"/>
+                </a:solidFill>
+                <a:latin typeface="Microsoft YaHei"/>
+                <a:ea typeface="Microsoft YaHei"/>
+                <a:cs typeface="Microsoft YaHei"/>
+              </a:rPr>
+              <a:t> 1</a:t>
+            </a:r>
+            <a:endParaRPr sz="1300" dirty="0"/>
           </a:p>
         </p:txBody>
       </p:sp>
@@ -14429,7 +14616,7 @@
               <a:buNone/>
             </a:pPr>
             <a:r>
-              <a:rPr sz="1300">
+              <a:rPr lang="en-US" sz="1300" dirty="0">
                 <a:solidFill>
                   <a:srgbClr val="FFF2D2"/>
                 </a:solidFill>
@@ -14437,9 +14624,86 @@
                 <a:ea typeface="Microsoft YaHei"/>
                 <a:cs typeface="Microsoft YaHei"/>
               </a:rPr>
-              <a:t>reinit_req 优先返回 RESET_LOW；用户字节、清屏与演示请求只在 IDLE 接受</a:t>
-            </a:r>
-            <a:endParaRPr sz="1300"/>
+              <a:t>  </a:t>
+            </a:r>
+            <a:r>
+              <a:rPr sz="1300" dirty="0" err="1">
+                <a:solidFill>
+                  <a:srgbClr val="FFF2D2"/>
+                </a:solidFill>
+                <a:latin typeface="Microsoft YaHei"/>
+                <a:ea typeface="Microsoft YaHei"/>
+                <a:cs typeface="Microsoft YaHei"/>
+              </a:rPr>
+              <a:t>reinit_req</a:t>
+            </a:r>
+            <a:r>
+              <a:rPr sz="1300" dirty="0">
+                <a:solidFill>
+                  <a:srgbClr val="FFF2D2"/>
+                </a:solidFill>
+                <a:latin typeface="Microsoft YaHei"/>
+                <a:ea typeface="Microsoft YaHei"/>
+                <a:cs typeface="Microsoft YaHei"/>
+              </a:rPr>
+              <a:t> </a:t>
+            </a:r>
+            <a:r>
+              <a:rPr sz="1300" dirty="0" err="1">
+                <a:solidFill>
+                  <a:srgbClr val="FFF2D2"/>
+                </a:solidFill>
+                <a:latin typeface="Microsoft YaHei"/>
+                <a:ea typeface="Microsoft YaHei"/>
+                <a:cs typeface="Microsoft YaHei"/>
+              </a:rPr>
+              <a:t>优先返回</a:t>
+            </a:r>
+            <a:r>
+              <a:rPr sz="1300" dirty="0">
+                <a:solidFill>
+                  <a:srgbClr val="FFF2D2"/>
+                </a:solidFill>
+                <a:latin typeface="Microsoft YaHei"/>
+                <a:ea typeface="Microsoft YaHei"/>
+                <a:cs typeface="Microsoft YaHei"/>
+              </a:rPr>
+              <a:t> </a:t>
+            </a:r>
+            <a:r>
+              <a:rPr sz="1300" dirty="0" err="1">
+                <a:solidFill>
+                  <a:srgbClr val="FFF2D2"/>
+                </a:solidFill>
+                <a:latin typeface="Microsoft YaHei"/>
+                <a:ea typeface="Microsoft YaHei"/>
+                <a:cs typeface="Microsoft YaHei"/>
+              </a:rPr>
+              <a:t>RESET_LOW；用户字节、清屏与演示请求只在</a:t>
+            </a:r>
+            <a:r>
+              <a:rPr sz="1300" dirty="0">
+                <a:solidFill>
+                  <a:srgbClr val="FFF2D2"/>
+                </a:solidFill>
+                <a:latin typeface="Microsoft YaHei"/>
+                <a:ea typeface="Microsoft YaHei"/>
+                <a:cs typeface="Microsoft YaHei"/>
+              </a:rPr>
+              <a:t> IDLE </a:t>
+            </a:r>
+            <a:r>
+              <a:rPr sz="1300" dirty="0" err="1">
+                <a:solidFill>
+                  <a:srgbClr val="FFF2D2"/>
+                </a:solidFill>
+                <a:latin typeface="Microsoft YaHei"/>
+                <a:ea typeface="Microsoft YaHei"/>
+                <a:cs typeface="Microsoft YaHei"/>
+              </a:rPr>
+              <a:t>接受</a:t>
+            </a:r>
+            <a:endParaRPr sz="1300" dirty="0"/>
           </a:p>
         </p:txBody>
       </p:sp>
@@ -16352,7 +16616,7 @@
               <a:buNone/>
             </a:pPr>
             <a:r>
-              <a:rPr sz="1020">
+              <a:rPr lang="en-US" sz="1020" dirty="0">
                 <a:solidFill>
                   <a:srgbClr val="B9C8E6"/>
                 </a:solidFill>
@@ -16360,9 +16624,53 @@
                 <a:ea typeface="Microsoft YaHei"/>
                 <a:cs typeface="Microsoft YaHei"/>
               </a:rPr>
-              <a:t>写低 8 位命令，RS = 0</a:t>
-            </a:r>
-            <a:endParaRPr sz="1020"/>
+              <a:t>  </a:t>
+            </a:r>
+            <a:r>
+              <a:rPr sz="1020" dirty="0" err="1">
+                <a:solidFill>
+                  <a:srgbClr val="B9C8E6"/>
+                </a:solidFill>
+                <a:latin typeface="Microsoft YaHei"/>
+                <a:ea typeface="Microsoft YaHei"/>
+                <a:cs typeface="Microsoft YaHei"/>
+              </a:rPr>
+              <a:t>写低</a:t>
+            </a:r>
+            <a:r>
+              <a:rPr sz="1020" dirty="0">
+                <a:solidFill>
+                  <a:srgbClr val="B9C8E6"/>
+                </a:solidFill>
+                <a:latin typeface="Microsoft YaHei"/>
+                <a:ea typeface="Microsoft YaHei"/>
+                <a:cs typeface="Microsoft YaHei"/>
+              </a:rPr>
+              <a:t> 8 </a:t>
+            </a:r>
+            <a:r>
+              <a:rPr sz="1020" dirty="0" err="1">
+                <a:solidFill>
+                  <a:srgbClr val="B9C8E6"/>
+                </a:solidFill>
+                <a:latin typeface="Microsoft YaHei"/>
+                <a:ea typeface="Microsoft YaHei"/>
+                <a:cs typeface="Microsoft YaHei"/>
+              </a:rPr>
+              <a:t>位命令，RS</a:t>
+            </a:r>
+            <a:r>
+              <a:rPr sz="1020" dirty="0">
+                <a:solidFill>
+                  <a:srgbClr val="B9C8E6"/>
+                </a:solidFill>
+                <a:latin typeface="Microsoft YaHei"/>
+                <a:ea typeface="Microsoft YaHei"/>
+                <a:cs typeface="Microsoft YaHei"/>
+              </a:rPr>
+              <a:t> = 0</a:t>
+            </a:r>
+            <a:endParaRPr sz="1020" dirty="0"/>
           </a:p>
         </p:txBody>
       </p:sp>
@@ -16517,7 +16825,7 @@
               <a:buNone/>
             </a:pPr>
             <a:r>
-              <a:rPr sz="1020">
+              <a:rPr lang="en-US" sz="1020" dirty="0">
                 <a:solidFill>
                   <a:srgbClr val="B9C8E6"/>
                 </a:solidFill>
@@ -16525,9 +16833,53 @@
                 <a:ea typeface="Microsoft YaHei"/>
                 <a:cs typeface="Microsoft YaHei"/>
               </a:rPr>
-              <a:t>写低 8 位显示数据，RS = 1</a:t>
-            </a:r>
-            <a:endParaRPr sz="1020"/>
+              <a:t>  </a:t>
+            </a:r>
+            <a:r>
+              <a:rPr sz="1020" dirty="0" err="1">
+                <a:solidFill>
+                  <a:srgbClr val="B9C8E6"/>
+                </a:solidFill>
+                <a:latin typeface="Microsoft YaHei"/>
+                <a:ea typeface="Microsoft YaHei"/>
+                <a:cs typeface="Microsoft YaHei"/>
+              </a:rPr>
+              <a:t>写低</a:t>
+            </a:r>
+            <a:r>
+              <a:rPr sz="1020" dirty="0">
+                <a:solidFill>
+                  <a:srgbClr val="B9C8E6"/>
+                </a:solidFill>
+                <a:latin typeface="Microsoft YaHei"/>
+                <a:ea typeface="Microsoft YaHei"/>
+                <a:cs typeface="Microsoft YaHei"/>
+              </a:rPr>
+              <a:t> 8 </a:t>
+            </a:r>
+            <a:r>
+              <a:rPr sz="1020" dirty="0" err="1">
+                <a:solidFill>
+                  <a:srgbClr val="B9C8E6"/>
+                </a:solidFill>
+                <a:latin typeface="Microsoft YaHei"/>
+                <a:ea typeface="Microsoft YaHei"/>
+                <a:cs typeface="Microsoft YaHei"/>
+              </a:rPr>
+              <a:t>位显示数据，RS</a:t>
+            </a:r>
+            <a:r>
+              <a:rPr sz="1020" dirty="0">
+                <a:solidFill>
+                  <a:srgbClr val="B9C8E6"/>
+                </a:solidFill>
+                <a:latin typeface="Microsoft YaHei"/>
+                <a:ea typeface="Microsoft YaHei"/>
+                <a:cs typeface="Microsoft YaHei"/>
+              </a:rPr>
+              <a:t> = 1</a:t>
+            </a:r>
+            <a:endParaRPr sz="1020" dirty="0"/>
           </a:p>
         </p:txBody>
       </p:sp>
@@ -16682,7 +17034,7 @@
               <a:buNone/>
             </a:pPr>
             <a:r>
-              <a:rPr sz="1020">
+              <a:rPr lang="en-US" sz="1020" dirty="0">
                 <a:solidFill>
                   <a:srgbClr val="B9C8E6"/>
                 </a:solidFill>
@@ -16690,9 +17042,20 @@
                 <a:ea typeface="Microsoft YaHei"/>
                 <a:cs typeface="Microsoft YaHei"/>
               </a:rPr>
+              <a:t>  </a:t>
+            </a:r>
+            <a:r>
+              <a:rPr sz="1020" dirty="0">
+                <a:solidFill>
+                  <a:srgbClr val="B9C8E6"/>
+                </a:solidFill>
+                <a:latin typeface="Microsoft YaHei"/>
+                <a:ea typeface="Microsoft YaHei"/>
+                <a:cs typeface="Microsoft YaHei"/>
+              </a:rPr>
               <a:t>bit0 ready，bit1 initialized</a:t>
             </a:r>
-            <a:endParaRPr sz="1020"/>
+            <a:endParaRPr sz="1020" dirty="0"/>
           </a:p>
         </p:txBody>
       </p:sp>
@@ -16847,7 +17210,7 @@
               <a:buNone/>
             </a:pPr>
             <a:r>
-              <a:rPr sz="1020">
+              <a:rPr lang="en-US" sz="1020" dirty="0">
                 <a:solidFill>
                   <a:srgbClr val="B9C8E6"/>
                 </a:solidFill>
@@ -16855,9 +17218,20 @@
                 <a:ea typeface="Microsoft YaHei"/>
                 <a:cs typeface="Microsoft YaHei"/>
               </a:rPr>
+              <a:t>  </a:t>
+            </a:r>
+            <a:r>
+              <a:rPr sz="1020" dirty="0" err="1">
+                <a:solidFill>
+                  <a:srgbClr val="B9C8E6"/>
+                </a:solidFill>
+                <a:latin typeface="Microsoft YaHei"/>
+                <a:ea typeface="Microsoft YaHei"/>
+                <a:cs typeface="Microsoft YaHei"/>
+              </a:rPr>
               <a:t>重新初始化、清屏、固定文字</a:t>
             </a:r>
-            <a:endParaRPr sz="1020"/>
+            <a:endParaRPr sz="1020" dirty="0"/>
           </a:p>
         </p:txBody>
       </p:sp>
@@ -17012,7 +17386,7 @@
               <a:buNone/>
             </a:pPr>
             <a:r>
-              <a:rPr sz="1020">
+              <a:rPr lang="en-US" sz="1020" dirty="0">
                 <a:solidFill>
                   <a:srgbClr val="B9C8E6"/>
                 </a:solidFill>
@@ -17020,9 +17394,20 @@
                 <a:ea typeface="Microsoft YaHei"/>
                 <a:cs typeface="Microsoft YaHei"/>
               </a:rPr>
+              <a:t>  </a:t>
+            </a:r>
+            <a:r>
+              <a:rPr sz="1020" dirty="0" err="1">
+                <a:solidFill>
+                  <a:srgbClr val="B9C8E6"/>
+                </a:solidFill>
+                <a:latin typeface="Microsoft YaHei"/>
+                <a:ea typeface="Microsoft YaHei"/>
+                <a:cs typeface="Microsoft YaHei"/>
+              </a:rPr>
               <a:t>后续棋盘行接口</a:t>
             </a:r>
-            <a:endParaRPr sz="1020"/>
+            <a:endParaRPr sz="1020" dirty="0"/>
           </a:p>
         </p:txBody>
       </p:sp>
@@ -17177,7 +17562,7 @@
               <a:buNone/>
             </a:pPr>
             <a:r>
-              <a:rPr sz="1020">
+              <a:rPr lang="en-US" sz="1020" dirty="0">
                 <a:solidFill>
                   <a:srgbClr val="B9C8E6"/>
                 </a:solidFill>
@@ -17185,9 +17570,20 @@
                 <a:ea typeface="Microsoft YaHei"/>
                 <a:cs typeface="Microsoft YaHei"/>
               </a:rPr>
+              <a:t>  </a:t>
+            </a:r>
+            <a:r>
+              <a:rPr sz="1020" dirty="0" err="1">
+                <a:solidFill>
+                  <a:srgbClr val="B9C8E6"/>
+                </a:solidFill>
+                <a:latin typeface="Microsoft YaHei"/>
+                <a:ea typeface="Microsoft YaHei"/>
+                <a:cs typeface="Microsoft YaHei"/>
+              </a:rPr>
               <a:t>后续整屏刷新接口</a:t>
             </a:r>
-            <a:endParaRPr sz="1020"/>
+            <a:endParaRPr sz="1020" dirty="0"/>
           </a:p>
         </p:txBody>
       </p:sp>
@@ -17342,7 +17738,7 @@
               <a:buNone/>
             </a:pPr>
             <a:r>
-              <a:rPr sz="1020">
+              <a:rPr lang="en-US" sz="1020" dirty="0">
                 <a:solidFill>
                   <a:srgbClr val="B9C8E6"/>
                 </a:solidFill>
@@ -17350,9 +17746,20 @@
                 <a:ea typeface="Microsoft YaHei"/>
                 <a:cs typeface="Microsoft YaHei"/>
               </a:rPr>
+              <a:t>  </a:t>
+            </a:r>
+            <a:r>
+              <a:rPr sz="1020" dirty="0" err="1">
+                <a:solidFill>
+                  <a:srgbClr val="B9C8E6"/>
+                </a:solidFill>
+                <a:latin typeface="Microsoft YaHei"/>
+                <a:ea typeface="Microsoft YaHei"/>
+                <a:cs typeface="Microsoft YaHei"/>
+              </a:rPr>
               <a:t>后续蜂鸣器预留</a:t>
             </a:r>
-            <a:endParaRPr sz="1020"/>
+            <a:endParaRPr sz="1020" dirty="0"/>
           </a:p>
         </p:txBody>
       </p:sp>
@@ -18179,7 +18586,7 @@
               <a:buNone/>
             </a:pPr>
             <a:r>
-              <a:rPr sz="1200">
+              <a:rPr sz="1200" dirty="0" err="1">
                 <a:solidFill>
                   <a:srgbClr val="D9E7FF"/>
                 </a:solidFill>
@@ -18187,16 +18594,10 @@
                 <a:ea typeface="Consolas"/>
                 <a:cs typeface="Consolas"/>
               </a:rPr>
-              <a:t>wait_ready:</a:t>
-            </a:r>
-            <a:endParaRPr sz="1200"/>
-          </a:p>
-          <a:p>
-            <a:pPr marL="0" indent="0" algn="l">
-              <a:buNone/>
-            </a:pPr>
-            <a:r>
-              <a:rPr sz="1200">
+              <a:t>wait_ready</a:t>
+            </a:r>
+            <a:r>
+              <a:rPr sz="1200" dirty="0">
                 <a:solidFill>
                   <a:srgbClr val="D9E7FF"/>
                 </a:solidFill>
@@ -18204,16 +18605,16 @@
                 <a:ea typeface="Consolas"/>
                 <a:cs typeface="Consolas"/>
               </a:rPr>
-              <a:t>    lw   x12, 40(x10)      # LCD_STATUS</a:t>
-            </a:r>
-            <a:endParaRPr sz="1200"/>
+              <a:t>:</a:t>
+            </a:r>
+            <a:endParaRPr sz="1200" dirty="0"/>
           </a:p>
           <a:p>
             <a:pPr marL="0" indent="0" algn="l">
               <a:buNone/>
             </a:pPr>
             <a:r>
-              <a:rPr sz="1200">
+              <a:rPr sz="1200" dirty="0">
                 <a:solidFill>
                   <a:srgbClr val="D9E7FF"/>
                 </a:solidFill>
@@ -18221,16 +18622,10 @@
                 <a:ea typeface="Consolas"/>
                 <a:cs typeface="Consolas"/>
               </a:rPr>
-              <a:t>    andi x12, x12, 1       # ready</a:t>
-            </a:r>
-            <a:endParaRPr sz="1200"/>
-          </a:p>
-          <a:p>
-            <a:pPr marL="0" indent="0" algn="l">
-              <a:buNone/>
-            </a:pPr>
-            <a:r>
-              <a:rPr sz="1200">
+              <a:t>    </a:t>
+            </a:r>
+            <a:r>
+              <a:rPr sz="1200" dirty="0" err="1">
                 <a:solidFill>
                   <a:srgbClr val="D9E7FF"/>
                 </a:solidFill>
@@ -18238,16 +18633,10 @@
                 <a:ea typeface="Consolas"/>
                 <a:cs typeface="Consolas"/>
               </a:rPr>
-              <a:t>    beq  x12, x0, wait_ready</a:t>
-            </a:r>
-            <a:endParaRPr sz="1200"/>
-          </a:p>
-          <a:p>
-            <a:pPr marL="0" indent="0" algn="l">
-              <a:buNone/>
-            </a:pPr>
-            <a:r>
-              <a:rPr sz="1200">
+              <a:t>lw</a:t>
+            </a:r>
+            <a:r>
+              <a:rPr sz="1200" dirty="0">
                 <a:solidFill>
                   <a:srgbClr val="D9E7FF"/>
                 </a:solidFill>
@@ -18255,9 +18644,137 @@
                 <a:ea typeface="Consolas"/>
                 <a:cs typeface="Consolas"/>
               </a:rPr>
-              <a:t>    sw   x13, 32(x10)      # LCD_CMD</a:t>
-            </a:r>
-            <a:endParaRPr sz="1200"/>
+              <a:t>   x12, 40(x10)      # LCD_STATUS</a:t>
+            </a:r>
+            <a:endParaRPr sz="1200" dirty="0"/>
+          </a:p>
+          <a:p>
+            <a:pPr marL="0" indent="0" algn="l">
+              <a:buNone/>
+            </a:pPr>
+            <a:r>
+              <a:rPr sz="1200" dirty="0">
+                <a:solidFill>
+                  <a:srgbClr val="D9E7FF"/>
+                </a:solidFill>
+                <a:latin typeface="Consolas"/>
+                <a:ea typeface="Consolas"/>
+                <a:cs typeface="Consolas"/>
+              </a:rPr>
+              <a:t>    </a:t>
+            </a:r>
+            <a:r>
+              <a:rPr sz="1200" dirty="0" err="1">
+                <a:solidFill>
+                  <a:srgbClr val="D9E7FF"/>
+                </a:solidFill>
+                <a:latin typeface="Consolas"/>
+                <a:ea typeface="Consolas"/>
+                <a:cs typeface="Consolas"/>
+              </a:rPr>
+              <a:t>andi</a:t>
+            </a:r>
+            <a:r>
+              <a:rPr sz="1200" dirty="0">
+                <a:solidFill>
+                  <a:srgbClr val="D9E7FF"/>
+                </a:solidFill>
+                <a:latin typeface="Consolas"/>
+                <a:ea typeface="Consolas"/>
+                <a:cs typeface="Consolas"/>
+              </a:rPr>
+              <a:t> x12, x12, 1       # ready</a:t>
+            </a:r>
+            <a:endParaRPr sz="1200" dirty="0"/>
+          </a:p>
+          <a:p>
+            <a:pPr marL="0" indent="0" algn="l">
+              <a:buNone/>
+            </a:pPr>
+            <a:r>
+              <a:rPr sz="1200" dirty="0">
+                <a:solidFill>
+                  <a:srgbClr val="D9E7FF"/>
+                </a:solidFill>
+                <a:latin typeface="Consolas"/>
+                <a:ea typeface="Consolas"/>
+                <a:cs typeface="Consolas"/>
+              </a:rPr>
+              <a:t>    </a:t>
+            </a:r>
+            <a:r>
+              <a:rPr sz="1200" dirty="0" err="1">
+                <a:solidFill>
+                  <a:srgbClr val="D9E7FF"/>
+                </a:solidFill>
+                <a:latin typeface="Consolas"/>
+                <a:ea typeface="Consolas"/>
+                <a:cs typeface="Consolas"/>
+              </a:rPr>
+              <a:t>beq</a:t>
+            </a:r>
+            <a:r>
+              <a:rPr sz="1200" dirty="0">
+                <a:solidFill>
+                  <a:srgbClr val="D9E7FF"/>
+                </a:solidFill>
+                <a:latin typeface="Consolas"/>
+                <a:ea typeface="Consolas"/>
+                <a:cs typeface="Consolas"/>
+              </a:rPr>
+              <a:t>  x12, x0, </a:t>
+            </a:r>
+            <a:r>
+              <a:rPr sz="1200" dirty="0" err="1">
+                <a:solidFill>
+                  <a:srgbClr val="D9E7FF"/>
+                </a:solidFill>
+                <a:latin typeface="Consolas"/>
+                <a:ea typeface="Consolas"/>
+                <a:cs typeface="Consolas"/>
+              </a:rPr>
+              <a:t>wait_ready</a:t>
+            </a:r>
+            <a:endParaRPr sz="1200" dirty="0"/>
+          </a:p>
+          <a:p>
+            <a:pPr marL="0" indent="0" algn="l">
+              <a:buNone/>
+            </a:pPr>
+            <a:r>
+              <a:rPr sz="1200" dirty="0">
+                <a:solidFill>
+                  <a:srgbClr val="D9E7FF"/>
+                </a:solidFill>
+                <a:latin typeface="Consolas"/>
+                <a:ea typeface="Consolas"/>
+                <a:cs typeface="Consolas"/>
+              </a:rPr>
+              <a:t>    </a:t>
+            </a:r>
+            <a:r>
+              <a:rPr sz="1200" dirty="0" err="1">
+                <a:solidFill>
+                  <a:srgbClr val="D9E7FF"/>
+                </a:solidFill>
+                <a:latin typeface="Consolas"/>
+                <a:ea typeface="Consolas"/>
+                <a:cs typeface="Consolas"/>
+              </a:rPr>
+              <a:t>sw</a:t>
+            </a:r>
+            <a:r>
+              <a:rPr sz="1200" dirty="0">
+                <a:solidFill>
+                  <a:srgbClr val="D9E7FF"/>
+                </a:solidFill>
+                <a:latin typeface="Consolas"/>
+                <a:ea typeface="Consolas"/>
+                <a:cs typeface="Consolas"/>
+              </a:rPr>
+              <a:t>   x13, 32(x10)      # LCD_CMD</a:t>
+            </a:r>
+            <a:endParaRPr sz="1200" dirty="0"/>
           </a:p>
         </p:txBody>
       </p:sp>
@@ -18731,7 +19248,18 @@
               <a:buNone/>
             </a:pPr>
             <a:r>
-              <a:rPr sz="1170" b="1">
+              <a:rPr lang="en-US" sz="1170" b="1" dirty="0">
+                <a:solidFill>
+                  <a:srgbClr val="F7FAFF"/>
+                </a:solidFill>
+                <a:latin typeface="Microsoft YaHei"/>
+                <a:ea typeface="Microsoft YaHei"/>
+                <a:cs typeface="Microsoft YaHei"/>
+              </a:rPr>
+              <a:t>  </a:t>
+            </a:r>
+            <a:r>
+              <a:rPr sz="1170" b="1" dirty="0" err="1">
                 <a:solidFill>
                   <a:srgbClr val="F7FAFF"/>
                 </a:solidFill>
@@ -18741,31 +19269,75 @@
               </a:rPr>
               <a:t>复位与初始化</a:t>
             </a:r>
-            <a:endParaRPr sz="1170"/>
+            <a:endParaRPr sz="1170" dirty="0"/>
           </a:p>
           <a:p>
             <a:pPr marL="0" indent="0" algn="l">
               <a:buNone/>
             </a:pPr>
             <a:r>
-              <a:rPr sz="1170" b="1">
-                <a:solidFill>
-                  <a:srgbClr val="F7FAFF"/>
-                </a:solidFill>
-                <a:latin typeface="Microsoft YaHei"/>
-                <a:ea typeface="Microsoft YaHei"/>
-                <a:cs typeface="Microsoft YaHei"/>
-              </a:rPr>
-              <a:t>reset / lcd_rst_n / initialized</a:t>
-            </a:r>
-            <a:endParaRPr sz="1170"/>
+              <a:rPr lang="en-US" sz="1170" b="1" dirty="0">
+                <a:solidFill>
+                  <a:srgbClr val="F7FAFF"/>
+                </a:solidFill>
+                <a:latin typeface="Microsoft YaHei"/>
+                <a:ea typeface="Microsoft YaHei"/>
+                <a:cs typeface="Microsoft YaHei"/>
+              </a:rPr>
+              <a:t>  </a:t>
+            </a:r>
+            <a:r>
+              <a:rPr sz="1170" b="1" dirty="0">
+                <a:solidFill>
+                  <a:srgbClr val="F7FAFF"/>
+                </a:solidFill>
+                <a:latin typeface="Microsoft YaHei"/>
+                <a:ea typeface="Microsoft YaHei"/>
+                <a:cs typeface="Microsoft YaHei"/>
+              </a:rPr>
+              <a:t>reset / </a:t>
+            </a:r>
+            <a:r>
+              <a:rPr sz="1170" b="1" dirty="0" err="1">
+                <a:solidFill>
+                  <a:srgbClr val="F7FAFF"/>
+                </a:solidFill>
+                <a:latin typeface="Microsoft YaHei"/>
+                <a:ea typeface="Microsoft YaHei"/>
+                <a:cs typeface="Microsoft YaHei"/>
+              </a:rPr>
+              <a:t>lcd_rst_n</a:t>
+            </a:r>
+            <a:r>
+              <a:rPr sz="1170" b="1" dirty="0">
+                <a:solidFill>
+                  <a:srgbClr val="F7FAFF"/>
+                </a:solidFill>
+                <a:latin typeface="Microsoft YaHei"/>
+                <a:ea typeface="Microsoft YaHei"/>
+                <a:cs typeface="Microsoft YaHei"/>
+              </a:rPr>
+              <a:t> / initialized</a:t>
+            </a:r>
+            <a:endParaRPr sz="1170" dirty="0"/>
           </a:p>
           <a:p>
             <a:pPr marL="0" indent="0" algn="l">
               <a:buNone/>
             </a:pPr>
             <a:r>
-              <a:rPr sz="1170" b="1">
+              <a:rPr lang="en-US" sz="1170" b="1" dirty="0">
+                <a:solidFill>
+                  <a:srgbClr val="F7FAFF"/>
+                </a:solidFill>
+                <a:latin typeface="Microsoft YaHei"/>
+                <a:ea typeface="Microsoft YaHei"/>
+                <a:cs typeface="Microsoft YaHei"/>
+              </a:rPr>
+              <a:t>  </a:t>
+            </a:r>
+            <a:r>
+              <a:rPr sz="1170" b="1" dirty="0" err="1">
                 <a:solidFill>
                   <a:srgbClr val="F7FAFF"/>
                 </a:solidFill>
@@ -18775,7 +19347,7 @@
               </a:rPr>
               <a:t>复位保持、上电等待和初始化完成</a:t>
             </a:r>
-            <a:endParaRPr sz="1170"/>
+            <a:endParaRPr sz="1170" dirty="0"/>
           </a:p>
         </p:txBody>
       </p:sp>
@@ -18820,51 +19392,172 @@
               <a:buNone/>
             </a:pPr>
             <a:r>
-              <a:rPr sz="1170" b="1">
-                <a:solidFill>
-                  <a:srgbClr val="F7FAFF"/>
-                </a:solidFill>
-                <a:latin typeface="Microsoft YaHei"/>
-                <a:ea typeface="Microsoft YaHei"/>
-                <a:cs typeface="Microsoft YaHei"/>
-              </a:rPr>
-              <a:t>SPI 字节</a:t>
-            </a:r>
-            <a:endParaRPr sz="1170"/>
+              <a:rPr lang="en-US" sz="1170" b="1" dirty="0">
+                <a:solidFill>
+                  <a:srgbClr val="F7FAFF"/>
+                </a:solidFill>
+                <a:latin typeface="Microsoft YaHei"/>
+                <a:ea typeface="Microsoft YaHei"/>
+                <a:cs typeface="Microsoft YaHei"/>
+              </a:rPr>
+              <a:t>  </a:t>
+            </a:r>
+            <a:r>
+              <a:rPr sz="1170" b="1" dirty="0">
+                <a:solidFill>
+                  <a:srgbClr val="F7FAFF"/>
+                </a:solidFill>
+                <a:latin typeface="Microsoft YaHei"/>
+                <a:ea typeface="Microsoft YaHei"/>
+                <a:cs typeface="Microsoft YaHei"/>
+              </a:rPr>
+              <a:t>SPI </a:t>
+            </a:r>
+            <a:r>
+              <a:rPr sz="1170" b="1" dirty="0" err="1">
+                <a:solidFill>
+                  <a:srgbClr val="F7FAFF"/>
+                </a:solidFill>
+                <a:latin typeface="Microsoft YaHei"/>
+                <a:ea typeface="Microsoft YaHei"/>
+                <a:cs typeface="Microsoft YaHei"/>
+              </a:rPr>
+              <a:t>字节</a:t>
+            </a:r>
+            <a:endParaRPr sz="1170" dirty="0"/>
           </a:p>
           <a:p>
             <a:pPr marL="0" indent="0" algn="l">
               <a:buNone/>
             </a:pPr>
             <a:r>
-              <a:rPr sz="1170" b="1">
-                <a:solidFill>
-                  <a:srgbClr val="F7FAFF"/>
-                </a:solidFill>
-                <a:latin typeface="Microsoft YaHei"/>
-                <a:ea typeface="Microsoft YaHei"/>
-                <a:cs typeface="Microsoft YaHei"/>
-              </a:rPr>
-              <a:t>cs_n / sck / mosi / rs</a:t>
-            </a:r>
-            <a:endParaRPr sz="1170"/>
+              <a:rPr lang="en-US" sz="1170" b="1" dirty="0">
+                <a:solidFill>
+                  <a:srgbClr val="F7FAFF"/>
+                </a:solidFill>
+                <a:latin typeface="Microsoft YaHei"/>
+                <a:ea typeface="Microsoft YaHei"/>
+                <a:cs typeface="Microsoft YaHei"/>
+              </a:rPr>
+              <a:t>  </a:t>
+            </a:r>
+            <a:r>
+              <a:rPr sz="1170" b="1" dirty="0" err="1">
+                <a:solidFill>
+                  <a:srgbClr val="F7FAFF"/>
+                </a:solidFill>
+                <a:latin typeface="Microsoft YaHei"/>
+                <a:ea typeface="Microsoft YaHei"/>
+                <a:cs typeface="Microsoft YaHei"/>
+              </a:rPr>
+              <a:t>cs_n</a:t>
+            </a:r>
+            <a:r>
+              <a:rPr sz="1170" b="1" dirty="0">
+                <a:solidFill>
+                  <a:srgbClr val="F7FAFF"/>
+                </a:solidFill>
+                <a:latin typeface="Microsoft YaHei"/>
+                <a:ea typeface="Microsoft YaHei"/>
+                <a:cs typeface="Microsoft YaHei"/>
+              </a:rPr>
+              <a:t> / </a:t>
+            </a:r>
+            <a:r>
+              <a:rPr sz="1170" b="1" dirty="0" err="1">
+                <a:solidFill>
+                  <a:srgbClr val="F7FAFF"/>
+                </a:solidFill>
+                <a:latin typeface="Microsoft YaHei"/>
+                <a:ea typeface="Microsoft YaHei"/>
+                <a:cs typeface="Microsoft YaHei"/>
+              </a:rPr>
+              <a:t>sck</a:t>
+            </a:r>
+            <a:r>
+              <a:rPr sz="1170" b="1" dirty="0">
+                <a:solidFill>
+                  <a:srgbClr val="F7FAFF"/>
+                </a:solidFill>
+                <a:latin typeface="Microsoft YaHei"/>
+                <a:ea typeface="Microsoft YaHei"/>
+                <a:cs typeface="Microsoft YaHei"/>
+              </a:rPr>
+              <a:t> / </a:t>
+            </a:r>
+            <a:r>
+              <a:rPr sz="1170" b="1" dirty="0" err="1">
+                <a:solidFill>
+                  <a:srgbClr val="F7FAFF"/>
+                </a:solidFill>
+                <a:latin typeface="Microsoft YaHei"/>
+                <a:ea typeface="Microsoft YaHei"/>
+                <a:cs typeface="Microsoft YaHei"/>
+              </a:rPr>
+              <a:t>mosi</a:t>
+            </a:r>
+            <a:r>
+              <a:rPr sz="1170" b="1" dirty="0">
+                <a:solidFill>
+                  <a:srgbClr val="F7FAFF"/>
+                </a:solidFill>
+                <a:latin typeface="Microsoft YaHei"/>
+                <a:ea typeface="Microsoft YaHei"/>
+                <a:cs typeface="Microsoft YaHei"/>
+              </a:rPr>
+              <a:t> / </a:t>
+            </a:r>
+            <a:r>
+              <a:rPr sz="1170" b="1" dirty="0" err="1">
+                <a:solidFill>
+                  <a:srgbClr val="F7FAFF"/>
+                </a:solidFill>
+                <a:latin typeface="Microsoft YaHei"/>
+                <a:ea typeface="Microsoft YaHei"/>
+                <a:cs typeface="Microsoft YaHei"/>
+              </a:rPr>
+              <a:t>rs</a:t>
+            </a:r>
+            <a:endParaRPr sz="1170" dirty="0"/>
           </a:p>
           <a:p>
             <a:pPr marL="0" indent="0" algn="l">
               <a:buNone/>
             </a:pPr>
             <a:r>
-              <a:rPr sz="1170" b="1">
-                <a:solidFill>
-                  <a:srgbClr val="F7FAFF"/>
-                </a:solidFill>
-                <a:latin typeface="Microsoft YaHei"/>
-                <a:ea typeface="Microsoft YaHei"/>
-                <a:cs typeface="Microsoft YaHei"/>
-              </a:rPr>
-              <a:t>8 位 MSB first，命令与数据区分</a:t>
-            </a:r>
-            <a:endParaRPr sz="1170"/>
+              <a:rPr lang="en-US" sz="1170" b="1" dirty="0">
+                <a:solidFill>
+                  <a:srgbClr val="F7FAFF"/>
+                </a:solidFill>
+                <a:latin typeface="Microsoft YaHei"/>
+                <a:ea typeface="Microsoft YaHei"/>
+                <a:cs typeface="Microsoft YaHei"/>
+              </a:rPr>
+              <a:t>  </a:t>
+            </a:r>
+            <a:r>
+              <a:rPr sz="1170" b="1" dirty="0">
+                <a:solidFill>
+                  <a:srgbClr val="F7FAFF"/>
+                </a:solidFill>
+                <a:latin typeface="Microsoft YaHei"/>
+                <a:ea typeface="Microsoft YaHei"/>
+                <a:cs typeface="Microsoft YaHei"/>
+              </a:rPr>
+              <a:t>8 位 MSB </a:t>
+            </a:r>
+            <a:r>
+              <a:rPr sz="1170" b="1" dirty="0" err="1">
+                <a:solidFill>
+                  <a:srgbClr val="F7FAFF"/>
+                </a:solidFill>
+                <a:latin typeface="Microsoft YaHei"/>
+                <a:ea typeface="Microsoft YaHei"/>
+                <a:cs typeface="Microsoft YaHei"/>
+              </a:rPr>
+              <a:t>first，命令与数据区分</a:t>
+            </a:r>
+            <a:endParaRPr sz="1170" dirty="0"/>
           </a:p>
         </p:txBody>
       </p:sp>
@@ -18909,7 +19602,18 @@
               <a:buNone/>
             </a:pPr>
             <a:r>
-              <a:rPr sz="1170" b="1">
+              <a:rPr lang="en-US" sz="1170" b="1" dirty="0">
+                <a:solidFill>
+                  <a:srgbClr val="F7FAFF"/>
+                </a:solidFill>
+                <a:latin typeface="Microsoft YaHei"/>
+                <a:ea typeface="Microsoft YaHei"/>
+                <a:cs typeface="Microsoft YaHei"/>
+              </a:rPr>
+              <a:t>  </a:t>
+            </a:r>
+            <a:r>
+              <a:rPr sz="1170" b="1" dirty="0">
                 <a:solidFill>
                   <a:srgbClr val="F7FAFF"/>
                 </a:solidFill>
@@ -18919,41 +19623,107 @@
               </a:rPr>
               <a:t>ready / valid</a:t>
             </a:r>
-            <a:endParaRPr sz="1170"/>
+            <a:endParaRPr sz="1170" dirty="0"/>
           </a:p>
           <a:p>
             <a:pPr marL="0" indent="0" algn="l">
               <a:buNone/>
             </a:pPr>
             <a:r>
-              <a:rPr sz="1170" b="1">
-                <a:solidFill>
-                  <a:srgbClr val="F7FAFF"/>
-                </a:solidFill>
-                <a:latin typeface="Microsoft YaHei"/>
-                <a:ea typeface="Microsoft YaHei"/>
-                <a:cs typeface="Microsoft YaHei"/>
-              </a:rPr>
-              <a:t>tx_valid / tx_ready / state</a:t>
-            </a:r>
-            <a:endParaRPr sz="1170"/>
+              <a:rPr lang="en-US" sz="1170" b="1" dirty="0">
+                <a:solidFill>
+                  <a:srgbClr val="F7FAFF"/>
+                </a:solidFill>
+                <a:latin typeface="Microsoft YaHei"/>
+                <a:ea typeface="Microsoft YaHei"/>
+                <a:cs typeface="Microsoft YaHei"/>
+              </a:rPr>
+              <a:t>  </a:t>
+            </a:r>
+            <a:r>
+              <a:rPr sz="1170" b="1" dirty="0" err="1">
+                <a:solidFill>
+                  <a:srgbClr val="F7FAFF"/>
+                </a:solidFill>
+                <a:latin typeface="Microsoft YaHei"/>
+                <a:ea typeface="Microsoft YaHei"/>
+                <a:cs typeface="Microsoft YaHei"/>
+              </a:rPr>
+              <a:t>tx_valid</a:t>
+            </a:r>
+            <a:r>
+              <a:rPr sz="1170" b="1" dirty="0">
+                <a:solidFill>
+                  <a:srgbClr val="F7FAFF"/>
+                </a:solidFill>
+                <a:latin typeface="Microsoft YaHei"/>
+                <a:ea typeface="Microsoft YaHei"/>
+                <a:cs typeface="Microsoft YaHei"/>
+              </a:rPr>
+              <a:t> / </a:t>
+            </a:r>
+            <a:r>
+              <a:rPr sz="1170" b="1" dirty="0" err="1">
+                <a:solidFill>
+                  <a:srgbClr val="F7FAFF"/>
+                </a:solidFill>
+                <a:latin typeface="Microsoft YaHei"/>
+                <a:ea typeface="Microsoft YaHei"/>
+                <a:cs typeface="Microsoft YaHei"/>
+              </a:rPr>
+              <a:t>tx_ready</a:t>
+            </a:r>
+            <a:r>
+              <a:rPr sz="1170" b="1" dirty="0">
+                <a:solidFill>
+                  <a:srgbClr val="F7FAFF"/>
+                </a:solidFill>
+                <a:latin typeface="Microsoft YaHei"/>
+                <a:ea typeface="Microsoft YaHei"/>
+                <a:cs typeface="Microsoft YaHei"/>
+              </a:rPr>
+              <a:t> / state</a:t>
+            </a:r>
+            <a:endParaRPr sz="1170" dirty="0"/>
           </a:p>
           <a:p>
             <a:pPr marL="0" indent="0" algn="l">
               <a:buNone/>
             </a:pPr>
             <a:r>
-              <a:rPr sz="1170" b="1">
-                <a:solidFill>
-                  <a:srgbClr val="F7FAFF"/>
-                </a:solidFill>
-                <a:latin typeface="Microsoft YaHei"/>
-                <a:ea typeface="Microsoft YaHei"/>
-                <a:cs typeface="Microsoft YaHei"/>
-              </a:rPr>
-              <a:t>忙时拒绝，完成后恢复 ready</a:t>
-            </a:r>
-            <a:endParaRPr sz="1170"/>
+              <a:rPr lang="en-US" sz="1170" b="1" dirty="0">
+                <a:solidFill>
+                  <a:srgbClr val="F7FAFF"/>
+                </a:solidFill>
+                <a:latin typeface="Microsoft YaHei"/>
+                <a:ea typeface="Microsoft YaHei"/>
+                <a:cs typeface="Microsoft YaHei"/>
+              </a:rPr>
+              <a:t>  </a:t>
+            </a:r>
+            <a:r>
+              <a:rPr sz="1170" b="1" dirty="0" err="1">
+                <a:solidFill>
+                  <a:srgbClr val="F7FAFF"/>
+                </a:solidFill>
+                <a:latin typeface="Microsoft YaHei"/>
+                <a:ea typeface="Microsoft YaHei"/>
+                <a:cs typeface="Microsoft YaHei"/>
+              </a:rPr>
+              <a:t>忙时拒绝，完成后恢复</a:t>
+            </a:r>
+            <a:r>
+              <a:rPr sz="1170" b="1" dirty="0">
+                <a:solidFill>
+                  <a:srgbClr val="F7FAFF"/>
+                </a:solidFill>
+                <a:latin typeface="Microsoft YaHei"/>
+                <a:ea typeface="Microsoft YaHei"/>
+                <a:cs typeface="Microsoft YaHei"/>
+              </a:rPr>
+              <a:t> ready</a:t>
+            </a:r>
+            <a:endParaRPr sz="1170" dirty="0"/>
           </a:p>
         </p:txBody>
       </p:sp>
@@ -18998,51 +19768,128 @@
               <a:buNone/>
             </a:pPr>
             <a:r>
-              <a:rPr sz="1170" b="1">
-                <a:solidFill>
-                  <a:srgbClr val="F7FAFF"/>
-                </a:solidFill>
-                <a:latin typeface="Microsoft YaHei"/>
-                <a:ea typeface="Microsoft YaHei"/>
-                <a:cs typeface="Microsoft YaHei"/>
-              </a:rPr>
-              <a:t>MMIO 等待</a:t>
-            </a:r>
-            <a:endParaRPr sz="1170"/>
+              <a:rPr lang="en-US" sz="1170" b="1" dirty="0">
+                <a:solidFill>
+                  <a:srgbClr val="F7FAFF"/>
+                </a:solidFill>
+                <a:latin typeface="Microsoft YaHei"/>
+                <a:ea typeface="Microsoft YaHei"/>
+                <a:cs typeface="Microsoft YaHei"/>
+              </a:rPr>
+              <a:t>  </a:t>
+            </a:r>
+            <a:r>
+              <a:rPr sz="1170" b="1" dirty="0">
+                <a:solidFill>
+                  <a:srgbClr val="F7FAFF"/>
+                </a:solidFill>
+                <a:latin typeface="Microsoft YaHei"/>
+                <a:ea typeface="Microsoft YaHei"/>
+                <a:cs typeface="Microsoft YaHei"/>
+              </a:rPr>
+              <a:t>MMIO </a:t>
+            </a:r>
+            <a:r>
+              <a:rPr sz="1170" b="1" dirty="0" err="1">
+                <a:solidFill>
+                  <a:srgbClr val="F7FAFF"/>
+                </a:solidFill>
+                <a:latin typeface="Microsoft YaHei"/>
+                <a:ea typeface="Microsoft YaHei"/>
+                <a:cs typeface="Microsoft YaHei"/>
+              </a:rPr>
+              <a:t>等待</a:t>
+            </a:r>
+            <a:endParaRPr sz="1170" dirty="0"/>
           </a:p>
           <a:p>
             <a:pPr marL="0" indent="0" algn="l">
               <a:buNone/>
             </a:pPr>
             <a:r>
-              <a:rPr sz="1170" b="1">
-                <a:solidFill>
-                  <a:srgbClr val="F7FAFF"/>
-                </a:solidFill>
-                <a:latin typeface="Microsoft YaHei"/>
-                <a:ea typeface="Microsoft YaHei"/>
-                <a:cs typeface="Microsoft YaHei"/>
-              </a:rPr>
-              <a:t>dmem_req / ready / 写脉冲</a:t>
-            </a:r>
-            <a:endParaRPr sz="1170"/>
+              <a:rPr lang="en-US" sz="1170" b="1" dirty="0">
+                <a:solidFill>
+                  <a:srgbClr val="F7FAFF"/>
+                </a:solidFill>
+                <a:latin typeface="Microsoft YaHei"/>
+                <a:ea typeface="Microsoft YaHei"/>
+                <a:cs typeface="Microsoft YaHei"/>
+              </a:rPr>
+              <a:t>  </a:t>
+            </a:r>
+            <a:r>
+              <a:rPr sz="1170" b="1" dirty="0" err="1">
+                <a:solidFill>
+                  <a:srgbClr val="F7FAFF"/>
+                </a:solidFill>
+                <a:latin typeface="Microsoft YaHei"/>
+                <a:ea typeface="Microsoft YaHei"/>
+                <a:cs typeface="Microsoft YaHei"/>
+              </a:rPr>
+              <a:t>dmem_req</a:t>
+            </a:r>
+            <a:r>
+              <a:rPr sz="1170" b="1" dirty="0">
+                <a:solidFill>
+                  <a:srgbClr val="F7FAFF"/>
+                </a:solidFill>
+                <a:latin typeface="Microsoft YaHei"/>
+                <a:ea typeface="Microsoft YaHei"/>
+                <a:cs typeface="Microsoft YaHei"/>
+              </a:rPr>
+              <a:t> / ready / </a:t>
+            </a:r>
+            <a:r>
+              <a:rPr sz="1170" b="1" dirty="0" err="1">
+                <a:solidFill>
+                  <a:srgbClr val="F7FAFF"/>
+                </a:solidFill>
+                <a:latin typeface="Microsoft YaHei"/>
+                <a:ea typeface="Microsoft YaHei"/>
+                <a:cs typeface="Microsoft YaHei"/>
+              </a:rPr>
+              <a:t>写脉冲</a:t>
+            </a:r>
+            <a:endParaRPr sz="1170" dirty="0"/>
           </a:p>
           <a:p>
             <a:pPr marL="0" indent="0" algn="l">
               <a:buNone/>
             </a:pPr>
             <a:r>
-              <a:rPr sz="1170" b="1">
-                <a:solidFill>
-                  <a:srgbClr val="F7FAFF"/>
-                </a:solidFill>
-                <a:latin typeface="Microsoft YaHei"/>
-                <a:ea typeface="Microsoft YaHei"/>
-                <a:cs typeface="Microsoft YaHei"/>
-              </a:rPr>
-              <a:t>CPU 等待且一次请求只发送一次</a:t>
-            </a:r>
-            <a:endParaRPr sz="1170"/>
+              <a:rPr lang="en-US" sz="1170" b="1" dirty="0">
+                <a:solidFill>
+                  <a:srgbClr val="F7FAFF"/>
+                </a:solidFill>
+                <a:latin typeface="Microsoft YaHei"/>
+                <a:ea typeface="Microsoft YaHei"/>
+                <a:cs typeface="Microsoft YaHei"/>
+              </a:rPr>
+              <a:t>  </a:t>
+            </a:r>
+            <a:r>
+              <a:rPr sz="1170" b="1" dirty="0">
+                <a:solidFill>
+                  <a:srgbClr val="F7FAFF"/>
+                </a:solidFill>
+                <a:latin typeface="Microsoft YaHei"/>
+                <a:ea typeface="Microsoft YaHei"/>
+                <a:cs typeface="Microsoft YaHei"/>
+              </a:rPr>
+              <a:t>CPU </a:t>
+            </a:r>
+            <a:r>
+              <a:rPr sz="1170" b="1" dirty="0" err="1">
+                <a:solidFill>
+                  <a:srgbClr val="F7FAFF"/>
+                </a:solidFill>
+                <a:latin typeface="Microsoft YaHei"/>
+                <a:ea typeface="Microsoft YaHei"/>
+                <a:cs typeface="Microsoft YaHei"/>
+              </a:rPr>
+              <a:t>等待且一次请求只发送一次</a:t>
+            </a:r>
+            <a:endParaRPr sz="1170" dirty="0"/>
           </a:p>
         </p:txBody>
       </p:sp>

--- a/docs/中期汇报ppt/汇编中期_含仿真补充_三人答辩补充版_修复版.pptx
+++ b/docs/中期汇报ppt/汇编中期_含仿真补充_三人答辩补充版_修复版.pptx
@@ -5,24 +5,24 @@
     <p:sldMasterId id="2147483648" r:id="rId1"/>
   </p:sldMasterIdLst>
   <p:notesMasterIdLst>
-    <p:notesMasterId r:id="rId17"/>
+    <p:notesMasterId r:id="rId4"/>
   </p:notesMasterIdLst>
   <p:sldIdLst>
-    <p:sldId id="256" r:id="rId2"/>
-    <p:sldId id="257" r:id="rId3"/>
-    <p:sldId id="258" r:id="rId4"/>
-    <p:sldId id="259" r:id="rId5"/>
-    <p:sldId id="260" r:id="rId6"/>
-    <p:sldId id="261" r:id="rId7"/>
-    <p:sldId id="262" r:id="rId8"/>
-    <p:sldId id="263" r:id="rId9"/>
-    <p:sldId id="264" r:id="rId10"/>
-    <p:sldId id="1010" r:id="rId11"/>
-    <p:sldId id="1011" r:id="rId12"/>
-    <p:sldId id="265" r:id="rId13"/>
-    <p:sldId id="1013" r:id="rId14"/>
-    <p:sldId id="1014" r:id="rId15"/>
-    <p:sldId id="266" r:id="rId16"/>
+    <p:sldId id="256" r:id="rId3"/>
+    <p:sldId id="257" r:id="rId5"/>
+    <p:sldId id="258" r:id="rId6"/>
+    <p:sldId id="259" r:id="rId7"/>
+    <p:sldId id="260" r:id="rId8"/>
+    <p:sldId id="261" r:id="rId9"/>
+    <p:sldId id="262" r:id="rId10"/>
+    <p:sldId id="263" r:id="rId11"/>
+    <p:sldId id="264" r:id="rId12"/>
+    <p:sldId id="1010" r:id="rId13"/>
+    <p:sldId id="1011" r:id="rId14"/>
+    <p:sldId id="265" r:id="rId15"/>
+    <p:sldId id="1013" r:id="rId16"/>
+    <p:sldId id="1014" r:id="rId17"/>
+    <p:sldId id="266" r:id="rId18"/>
   </p:sldIdLst>
   <p:sldSz cx="12192000" cy="6858000"/>
   <p:notesSz cx="6858000" cy="9144000"/>
@@ -121,11 +121,6 @@
       </a:defRPr>
     </a:lvl9pPr>
   </p:defaultTextStyle>
-  <p:extLst>
-    <p:ext uri="{EFAFB233-063F-42B5-8137-9DF3F51BA10A}">
-      <p15:sldGuideLst xmlns:p15="http://schemas.microsoft.com/office/powerpoint/2012/main"/>
-    </p:ext>
-  </p:extLst>
 </p:presentation>
 </file>
 
@@ -169,9 +164,7 @@
         <p:txBody>
           <a:bodyPr/>
           <a:lstStyle/>
-          <a:p>
-            <a:endParaRPr/>
-          </a:p>
+          <a:p/>
         </p:txBody>
       </p:sp>
       <p:sp>
@@ -192,9 +185,7 @@
         <p:txBody>
           <a:bodyPr/>
           <a:lstStyle/>
-          <a:p>
-            <a:endParaRPr/>
-          </a:p>
+          <a:p/>
         </p:txBody>
       </p:sp>
       <p:sp>
@@ -215,9 +206,7 @@
         <p:txBody>
           <a:bodyPr/>
           <a:lstStyle/>
-          <a:p>
-            <a:endParaRPr/>
-          </a:p>
+          <a:p/>
         </p:txBody>
       </p:sp>
       <p:sp>
@@ -238,9 +227,7 @@
         <p:txBody>
           <a:bodyPr/>
           <a:lstStyle/>
-          <a:p>
-            <a:endParaRPr/>
-          </a:p>
+          <a:p/>
         </p:txBody>
       </p:sp>
       <p:sp>
@@ -261,9 +248,7 @@
         <p:txBody>
           <a:bodyPr/>
           <a:lstStyle/>
-          <a:p>
-            <a:endParaRPr/>
-          </a:p>
+          <a:p/>
         </p:txBody>
       </p:sp>
       <p:sp>
@@ -284,9 +269,7 @@
         <p:txBody>
           <a:bodyPr/>
           <a:lstStyle/>
-          <a:p>
-            <a:endParaRPr/>
-          </a:p>
+          <a:p/>
         </p:txBody>
       </p:sp>
     </p:spTree>
@@ -367,9 +350,7 @@
         <p:txBody>
           <a:bodyPr/>
           <a:lstStyle/>
-          <a:p>
-            <a:endParaRPr/>
-          </a:p>
+          <a:p/>
         </p:txBody>
       </p:sp>
     </p:spTree>
@@ -464,9 +445,7 @@
         <p:txBody>
           <a:bodyPr/>
           <a:lstStyle/>
-          <a:p>
-            <a:endParaRPr/>
-          </a:p>
+          <a:p/>
         </p:txBody>
       </p:sp>
     </p:spTree>
@@ -544,9 +523,7 @@
         <p:txBody>
           <a:bodyPr/>
           <a:lstStyle/>
-          <a:p>
-            <a:endParaRPr/>
-          </a:p>
+          <a:p/>
         </p:txBody>
       </p:sp>
     </p:spTree>
@@ -625,9 +602,7 @@
         <p:txBody>
           <a:bodyPr/>
           <a:lstStyle/>
-          <a:p>
-            <a:endParaRPr/>
-          </a:p>
+          <a:p/>
         </p:txBody>
       </p:sp>
     </p:spTree>
@@ -707,9 +682,7 @@
         <p:txBody>
           <a:bodyPr/>
           <a:lstStyle/>
-          <a:p>
-            <a:endParaRPr/>
-          </a:p>
+          <a:p/>
         </p:txBody>
       </p:sp>
     </p:spTree>
@@ -788,9 +761,7 @@
         <p:txBody>
           <a:bodyPr/>
           <a:lstStyle/>
-          <a:p>
-            <a:endParaRPr/>
-          </a:p>
+          <a:p/>
         </p:txBody>
       </p:sp>
     </p:spTree>
@@ -868,9 +839,7 @@
         <p:txBody>
           <a:bodyPr/>
           <a:lstStyle/>
-          <a:p>
-            <a:endParaRPr/>
-          </a:p>
+          <a:p/>
         </p:txBody>
       </p:sp>
     </p:spTree>
@@ -949,9 +918,7 @@
         <p:txBody>
           <a:bodyPr/>
           <a:lstStyle/>
-          <a:p>
-            <a:endParaRPr/>
-          </a:p>
+          <a:p/>
         </p:txBody>
       </p:sp>
     </p:spTree>
@@ -1030,9 +997,7 @@
         <p:txBody>
           <a:bodyPr/>
           <a:lstStyle/>
-          <a:p>
-            <a:endParaRPr/>
-          </a:p>
+          <a:p/>
         </p:txBody>
       </p:sp>
     </p:spTree>
@@ -1111,9 +1076,7 @@
         <p:txBody>
           <a:bodyPr/>
           <a:lstStyle/>
-          <a:p>
-            <a:endParaRPr/>
-          </a:p>
+          <a:p/>
         </p:txBody>
       </p:sp>
     </p:spTree>
@@ -1193,9 +1156,7 @@
         <p:txBody>
           <a:bodyPr/>
           <a:lstStyle/>
-          <a:p>
-            <a:endParaRPr/>
-          </a:p>
+          <a:p/>
         </p:txBody>
       </p:sp>
     </p:spTree>
@@ -1321,7 +1282,7 @@
         <a:spcBef>
           <a:spcPct val="20000"/>
         </a:spcBef>
-        <a:buFont typeface="Arial"/>
+        <a:buFont typeface="Arial" panose="020B0604020202020204"/>
         <a:buChar char="•"/>
         <a:defRPr sz="3200" kern="1200">
           <a:solidFill>
@@ -1336,7 +1297,7 @@
         <a:spcBef>
           <a:spcPct val="20000"/>
         </a:spcBef>
-        <a:buFont typeface="Arial"/>
+        <a:buFont typeface="Arial" panose="020B0604020202020204"/>
         <a:buChar char="–"/>
         <a:defRPr sz="2800" kern="1200">
           <a:solidFill>
@@ -1351,7 +1312,7 @@
         <a:spcBef>
           <a:spcPct val="20000"/>
         </a:spcBef>
-        <a:buFont typeface="Arial"/>
+        <a:buFont typeface="Arial" panose="020B0604020202020204"/>
         <a:buChar char="•"/>
         <a:defRPr sz="2400" kern="1200">
           <a:solidFill>
@@ -1366,7 +1327,7 @@
         <a:spcBef>
           <a:spcPct val="20000"/>
         </a:spcBef>
-        <a:buFont typeface="Arial"/>
+        <a:buFont typeface="Arial" panose="020B0604020202020204"/>
         <a:buChar char="–"/>
         <a:defRPr sz="2000" kern="1200">
           <a:solidFill>
@@ -1381,7 +1342,7 @@
         <a:spcBef>
           <a:spcPct val="20000"/>
         </a:spcBef>
-        <a:buFont typeface="Arial"/>
+        <a:buFont typeface="Arial" panose="020B0604020202020204"/>
         <a:buChar char="»"/>
         <a:defRPr sz="2000" kern="1200">
           <a:solidFill>
@@ -1396,7 +1357,7 @@
         <a:spcBef>
           <a:spcPct val="20000"/>
         </a:spcBef>
-        <a:buFont typeface="Arial"/>
+        <a:buFont typeface="Arial" panose="020B0604020202020204"/>
         <a:buChar char="•"/>
         <a:defRPr sz="2000" kern="1200">
           <a:solidFill>
@@ -1411,7 +1372,7 @@
         <a:spcBef>
           <a:spcPct val="20000"/>
         </a:spcBef>
-        <a:buFont typeface="Arial"/>
+        <a:buFont typeface="Arial" panose="020B0604020202020204"/>
         <a:buChar char="•"/>
         <a:defRPr sz="2000" kern="1200">
           <a:solidFill>
@@ -1426,7 +1387,7 @@
         <a:spcBef>
           <a:spcPct val="20000"/>
         </a:spcBef>
-        <a:buFont typeface="Arial"/>
+        <a:buFont typeface="Arial" panose="020B0604020202020204"/>
         <a:buChar char="•"/>
         <a:defRPr sz="2000" kern="1200">
           <a:solidFill>
@@ -1441,7 +1402,7 @@
         <a:spcBef>
           <a:spcPct val="20000"/>
         </a:spcBef>
-        <a:buFont typeface="Arial"/>
+        <a:buFont typeface="Arial" panose="020B0604020202020204"/>
         <a:buChar char="•"/>
         <a:defRPr sz="2000" kern="1200">
           <a:solidFill>
@@ -1585,13 +1546,7 @@
       </p:grpSpPr>
       <p:sp>
         <p:nvSpPr>
-          <p:cNvPr id="2" name="Text 0">
-            <a:extLst>
-              <a:ext uri="{FF2B5EF4-FFF2-40B4-BE49-F238E27FC236}">
-                <a16:creationId xmlns:a16="http://schemas.microsoft.com/office/drawing/2014/main" id="{D6B393A8-EF0A-44FA-A18E-E47DC89C8109}"/>
-              </a:ext>
-            </a:extLst>
-          </p:cNvPr>
+          <p:cNvPr id="2" name="Text 0"/>
           <p:cNvSpPr>
             <a:spLocks noGrp="1"/>
           </p:cNvSpPr>
@@ -1631,13 +1586,7 @@
       </p:sp>
       <p:sp>
         <p:nvSpPr>
-          <p:cNvPr id="3" name="Shape 1">
-            <a:extLst>
-              <a:ext uri="{FF2B5EF4-FFF2-40B4-BE49-F238E27FC236}">
-                <a16:creationId xmlns:a16="http://schemas.microsoft.com/office/drawing/2014/main" id="{EA71F02D-F30A-4DB9-81D2-F9CD84D26A5D}"/>
-              </a:ext>
-            </a:extLst>
-          </p:cNvPr>
+          <p:cNvPr id="3" name="Shape 1"/>
           <p:cNvSpPr>
             <a:spLocks noGrp="1"/>
           </p:cNvSpPr>
@@ -1662,13 +1611,7 @@
       </p:sp>
       <p:sp>
         <p:nvSpPr>
-          <p:cNvPr id="4" name="Text 2">
-            <a:extLst>
-              <a:ext uri="{FF2B5EF4-FFF2-40B4-BE49-F238E27FC236}">
-                <a16:creationId xmlns:a16="http://schemas.microsoft.com/office/drawing/2014/main" id="{60206D78-D612-4611-B43E-658B675C9312}"/>
-              </a:ext>
-            </a:extLst>
-          </p:cNvPr>
+          <p:cNvPr id="4" name="Text 2"/>
           <p:cNvSpPr>
             <a:spLocks noGrp="1"/>
           </p:cNvSpPr>
@@ -1744,13 +1687,7 @@
       </p:sp>
       <p:sp>
         <p:nvSpPr>
-          <p:cNvPr id="5" name="Text 3">
-            <a:extLst>
-              <a:ext uri="{FF2B5EF4-FFF2-40B4-BE49-F238E27FC236}">
-                <a16:creationId xmlns:a16="http://schemas.microsoft.com/office/drawing/2014/main" id="{0AE72E1B-1DA7-47CB-97FA-95AF1EF315AC}"/>
-              </a:ext>
-            </a:extLst>
-          </p:cNvPr>
+          <p:cNvPr id="5" name="Text 3"/>
           <p:cNvSpPr>
             <a:spLocks noGrp="1"/>
           </p:cNvSpPr>
@@ -1790,13 +1727,7 @@
       </p:sp>
       <p:sp>
         <p:nvSpPr>
-          <p:cNvPr id="6" name="Text 4">
-            <a:extLst>
-              <a:ext uri="{FF2B5EF4-FFF2-40B4-BE49-F238E27FC236}">
-                <a16:creationId xmlns:a16="http://schemas.microsoft.com/office/drawing/2014/main" id="{BE363CDA-A595-4337-87E6-87F1923D597C}"/>
-              </a:ext>
-            </a:extLst>
-          </p:cNvPr>
+          <p:cNvPr id="6" name="Text 4"/>
           <p:cNvSpPr>
             <a:spLocks noGrp="1"/>
           </p:cNvSpPr>
@@ -1878,13 +1809,7 @@
       </p:sp>
       <p:sp>
         <p:nvSpPr>
-          <p:cNvPr id="7" name="Text 5">
-            <a:extLst>
-              <a:ext uri="{FF2B5EF4-FFF2-40B4-BE49-F238E27FC236}">
-                <a16:creationId xmlns:a16="http://schemas.microsoft.com/office/drawing/2014/main" id="{43C7F6B6-1CE3-4C5F-BDED-8DCCBDDAD65E}"/>
-              </a:ext>
-            </a:extLst>
-          </p:cNvPr>
+          <p:cNvPr id="7" name="Text 5"/>
           <p:cNvSpPr>
             <a:spLocks noGrp="1"/>
           </p:cNvSpPr>
@@ -1955,13 +1880,7 @@
       </p:sp>
       <p:sp>
         <p:nvSpPr>
-          <p:cNvPr id="8" name="Shape 6">
-            <a:extLst>
-              <a:ext uri="{FF2B5EF4-FFF2-40B4-BE49-F238E27FC236}">
-                <a16:creationId xmlns:a16="http://schemas.microsoft.com/office/drawing/2014/main" id="{5D790FF1-4067-4E65-B0C0-A16B6743073A}"/>
-              </a:ext>
-            </a:extLst>
-          </p:cNvPr>
+          <p:cNvPr id="8" name="Shape 6"/>
           <p:cNvSpPr>
             <a:spLocks noGrp="1"/>
           </p:cNvSpPr>
@@ -1988,13 +1907,7 @@
       </p:sp>
       <p:sp>
         <p:nvSpPr>
-          <p:cNvPr id="9" name="Text 7">
-            <a:extLst>
-              <a:ext uri="{FF2B5EF4-FFF2-40B4-BE49-F238E27FC236}">
-                <a16:creationId xmlns:a16="http://schemas.microsoft.com/office/drawing/2014/main" id="{BC938AF2-F43E-463B-93AE-8A714C4085D4}"/>
-              </a:ext>
-            </a:extLst>
-          </p:cNvPr>
+          <p:cNvPr id="9" name="Text 7"/>
           <p:cNvSpPr>
             <a:spLocks noGrp="1"/>
           </p:cNvSpPr>
@@ -2034,13 +1947,7 @@
       </p:sp>
       <p:sp>
         <p:nvSpPr>
-          <p:cNvPr id="10" name="Shape 8">
-            <a:extLst>
-              <a:ext uri="{FF2B5EF4-FFF2-40B4-BE49-F238E27FC236}">
-                <a16:creationId xmlns:a16="http://schemas.microsoft.com/office/drawing/2014/main" id="{0127B41C-0D64-4621-B25E-E01ABB286754}"/>
-              </a:ext>
-            </a:extLst>
-          </p:cNvPr>
+          <p:cNvPr id="10" name="Shape 8"/>
           <p:cNvSpPr>
             <a:spLocks noGrp="1"/>
           </p:cNvSpPr>
@@ -2067,13 +1974,7 @@
       </p:sp>
       <p:sp>
         <p:nvSpPr>
-          <p:cNvPr id="11" name="Text 9">
-            <a:extLst>
-              <a:ext uri="{FF2B5EF4-FFF2-40B4-BE49-F238E27FC236}">
-                <a16:creationId xmlns:a16="http://schemas.microsoft.com/office/drawing/2014/main" id="{8F3ECAE9-AA90-4292-9B75-9F84ADC188A9}"/>
-              </a:ext>
-            </a:extLst>
-          </p:cNvPr>
+          <p:cNvPr id="11" name="Text 9"/>
           <p:cNvSpPr>
             <a:spLocks noGrp="1"/>
           </p:cNvSpPr>
@@ -2115,13 +2016,7 @@
       </p:sp>
       <p:sp>
         <p:nvSpPr>
-          <p:cNvPr id="12" name="Shape 10">
-            <a:extLst>
-              <a:ext uri="{FF2B5EF4-FFF2-40B4-BE49-F238E27FC236}">
-                <a16:creationId xmlns:a16="http://schemas.microsoft.com/office/drawing/2014/main" id="{228FB9A8-14E3-4D43-96B5-EAE97872AFED}"/>
-              </a:ext>
-            </a:extLst>
-          </p:cNvPr>
+          <p:cNvPr id="12" name="Shape 10"/>
           <p:cNvSpPr>
             <a:spLocks noGrp="1"/>
           </p:cNvSpPr>
@@ -2146,13 +2041,7 @@
       </p:sp>
       <p:sp>
         <p:nvSpPr>
-          <p:cNvPr id="13" name="Text 11">
-            <a:extLst>
-              <a:ext uri="{FF2B5EF4-FFF2-40B4-BE49-F238E27FC236}">
-                <a16:creationId xmlns:a16="http://schemas.microsoft.com/office/drawing/2014/main" id="{852E1B79-EFDF-42ED-B6F9-C7C9A938D114}"/>
-              </a:ext>
-            </a:extLst>
-          </p:cNvPr>
+          <p:cNvPr id="13" name="Text 11"/>
           <p:cNvSpPr>
             <a:spLocks noGrp="1"/>
           </p:cNvSpPr>
@@ -2194,13 +2083,7 @@
       </p:sp>
       <p:sp>
         <p:nvSpPr>
-          <p:cNvPr id="14" name="Shape 12">
-            <a:extLst>
-              <a:ext uri="{FF2B5EF4-FFF2-40B4-BE49-F238E27FC236}">
-                <a16:creationId xmlns:a16="http://schemas.microsoft.com/office/drawing/2014/main" id="{85F03247-0F1E-4EEC-91BB-6B1344E8A22D}"/>
-              </a:ext>
-            </a:extLst>
-          </p:cNvPr>
+          <p:cNvPr id="14" name="Shape 12"/>
           <p:cNvSpPr>
             <a:spLocks noGrp="1"/>
           </p:cNvSpPr>
@@ -2225,13 +2108,7 @@
       </p:sp>
       <p:sp>
         <p:nvSpPr>
-          <p:cNvPr id="15" name="Text 13">
-            <a:extLst>
-              <a:ext uri="{FF2B5EF4-FFF2-40B4-BE49-F238E27FC236}">
-                <a16:creationId xmlns:a16="http://schemas.microsoft.com/office/drawing/2014/main" id="{609668A8-8C0F-42BD-A23E-2733ED4401B4}"/>
-              </a:ext>
-            </a:extLst>
-          </p:cNvPr>
+          <p:cNvPr id="15" name="Text 13"/>
           <p:cNvSpPr>
             <a:spLocks noGrp="1"/>
           </p:cNvSpPr>
@@ -2273,13 +2150,7 @@
       </p:sp>
       <p:sp>
         <p:nvSpPr>
-          <p:cNvPr id="16" name="Shape 14">
-            <a:extLst>
-              <a:ext uri="{FF2B5EF4-FFF2-40B4-BE49-F238E27FC236}">
-                <a16:creationId xmlns:a16="http://schemas.microsoft.com/office/drawing/2014/main" id="{890D6B74-C1DB-4E5E-836B-1CF28344A113}"/>
-              </a:ext>
-            </a:extLst>
-          </p:cNvPr>
+          <p:cNvPr id="16" name="Shape 14"/>
           <p:cNvSpPr>
             <a:spLocks noGrp="1"/>
           </p:cNvSpPr>
@@ -2304,13 +2175,7 @@
       </p:sp>
       <p:sp>
         <p:nvSpPr>
-          <p:cNvPr id="17" name="Text 15">
-            <a:extLst>
-              <a:ext uri="{FF2B5EF4-FFF2-40B4-BE49-F238E27FC236}">
-                <a16:creationId xmlns:a16="http://schemas.microsoft.com/office/drawing/2014/main" id="{5A57F0DC-AB71-412F-AE64-9109F9E65A8B}"/>
-              </a:ext>
-            </a:extLst>
-          </p:cNvPr>
+          <p:cNvPr id="17" name="Text 15"/>
           <p:cNvSpPr>
             <a:spLocks noGrp="1"/>
           </p:cNvSpPr>
@@ -2352,13 +2217,7 @@
       </p:sp>
       <p:sp>
         <p:nvSpPr>
-          <p:cNvPr id="18" name="Shape 16">
-            <a:extLst>
-              <a:ext uri="{FF2B5EF4-FFF2-40B4-BE49-F238E27FC236}">
-                <a16:creationId xmlns:a16="http://schemas.microsoft.com/office/drawing/2014/main" id="{4E950DB8-444C-4953-B625-09F2011DC306}"/>
-              </a:ext>
-            </a:extLst>
-          </p:cNvPr>
+          <p:cNvPr id="18" name="Shape 16"/>
           <p:cNvSpPr>
             <a:spLocks noGrp="1"/>
           </p:cNvSpPr>
@@ -2383,13 +2242,7 @@
       </p:sp>
       <p:sp>
         <p:nvSpPr>
-          <p:cNvPr id="19" name="Text 17">
-            <a:extLst>
-              <a:ext uri="{FF2B5EF4-FFF2-40B4-BE49-F238E27FC236}">
-                <a16:creationId xmlns:a16="http://schemas.microsoft.com/office/drawing/2014/main" id="{F2331CCD-D5E8-40B3-9B82-E02E459D3C3C}"/>
-              </a:ext>
-            </a:extLst>
-          </p:cNvPr>
+          <p:cNvPr id="19" name="Text 17"/>
           <p:cNvSpPr>
             <a:spLocks noGrp="1"/>
           </p:cNvSpPr>
@@ -2431,13 +2284,7 @@
       </p:sp>
       <p:sp>
         <p:nvSpPr>
-          <p:cNvPr id="20" name="Shape 18">
-            <a:extLst>
-              <a:ext uri="{FF2B5EF4-FFF2-40B4-BE49-F238E27FC236}">
-                <a16:creationId xmlns:a16="http://schemas.microsoft.com/office/drawing/2014/main" id="{3097AC90-1F9F-414C-AF47-6137B0B4803F}"/>
-              </a:ext>
-            </a:extLst>
-          </p:cNvPr>
+          <p:cNvPr id="20" name="Shape 18"/>
           <p:cNvSpPr>
             <a:spLocks noGrp="1"/>
           </p:cNvSpPr>
@@ -2462,13 +2309,7 @@
       </p:sp>
       <p:sp>
         <p:nvSpPr>
-          <p:cNvPr id="21" name="Text 19">
-            <a:extLst>
-              <a:ext uri="{FF2B5EF4-FFF2-40B4-BE49-F238E27FC236}">
-                <a16:creationId xmlns:a16="http://schemas.microsoft.com/office/drawing/2014/main" id="{8596064C-28E5-47A7-BEC1-6C7E0324DC18}"/>
-              </a:ext>
-            </a:extLst>
-          </p:cNvPr>
+          <p:cNvPr id="21" name="Text 19"/>
           <p:cNvSpPr>
             <a:spLocks noGrp="1"/>
           </p:cNvSpPr>
@@ -2508,13 +2349,7 @@
       </p:sp>
       <p:sp>
         <p:nvSpPr>
-          <p:cNvPr id="22" name="Text 20">
-            <a:extLst>
-              <a:ext uri="{FF2B5EF4-FFF2-40B4-BE49-F238E27FC236}">
-                <a16:creationId xmlns:a16="http://schemas.microsoft.com/office/drawing/2014/main" id="{A43B492F-134C-48B5-80C1-F24429441DB2}"/>
-              </a:ext>
-            </a:extLst>
-          </p:cNvPr>
+          <p:cNvPr id="22" name="Text 20"/>
           <p:cNvSpPr>
             <a:spLocks noGrp="1"/>
           </p:cNvSpPr>
@@ -2555,11 +2390,6 @@
         </p:txBody>
       </p:sp>
     </p:spTree>
-    <p:extLst>
-      <p:ext uri="{BB962C8B-B14F-4D97-AF65-F5344CB8AC3E}">
-        <p14:creationId xmlns:p14="http://schemas.microsoft.com/office/powerpoint/2010/main" val="345503116"/>
-      </p:ext>
-    </p:extLst>
   </p:cSld>
   <p:clrMapOvr>
     <a:masterClrMapping/>
@@ -2594,13 +2424,7 @@
       </p:grpSpPr>
       <p:sp>
         <p:nvSpPr>
-          <p:cNvPr id="2" name="矩形 1">
-            <a:extLst>
-              <a:ext uri="{FF2B5EF4-FFF2-40B4-BE49-F238E27FC236}">
-                <a16:creationId xmlns:a16="http://schemas.microsoft.com/office/drawing/2014/main" id="{89AE908F-3AC6-4CDC-BF13-4BE44375B57F}"/>
-              </a:ext>
-            </a:extLst>
-          </p:cNvPr>
+          <p:cNvPr id="2" name="矩形 1"/>
           <p:cNvSpPr>
             <a:spLocks noGrp="1"/>
           </p:cNvSpPr>
@@ -2646,18 +2470,20 @@
               </a:rPr>
               <a:t>中期答辩补充</a:t>
             </a:r>
-          </a:p>
-        </p:txBody>
-      </p:sp>
-      <p:sp>
-        <p:nvSpPr>
-          <p:cNvPr id="3" name="矩形 2">
-            <a:extLst>
-              <a:ext uri="{FF2B5EF4-FFF2-40B4-BE49-F238E27FC236}">
-                <a16:creationId xmlns:a16="http://schemas.microsoft.com/office/drawing/2014/main" id="{7783D8FC-1059-4A4B-87BD-5997E868D506}"/>
-              </a:ext>
-            </a:extLst>
-          </p:cNvPr>
+            <a:endParaRPr sz="900" b="1">
+              <a:solidFill>
+                <a:srgbClr val="22D3EE"/>
+              </a:solidFill>
+              <a:latin typeface="Microsoft YaHei"/>
+              <a:ea typeface="Microsoft YaHei"/>
+              <a:cs typeface="Microsoft YaHei"/>
+            </a:endParaRPr>
+          </a:p>
+        </p:txBody>
+      </p:sp>
+      <p:sp>
+        <p:nvSpPr>
+          <p:cNvPr id="3" name="矩形 2"/>
           <p:cNvSpPr>
             <a:spLocks noGrp="1"/>
           </p:cNvSpPr>
@@ -2703,18 +2529,20 @@
               </a:rPr>
               <a:t>LCD 单元测试与检查条件</a:t>
             </a:r>
-          </a:p>
-        </p:txBody>
-      </p:sp>
-      <p:sp>
-        <p:nvSpPr>
-          <p:cNvPr id="4" name="矩形 3">
-            <a:extLst>
-              <a:ext uri="{FF2B5EF4-FFF2-40B4-BE49-F238E27FC236}">
-                <a16:creationId xmlns:a16="http://schemas.microsoft.com/office/drawing/2014/main" id="{D5E0C0E8-829E-4DE9-9AE6-817D5B5AEEDA}"/>
-              </a:ext>
-            </a:extLst>
-          </p:cNvPr>
+            <a:endParaRPr sz="2400" b="1">
+              <a:solidFill>
+                <a:srgbClr val="F7FAFF"/>
+              </a:solidFill>
+              <a:latin typeface="Microsoft YaHei"/>
+              <a:ea typeface="Microsoft YaHei"/>
+              <a:cs typeface="Microsoft YaHei"/>
+            </a:endParaRPr>
+          </a:p>
+        </p:txBody>
+      </p:sp>
+      <p:sp>
+        <p:nvSpPr>
+          <p:cNvPr id="4" name="矩形 3"/>
           <p:cNvSpPr>
             <a:spLocks noGrp="1"/>
           </p:cNvSpPr>
@@ -2760,18 +2588,20 @@
               </a:rPr>
               <a:t>依据现有 testbench 说明可复现检查项</a:t>
             </a:r>
-          </a:p>
-        </p:txBody>
-      </p:sp>
-      <p:sp>
-        <p:nvSpPr>
-          <p:cNvPr id="5" name="矩形 4">
-            <a:extLst>
-              <a:ext uri="{FF2B5EF4-FFF2-40B4-BE49-F238E27FC236}">
-                <a16:creationId xmlns:a16="http://schemas.microsoft.com/office/drawing/2014/main" id="{A10E2047-E572-4F4F-ACA3-BAF61B743F29}"/>
-              </a:ext>
-            </a:extLst>
-          </p:cNvPr>
+            <a:endParaRPr sz="1275" b="0">
+              <a:solidFill>
+                <a:srgbClr val="BAC9E2"/>
+              </a:solidFill>
+              <a:latin typeface="Microsoft YaHei"/>
+              <a:ea typeface="Microsoft YaHei"/>
+              <a:cs typeface="Microsoft YaHei"/>
+            </a:endParaRPr>
+          </a:p>
+        </p:txBody>
+      </p:sp>
+      <p:sp>
+        <p:nvSpPr>
+          <p:cNvPr id="5" name="矩形 4"/>
           <p:cNvSpPr>
             <a:spLocks noGrp="1"/>
           </p:cNvSpPr>
@@ -2817,18 +2647,20 @@
               </a:rPr>
               <a:t>SPI 单元测试</a:t>
             </a:r>
-          </a:p>
-        </p:txBody>
-      </p:sp>
-      <p:sp>
-        <p:nvSpPr>
-          <p:cNvPr id="6" name="矩形 5">
-            <a:extLst>
-              <a:ext uri="{FF2B5EF4-FFF2-40B4-BE49-F238E27FC236}">
-                <a16:creationId xmlns:a16="http://schemas.microsoft.com/office/drawing/2014/main" id="{351394D8-14DE-4EFC-BDF8-60FD366DFE90}"/>
-              </a:ext>
-            </a:extLst>
-          </p:cNvPr>
+            <a:endParaRPr sz="1650" b="1">
+              <a:solidFill>
+                <a:srgbClr val="22D3EE"/>
+              </a:solidFill>
+              <a:latin typeface="Microsoft YaHei"/>
+              <a:ea typeface="Microsoft YaHei"/>
+              <a:cs typeface="Microsoft YaHei"/>
+            </a:endParaRPr>
+          </a:p>
+        </p:txBody>
+      </p:sp>
+      <p:sp>
+        <p:nvSpPr>
+          <p:cNvPr id="6" name="矩形 5"/>
           <p:cNvSpPr>
             <a:spLocks noGrp="1"/>
           </p:cNvSpPr>
@@ -2874,18 +2706,20 @@
               </a:rPr>
               <a:t>发送 0xA5，上升沿采集恰好 8 位，RS 保持为 1</a:t>
             </a:r>
-          </a:p>
-        </p:txBody>
-      </p:sp>
-      <p:sp>
-        <p:nvSpPr>
-          <p:cNvPr id="7" name="矩形 6">
-            <a:extLst>
-              <a:ext uri="{FF2B5EF4-FFF2-40B4-BE49-F238E27FC236}">
-                <a16:creationId xmlns:a16="http://schemas.microsoft.com/office/drawing/2014/main" id="{FA7BB2BA-0B79-4DE5-B408-8097162AEC94}"/>
-              </a:ext>
-            </a:extLst>
-          </p:cNvPr>
+            <a:endParaRPr sz="1575" b="0">
+              <a:solidFill>
+                <a:srgbClr val="F7FAFF"/>
+              </a:solidFill>
+              <a:latin typeface="Microsoft YaHei"/>
+              <a:ea typeface="Microsoft YaHei"/>
+              <a:cs typeface="Microsoft YaHei"/>
+            </a:endParaRPr>
+          </a:p>
+        </p:txBody>
+      </p:sp>
+      <p:sp>
+        <p:nvSpPr>
+          <p:cNvPr id="7" name="矩形 6"/>
           <p:cNvSpPr>
             <a:spLocks noGrp="1"/>
           </p:cNvSpPr>
@@ -2931,18 +2765,20 @@
               </a:rPr>
               <a:t>空闲恢复</a:t>
             </a:r>
-          </a:p>
-        </p:txBody>
-      </p:sp>
-      <p:sp>
-        <p:nvSpPr>
-          <p:cNvPr id="8" name="矩形 7">
-            <a:extLst>
-              <a:ext uri="{FF2B5EF4-FFF2-40B4-BE49-F238E27FC236}">
-                <a16:creationId xmlns:a16="http://schemas.microsoft.com/office/drawing/2014/main" id="{3C559AF1-00BF-4716-83E9-65DB1B566F28}"/>
-              </a:ext>
-            </a:extLst>
-          </p:cNvPr>
+            <a:endParaRPr sz="1650" b="1">
+              <a:solidFill>
+                <a:srgbClr val="22D3EE"/>
+              </a:solidFill>
+              <a:latin typeface="Microsoft YaHei"/>
+              <a:ea typeface="Microsoft YaHei"/>
+              <a:cs typeface="Microsoft YaHei"/>
+            </a:endParaRPr>
+          </a:p>
+        </p:txBody>
+      </p:sp>
+      <p:sp>
+        <p:nvSpPr>
+          <p:cNvPr id="8" name="矩形 7"/>
           <p:cNvSpPr>
             <a:spLocks noGrp="1"/>
           </p:cNvSpPr>
@@ -2988,18 +2824,20 @@
               </a:rPr>
               <a:t>完成后 CS = 1、SCK = 0，ready 恢复为 1</a:t>
             </a:r>
-          </a:p>
-        </p:txBody>
-      </p:sp>
-      <p:sp>
-        <p:nvSpPr>
-          <p:cNvPr id="9" name="矩形 8">
-            <a:extLst>
-              <a:ext uri="{FF2B5EF4-FFF2-40B4-BE49-F238E27FC236}">
-                <a16:creationId xmlns:a16="http://schemas.microsoft.com/office/drawing/2014/main" id="{0D4C1B93-BB8D-45DB-A9D8-E7C8415E4B02}"/>
-              </a:ext>
-            </a:extLst>
-          </p:cNvPr>
+            <a:endParaRPr sz="1575" b="0">
+              <a:solidFill>
+                <a:srgbClr val="F7FAFF"/>
+              </a:solidFill>
+              <a:latin typeface="Microsoft YaHei"/>
+              <a:ea typeface="Microsoft YaHei"/>
+              <a:cs typeface="Microsoft YaHei"/>
+            </a:endParaRPr>
+          </a:p>
+        </p:txBody>
+      </p:sp>
+      <p:sp>
+        <p:nvSpPr>
+          <p:cNvPr id="9" name="矩形 8"/>
           <p:cNvSpPr>
             <a:spLocks noGrp="1"/>
           </p:cNvSpPr>
@@ -3045,18 +2883,20 @@
               </a:rPr>
               <a:t>控制器测试</a:t>
             </a:r>
-          </a:p>
-        </p:txBody>
-      </p:sp>
-      <p:sp>
-        <p:nvSpPr>
-          <p:cNvPr id="10" name="矩形 9">
-            <a:extLst>
-              <a:ext uri="{FF2B5EF4-FFF2-40B4-BE49-F238E27FC236}">
-                <a16:creationId xmlns:a16="http://schemas.microsoft.com/office/drawing/2014/main" id="{4A8DC6E3-884A-4CC9-990E-98E8C034FD53}"/>
-              </a:ext>
-            </a:extLst>
-          </p:cNvPr>
+            <a:endParaRPr sz="1650" b="1">
+              <a:solidFill>
+                <a:srgbClr val="22D3EE"/>
+              </a:solidFill>
+              <a:latin typeface="Microsoft YaHei"/>
+              <a:ea typeface="Microsoft YaHei"/>
+              <a:cs typeface="Microsoft YaHei"/>
+            </a:endParaRPr>
+          </a:p>
+        </p:txBody>
+      </p:sp>
+      <p:sp>
+        <p:nvSpPr>
+          <p:cNvPr id="10" name="矩形 9"/>
           <p:cNvSpPr>
             <a:spLocks noGrp="1"/>
           </p:cNvSpPr>
@@ -3102,18 +2942,20 @@
               </a:rPr>
               <a:t>缩短延时与清屏规模，初始化 36 次传输，用户字节后累计 37 次</a:t>
             </a:r>
-          </a:p>
-        </p:txBody>
-      </p:sp>
-      <p:sp>
-        <p:nvSpPr>
-          <p:cNvPr id="11" name="矩形 10">
-            <a:extLst>
-              <a:ext uri="{FF2B5EF4-FFF2-40B4-BE49-F238E27FC236}">
-                <a16:creationId xmlns:a16="http://schemas.microsoft.com/office/drawing/2014/main" id="{8507B47B-AB05-4517-995F-B2F8CEE6C53F}"/>
-              </a:ext>
-            </a:extLst>
-          </p:cNvPr>
+            <a:endParaRPr sz="1575" b="0">
+              <a:solidFill>
+                <a:srgbClr val="F7FAFF"/>
+              </a:solidFill>
+              <a:latin typeface="Microsoft YaHei"/>
+              <a:ea typeface="Microsoft YaHei"/>
+              <a:cs typeface="Microsoft YaHei"/>
+            </a:endParaRPr>
+          </a:p>
+        </p:txBody>
+      </p:sp>
+      <p:sp>
+        <p:nvSpPr>
+          <p:cNvPr id="11" name="矩形 10"/>
           <p:cNvSpPr>
             <a:spLocks noGrp="1"/>
           </p:cNvSpPr>
@@ -3159,18 +3001,20 @@
               </a:rPr>
               <a:t>证据边界</a:t>
             </a:r>
-          </a:p>
-        </p:txBody>
-      </p:sp>
-      <p:sp>
-        <p:nvSpPr>
-          <p:cNvPr id="12" name="矩形 11">
-            <a:extLst>
-              <a:ext uri="{FF2B5EF4-FFF2-40B4-BE49-F238E27FC236}">
-                <a16:creationId xmlns:a16="http://schemas.microsoft.com/office/drawing/2014/main" id="{5274DCAE-A301-4F1C-A874-04CCCDB886BE}"/>
-              </a:ext>
-            </a:extLst>
-          </p:cNvPr>
+            <a:endParaRPr sz="1650" b="1">
+              <a:solidFill>
+                <a:srgbClr val="22D3EE"/>
+              </a:solidFill>
+              <a:latin typeface="Microsoft YaHei"/>
+              <a:ea typeface="Microsoft YaHei"/>
+              <a:cs typeface="Microsoft YaHei"/>
+            </a:endParaRPr>
+          </a:p>
+        </p:txBody>
+      </p:sp>
+      <p:sp>
+        <p:nvSpPr>
+          <p:cNvPr id="12" name="矩形 11"/>
           <p:cNvSpPr>
             <a:spLocks noGrp="1"/>
           </p:cNvSpPr>
@@ -3216,18 +3060,20 @@
               </a:rPr>
               <a:t>以上为源码断言条件。CPU 波形不替代 LCD 协议波形</a:t>
             </a:r>
-          </a:p>
-        </p:txBody>
-      </p:sp>
-      <p:sp>
-        <p:nvSpPr>
-          <p:cNvPr id="14" name="Text 3">
-            <a:extLst>
-              <a:ext uri="{FF2B5EF4-FFF2-40B4-BE49-F238E27FC236}">
-                <a16:creationId xmlns:a16="http://schemas.microsoft.com/office/drawing/2014/main" id="{223BF5F1-EE61-4758-9100-06C1CBFE28A4}"/>
-              </a:ext>
-            </a:extLst>
-          </p:cNvPr>
+            <a:endParaRPr sz="1575" b="0">
+              <a:solidFill>
+                <a:srgbClr val="F7FAFF"/>
+              </a:solidFill>
+              <a:latin typeface="Microsoft YaHei"/>
+              <a:ea typeface="Microsoft YaHei"/>
+              <a:cs typeface="Microsoft YaHei"/>
+            </a:endParaRPr>
+          </a:p>
+        </p:txBody>
+      </p:sp>
+      <p:sp>
+        <p:nvSpPr>
+          <p:cNvPr id="14" name="Text 3"/>
           <p:cNvSpPr>
             <a:spLocks noGrp="1"/>
           </p:cNvSpPr>
@@ -3267,13 +3113,7 @@
       </p:sp>
       <p:sp>
         <p:nvSpPr>
-          <p:cNvPr id="16" name="Text 16">
-            <a:extLst>
-              <a:ext uri="{FF2B5EF4-FFF2-40B4-BE49-F238E27FC236}">
-                <a16:creationId xmlns:a16="http://schemas.microsoft.com/office/drawing/2014/main" id="{043AE058-A566-474E-A1CD-89BFFA0E3340}"/>
-              </a:ext>
-            </a:extLst>
-          </p:cNvPr>
+          <p:cNvPr id="16" name="Text 16"/>
           <p:cNvSpPr>
             <a:spLocks noGrp="1"/>
           </p:cNvSpPr>
@@ -3314,11 +3154,6 @@
         </p:txBody>
       </p:sp>
     </p:spTree>
-    <p:extLst>
-      <p:ext uri="{BB962C8B-B14F-4D97-AF65-F5344CB8AC3E}">
-        <p14:creationId xmlns:p14="http://schemas.microsoft.com/office/powerpoint/2010/main" val="618736400"/>
-      </p:ext>
-    </p:extLst>
   </p:cSld>
   <p:clrMapOvr>
     <a:masterClrMapping/>
@@ -3353,13 +3188,7 @@
       </p:grpSpPr>
       <p:sp>
         <p:nvSpPr>
-          <p:cNvPr id="2" name="矩形 1">
-            <a:extLst>
-              <a:ext uri="{FF2B5EF4-FFF2-40B4-BE49-F238E27FC236}">
-                <a16:creationId xmlns:a16="http://schemas.microsoft.com/office/drawing/2014/main" id="{6A8C8EFA-2F7D-4982-8194-792BB0A73DDA}"/>
-              </a:ext>
-            </a:extLst>
-          </p:cNvPr>
+          <p:cNvPr id="2" name="矩形 1"/>
           <p:cNvSpPr>
             <a:spLocks noGrp="1"/>
           </p:cNvSpPr>
@@ -3405,18 +3234,20 @@
               </a:rPr>
               <a:t>中期答辩补充</a:t>
             </a:r>
-          </a:p>
-        </p:txBody>
-      </p:sp>
-      <p:sp>
-        <p:nvSpPr>
-          <p:cNvPr id="3" name="矩形 2">
-            <a:extLst>
-              <a:ext uri="{FF2B5EF4-FFF2-40B4-BE49-F238E27FC236}">
-                <a16:creationId xmlns:a16="http://schemas.microsoft.com/office/drawing/2014/main" id="{F24FADBB-9CDD-431F-B49A-F267B91C5693}"/>
-              </a:ext>
-            </a:extLst>
-          </p:cNvPr>
+            <a:endParaRPr sz="900" b="1">
+              <a:solidFill>
+                <a:srgbClr val="22D3EE"/>
+              </a:solidFill>
+              <a:latin typeface="Microsoft YaHei"/>
+              <a:ea typeface="Microsoft YaHei"/>
+              <a:cs typeface="Microsoft YaHei"/>
+            </a:endParaRPr>
+          </a:p>
+        </p:txBody>
+      </p:sp>
+      <p:sp>
+        <p:nvSpPr>
+          <p:cNvPr id="3" name="矩形 2"/>
           <p:cNvSpPr>
             <a:spLocks noGrp="1"/>
           </p:cNvSpPr>
@@ -3462,18 +3293,20 @@
               </a:rPr>
               <a:t>MMIO 请求保持与单次接收</a:t>
             </a:r>
-          </a:p>
-        </p:txBody>
-      </p:sp>
-      <p:sp>
-        <p:nvSpPr>
-          <p:cNvPr id="4" name="矩形 3">
-            <a:extLst>
-              <a:ext uri="{FF2B5EF4-FFF2-40B4-BE49-F238E27FC236}">
-                <a16:creationId xmlns:a16="http://schemas.microsoft.com/office/drawing/2014/main" id="{71E2BB05-C36C-4AF0-83F6-10E143F8B33C}"/>
-              </a:ext>
-            </a:extLst>
-          </p:cNvPr>
+            <a:endParaRPr sz="2400" b="1">
+              <a:solidFill>
+                <a:srgbClr val="F7FAFF"/>
+              </a:solidFill>
+              <a:latin typeface="Microsoft YaHei"/>
+              <a:ea typeface="Microsoft YaHei"/>
+              <a:cs typeface="Microsoft YaHei"/>
+            </a:endParaRPr>
+          </a:p>
+        </p:txBody>
+      </p:sp>
+      <p:sp>
+        <p:nvSpPr>
+          <p:cNvPr id="4" name="矩形 3"/>
           <p:cNvSpPr>
             <a:spLocks noGrp="1"/>
           </p:cNvSpPr>
@@ -3519,18 +3352,20 @@
               </a:rPr>
               <a:t>CPU 和 LCD 通过 ready 协同，写操作在总线完成条件下生效</a:t>
             </a:r>
-          </a:p>
-        </p:txBody>
-      </p:sp>
-      <p:sp>
-        <p:nvSpPr>
-          <p:cNvPr id="5" name="矩形 4">
-            <a:extLst>
-              <a:ext uri="{FF2B5EF4-FFF2-40B4-BE49-F238E27FC236}">
-                <a16:creationId xmlns:a16="http://schemas.microsoft.com/office/drawing/2014/main" id="{231C1FEB-CC0F-4651-A5BC-397109CA3332}"/>
-              </a:ext>
-            </a:extLst>
-          </p:cNvPr>
+            <a:endParaRPr sz="1275" b="0">
+              <a:solidFill>
+                <a:srgbClr val="BAC9E2"/>
+              </a:solidFill>
+              <a:latin typeface="Microsoft YaHei"/>
+              <a:ea typeface="Microsoft YaHei"/>
+              <a:cs typeface="Microsoft YaHei"/>
+            </a:endParaRPr>
+          </a:p>
+        </p:txBody>
+      </p:sp>
+      <p:sp>
+        <p:nvSpPr>
+          <p:cNvPr id="5" name="矩形 4"/>
           <p:cNvSpPr>
             <a:spLocks noGrp="1"/>
           </p:cNvSpPr>
@@ -3576,18 +3411,20 @@
               </a:rPr>
               <a:t>等待期间</a:t>
             </a:r>
-          </a:p>
-        </p:txBody>
-      </p:sp>
-      <p:sp>
-        <p:nvSpPr>
-          <p:cNvPr id="6" name="矩形 5">
-            <a:extLst>
-              <a:ext uri="{FF2B5EF4-FFF2-40B4-BE49-F238E27FC236}">
-                <a16:creationId xmlns:a16="http://schemas.microsoft.com/office/drawing/2014/main" id="{FBCC97BA-897A-466F-8792-271125FEB7AB}"/>
-              </a:ext>
-            </a:extLst>
-          </p:cNvPr>
+            <a:endParaRPr sz="1650" b="1">
+              <a:solidFill>
+                <a:srgbClr val="22D3EE"/>
+              </a:solidFill>
+              <a:latin typeface="Microsoft YaHei"/>
+              <a:ea typeface="Microsoft YaHei"/>
+              <a:cs typeface="Microsoft YaHei"/>
+            </a:endParaRPr>
+          </a:p>
+        </p:txBody>
+      </p:sp>
+      <p:sp>
+        <p:nvSpPr>
+          <p:cNvPr id="6" name="矩形 5"/>
           <p:cNvSpPr>
             <a:spLocks noGrp="1"/>
           </p:cNvSpPr>
@@ -3633,18 +3470,20 @@
               </a:rPr>
               <a:t>bus_req 保持有效，地址与数据保持，bus_ready = 0</a:t>
             </a:r>
-          </a:p>
-        </p:txBody>
-      </p:sp>
-      <p:sp>
-        <p:nvSpPr>
-          <p:cNvPr id="7" name="矩形 6">
-            <a:extLst>
-              <a:ext uri="{FF2B5EF4-FFF2-40B4-BE49-F238E27FC236}">
-                <a16:creationId xmlns:a16="http://schemas.microsoft.com/office/drawing/2014/main" id="{DD4A99A9-7691-437F-B36E-8F1C0D2AC8F3}"/>
-              </a:ext>
-            </a:extLst>
-          </p:cNvPr>
+            <a:endParaRPr sz="1575" b="0">
+              <a:solidFill>
+                <a:srgbClr val="F7FAFF"/>
+              </a:solidFill>
+              <a:latin typeface="Microsoft YaHei"/>
+              <a:ea typeface="Microsoft YaHei"/>
+              <a:cs typeface="Microsoft YaHei"/>
+            </a:endParaRPr>
+          </a:p>
+        </p:txBody>
+      </p:sp>
+      <p:sp>
+        <p:nvSpPr>
+          <p:cNvPr id="7" name="矩形 6"/>
           <p:cNvSpPr>
             <a:spLocks noGrp="1"/>
           </p:cNvSpPr>
@@ -3690,18 +3529,20 @@
               </a:rPr>
               <a:t>完成条件</a:t>
             </a:r>
-          </a:p>
-        </p:txBody>
-      </p:sp>
-      <p:sp>
-        <p:nvSpPr>
-          <p:cNvPr id="8" name="矩形 7">
-            <a:extLst>
-              <a:ext uri="{FF2B5EF4-FFF2-40B4-BE49-F238E27FC236}">
-                <a16:creationId xmlns:a16="http://schemas.microsoft.com/office/drawing/2014/main" id="{D8D3B2BE-1F57-4087-848C-A571EEB565E2}"/>
-              </a:ext>
-            </a:extLst>
-          </p:cNvPr>
+            <a:endParaRPr sz="1650" b="1">
+              <a:solidFill>
+                <a:srgbClr val="22D3EE"/>
+              </a:solidFill>
+              <a:latin typeface="Microsoft YaHei"/>
+              <a:ea typeface="Microsoft YaHei"/>
+              <a:cs typeface="Microsoft YaHei"/>
+            </a:endParaRPr>
+          </a:p>
+        </p:txBody>
+      </p:sp>
+      <p:sp>
+        <p:nvSpPr>
+          <p:cNvPr id="8" name="矩形 7"/>
           <p:cNvSpPr>
             <a:spLocks noGrp="1"/>
           </p:cNvSpPr>
@@ -3747,18 +3588,20 @@
               </a:rPr>
               <a:t>bus_req &amp;&amp; bus_ready &amp;&amp; bus_write 才产生 LCD 写脉冲</a:t>
             </a:r>
-          </a:p>
-        </p:txBody>
-      </p:sp>
-      <p:sp>
-        <p:nvSpPr>
-          <p:cNvPr id="9" name="矩形 8">
-            <a:extLst>
-              <a:ext uri="{FF2B5EF4-FFF2-40B4-BE49-F238E27FC236}">
-                <a16:creationId xmlns:a16="http://schemas.microsoft.com/office/drawing/2014/main" id="{C59BDC22-8441-4F82-BDCD-CF5373672EA2}"/>
-              </a:ext>
-            </a:extLst>
-          </p:cNvPr>
+            <a:endParaRPr sz="1575" b="0">
+              <a:solidFill>
+                <a:srgbClr val="F7FAFF"/>
+              </a:solidFill>
+              <a:latin typeface="Microsoft YaHei"/>
+              <a:ea typeface="Microsoft YaHei"/>
+              <a:cs typeface="Microsoft YaHei"/>
+            </a:endParaRPr>
+          </a:p>
+        </p:txBody>
+      </p:sp>
+      <p:sp>
+        <p:nvSpPr>
+          <p:cNvPr id="9" name="矩形 8"/>
           <p:cNvSpPr>
             <a:spLocks noGrp="1"/>
           </p:cNvSpPr>
@@ -3804,18 +3647,20 @@
               </a:rPr>
               <a:t>LCD 接收</a:t>
             </a:r>
-          </a:p>
-        </p:txBody>
-      </p:sp>
-      <p:sp>
-        <p:nvSpPr>
-          <p:cNvPr id="10" name="矩形 9">
-            <a:extLst>
-              <a:ext uri="{FF2B5EF4-FFF2-40B4-BE49-F238E27FC236}">
-                <a16:creationId xmlns:a16="http://schemas.microsoft.com/office/drawing/2014/main" id="{23F913A9-DB09-4DD2-8395-DB424F7F2BB7}"/>
-              </a:ext>
-            </a:extLst>
-          </p:cNvPr>
+            <a:endParaRPr sz="1650" b="1">
+              <a:solidFill>
+                <a:srgbClr val="22D3EE"/>
+              </a:solidFill>
+              <a:latin typeface="Microsoft YaHei"/>
+              <a:ea typeface="Microsoft YaHei"/>
+              <a:cs typeface="Microsoft YaHei"/>
+            </a:endParaRPr>
+          </a:p>
+        </p:txBody>
+      </p:sp>
+      <p:sp>
+        <p:nvSpPr>
+          <p:cNvPr id="10" name="矩形 9"/>
           <p:cNvSpPr>
             <a:spLocks noGrp="1"/>
           </p:cNvSpPr>
@@ -3861,18 +3706,20 @@
               </a:rPr>
               <a:t>lcd_tx_valid 携带 RS 与数据，控制器调度 SPI 发送</a:t>
             </a:r>
-          </a:p>
-        </p:txBody>
-      </p:sp>
-      <p:sp>
-        <p:nvSpPr>
-          <p:cNvPr id="11" name="矩形 10">
-            <a:extLst>
-              <a:ext uri="{FF2B5EF4-FFF2-40B4-BE49-F238E27FC236}">
-                <a16:creationId xmlns:a16="http://schemas.microsoft.com/office/drawing/2014/main" id="{C839E293-7725-4E5B-8B4E-4F5E71F82EA8}"/>
-              </a:ext>
-            </a:extLst>
-          </p:cNvPr>
+            <a:endParaRPr sz="1575" b="0">
+              <a:solidFill>
+                <a:srgbClr val="F7FAFF"/>
+              </a:solidFill>
+              <a:latin typeface="Microsoft YaHei"/>
+              <a:ea typeface="Microsoft YaHei"/>
+              <a:cs typeface="Microsoft YaHei"/>
+            </a:endParaRPr>
+          </a:p>
+        </p:txBody>
+      </p:sp>
+      <p:sp>
+        <p:nvSpPr>
+          <p:cNvPr id="11" name="矩形 10"/>
           <p:cNvSpPr>
             <a:spLocks noGrp="1"/>
           </p:cNvSpPr>
@@ -3918,18 +3765,20 @@
               </a:rPr>
               <a:t>联合检查</a:t>
             </a:r>
-          </a:p>
-        </p:txBody>
-      </p:sp>
-      <p:sp>
-        <p:nvSpPr>
-          <p:cNvPr id="12" name="矩形 11">
-            <a:extLst>
-              <a:ext uri="{FF2B5EF4-FFF2-40B4-BE49-F238E27FC236}">
-                <a16:creationId xmlns:a16="http://schemas.microsoft.com/office/drawing/2014/main" id="{5B64DF27-3D01-415F-9EF7-9F35DF7AFA24}"/>
-              </a:ext>
-            </a:extLst>
-          </p:cNvPr>
+            <a:endParaRPr sz="1650" b="1">
+              <a:solidFill>
+                <a:srgbClr val="22D3EE"/>
+              </a:solidFill>
+              <a:latin typeface="Microsoft YaHei"/>
+              <a:ea typeface="Microsoft YaHei"/>
+              <a:cs typeface="Microsoft YaHei"/>
+            </a:endParaRPr>
+          </a:p>
+        </p:txBody>
+      </p:sp>
+      <p:sp>
+        <p:nvSpPr>
+          <p:cNvPr id="12" name="矩形 11"/>
           <p:cNvSpPr>
             <a:spLocks noGrp="1"/>
           </p:cNvSpPr>
@@ -3975,18 +3824,20 @@
               </a:rPr>
               <a:t>延长 busy，核对接受次数与有效写事务数一致，并检查字节顺序</a:t>
             </a:r>
-          </a:p>
-        </p:txBody>
-      </p:sp>
-      <p:sp>
-        <p:nvSpPr>
-          <p:cNvPr id="14" name="Text 3">
-            <a:extLst>
-              <a:ext uri="{FF2B5EF4-FFF2-40B4-BE49-F238E27FC236}">
-                <a16:creationId xmlns:a16="http://schemas.microsoft.com/office/drawing/2014/main" id="{23D0D95C-88CE-4CA9-851A-100B86279D40}"/>
-              </a:ext>
-            </a:extLst>
-          </p:cNvPr>
+            <a:endParaRPr sz="1575" b="0">
+              <a:solidFill>
+                <a:srgbClr val="F7FAFF"/>
+              </a:solidFill>
+              <a:latin typeface="Microsoft YaHei"/>
+              <a:ea typeface="Microsoft YaHei"/>
+              <a:cs typeface="Microsoft YaHei"/>
+            </a:endParaRPr>
+          </a:p>
+        </p:txBody>
+      </p:sp>
+      <p:sp>
+        <p:nvSpPr>
+          <p:cNvPr id="14" name="Text 3"/>
           <p:cNvSpPr>
             <a:spLocks noGrp="1"/>
           </p:cNvSpPr>
@@ -4026,13 +3877,7 @@
       </p:sp>
       <p:sp>
         <p:nvSpPr>
-          <p:cNvPr id="16" name="Text 16">
-            <a:extLst>
-              <a:ext uri="{FF2B5EF4-FFF2-40B4-BE49-F238E27FC236}">
-                <a16:creationId xmlns:a16="http://schemas.microsoft.com/office/drawing/2014/main" id="{7102859C-5584-48B2-BCA5-ED1CC45632C8}"/>
-              </a:ext>
-            </a:extLst>
-          </p:cNvPr>
+          <p:cNvPr id="16" name="Text 16"/>
           <p:cNvSpPr>
             <a:spLocks noGrp="1"/>
           </p:cNvSpPr>
@@ -4073,11 +3918,6 @@
         </p:txBody>
       </p:sp>
     </p:spTree>
-    <p:extLst>
-      <p:ext uri="{BB962C8B-B14F-4D97-AF65-F5344CB8AC3E}">
-        <p14:creationId xmlns:p14="http://schemas.microsoft.com/office/powerpoint/2010/main" val="179026493"/>
-      </p:ext>
-    </p:extLst>
   </p:cSld>
   <p:clrMapOvr>
     <a:masterClrMapping/>
@@ -4112,13 +3952,7 @@
       </p:grpSpPr>
       <p:sp>
         <p:nvSpPr>
-          <p:cNvPr id="2" name="Text 0">
-            <a:extLst>
-              <a:ext uri="{FF2B5EF4-FFF2-40B4-BE49-F238E27FC236}">
-                <a16:creationId xmlns:a16="http://schemas.microsoft.com/office/drawing/2014/main" id="{38881682-785A-41C0-986A-0F75EB4A29E8}"/>
-              </a:ext>
-            </a:extLst>
-          </p:cNvPr>
+          <p:cNvPr id="2" name="Text 0"/>
           <p:cNvSpPr>
             <a:spLocks noGrp="1"/>
           </p:cNvSpPr>
@@ -4160,13 +3994,7 @@
       </p:sp>
       <p:sp>
         <p:nvSpPr>
-          <p:cNvPr id="3" name="Text 1">
-            <a:extLst>
-              <a:ext uri="{FF2B5EF4-FFF2-40B4-BE49-F238E27FC236}">
-                <a16:creationId xmlns:a16="http://schemas.microsoft.com/office/drawing/2014/main" id="{79B06B46-F390-4FDB-A431-B021E0ACF9AE}"/>
-              </a:ext>
-            </a:extLst>
-          </p:cNvPr>
+          <p:cNvPr id="3" name="Text 1"/>
           <p:cNvSpPr>
             <a:spLocks noGrp="1"/>
           </p:cNvSpPr>
@@ -4192,6 +4020,17 @@
               <a:buNone/>
             </a:pPr>
             <a:r>
+              <a:rPr lang="zh-CN" sz="2400" b="1">
+                <a:solidFill>
+                  <a:srgbClr val="F7FAFF"/>
+                </a:solidFill>
+                <a:latin typeface="Microsoft YaHei"/>
+                <a:ea typeface="Microsoft YaHei"/>
+                <a:cs typeface="Microsoft YaHei"/>
+              </a:rPr>
+              <a:t>模拟</a:t>
+            </a:r>
+            <a:r>
               <a:rPr sz="2400" b="1">
                 <a:solidFill>
                   <a:srgbClr val="F7FAFF"/>
@@ -4200,7 +4039,7 @@
                 <a:ea typeface="Microsoft YaHei"/>
                 <a:cs typeface="Microsoft YaHei"/>
               </a:rPr>
-              <a:t>CPU 运行平台验证</a:t>
+              <a:t>验证</a:t>
             </a:r>
             <a:endParaRPr sz="2400"/>
           </a:p>
@@ -4208,13 +4047,7 @@
       </p:sp>
       <p:sp>
         <p:nvSpPr>
-          <p:cNvPr id="4" name="Text 2">
-            <a:extLst>
-              <a:ext uri="{FF2B5EF4-FFF2-40B4-BE49-F238E27FC236}">
-                <a16:creationId xmlns:a16="http://schemas.microsoft.com/office/drawing/2014/main" id="{D0D94D53-8B19-45CB-9ECA-D6B68A1EA47A}"/>
-              </a:ext>
-            </a:extLst>
-          </p:cNvPr>
+          <p:cNvPr id="4" name="Text 2"/>
           <p:cNvSpPr>
             <a:spLocks noGrp="1"/>
           </p:cNvSpPr>
@@ -4256,13 +4089,7 @@
       </p:sp>
       <p:sp>
         <p:nvSpPr>
-          <p:cNvPr id="5" name="Text 3">
-            <a:extLst>
-              <a:ext uri="{FF2B5EF4-FFF2-40B4-BE49-F238E27FC236}">
-                <a16:creationId xmlns:a16="http://schemas.microsoft.com/office/drawing/2014/main" id="{4AC68DFB-DE81-4171-9CFB-CEF2621350C9}"/>
-              </a:ext>
-            </a:extLst>
-          </p:cNvPr>
+          <p:cNvPr id="5" name="Text 3"/>
           <p:cNvSpPr>
             <a:spLocks noGrp="1"/>
           </p:cNvSpPr>
@@ -4302,13 +4129,7 @@
       </p:sp>
       <p:sp>
         <p:nvSpPr>
-          <p:cNvPr id="6" name="Shape 4">
-            <a:extLst>
-              <a:ext uri="{FF2B5EF4-FFF2-40B4-BE49-F238E27FC236}">
-                <a16:creationId xmlns:a16="http://schemas.microsoft.com/office/drawing/2014/main" id="{ED7F99D0-491B-4497-B077-85833D46BF1E}"/>
-              </a:ext>
-            </a:extLst>
-          </p:cNvPr>
+          <p:cNvPr id="6" name="Shape 4"/>
           <p:cNvSpPr>
             <a:spLocks noGrp="1"/>
           </p:cNvSpPr>
@@ -4335,13 +4156,7 @@
       </p:sp>
       <p:sp>
         <p:nvSpPr>
-          <p:cNvPr id="7" name="Shape 5">
-            <a:extLst>
-              <a:ext uri="{FF2B5EF4-FFF2-40B4-BE49-F238E27FC236}">
-                <a16:creationId xmlns:a16="http://schemas.microsoft.com/office/drawing/2014/main" id="{2C313779-9D3F-4C0B-AFCA-E70D2A0CCC34}"/>
-              </a:ext>
-            </a:extLst>
-          </p:cNvPr>
+          <p:cNvPr id="7" name="Shape 5"/>
           <p:cNvSpPr>
             <a:spLocks noGrp="1"/>
           </p:cNvSpPr>
@@ -4366,13 +4181,7 @@
       </p:sp>
       <p:sp>
         <p:nvSpPr>
-          <p:cNvPr id="8" name="Text 6">
-            <a:extLst>
-              <a:ext uri="{FF2B5EF4-FFF2-40B4-BE49-F238E27FC236}">
-                <a16:creationId xmlns:a16="http://schemas.microsoft.com/office/drawing/2014/main" id="{21BC5AC3-DD3E-4DCE-90DE-A7A30B0B1C22}"/>
-              </a:ext>
-            </a:extLst>
-          </p:cNvPr>
+          <p:cNvPr id="8" name="Text 6"/>
           <p:cNvSpPr>
             <a:spLocks noGrp="1"/>
           </p:cNvSpPr>
@@ -4455,13 +4264,7 @@
       </p:sp>
       <p:sp>
         <p:nvSpPr>
-          <p:cNvPr id="9" name="Text 7">
-            <a:extLst>
-              <a:ext uri="{FF2B5EF4-FFF2-40B4-BE49-F238E27FC236}">
-                <a16:creationId xmlns:a16="http://schemas.microsoft.com/office/drawing/2014/main" id="{A5DE78C7-00C1-409A-A997-8C2FCD936F48}"/>
-              </a:ext>
-            </a:extLst>
-          </p:cNvPr>
+          <p:cNvPr id="9" name="Text 7"/>
           <p:cNvSpPr>
             <a:spLocks noGrp="1"/>
           </p:cNvSpPr>
@@ -4544,13 +4347,7 @@
       </p:sp>
       <p:sp>
         <p:nvSpPr>
-          <p:cNvPr id="10" name="Text 8">
-            <a:extLst>
-              <a:ext uri="{FF2B5EF4-FFF2-40B4-BE49-F238E27FC236}">
-                <a16:creationId xmlns:a16="http://schemas.microsoft.com/office/drawing/2014/main" id="{9618703C-38A2-49D4-8920-0AD93B663E1D}"/>
-              </a:ext>
-            </a:extLst>
-          </p:cNvPr>
+          <p:cNvPr id="10" name="Text 8"/>
           <p:cNvSpPr>
             <a:spLocks noGrp="1"/>
           </p:cNvSpPr>
@@ -4633,13 +4430,7 @@
       </p:sp>
       <p:sp>
         <p:nvSpPr>
-          <p:cNvPr id="11" name="Text 9">
-            <a:extLst>
-              <a:ext uri="{FF2B5EF4-FFF2-40B4-BE49-F238E27FC236}">
-                <a16:creationId xmlns:a16="http://schemas.microsoft.com/office/drawing/2014/main" id="{02986177-20FE-40F1-82EC-E4DDC65F1692}"/>
-              </a:ext>
-            </a:extLst>
-          </p:cNvPr>
+          <p:cNvPr id="11" name="Text 9"/>
           <p:cNvSpPr>
             <a:spLocks noGrp="1"/>
           </p:cNvSpPr>
@@ -4722,13 +4513,7 @@
       </p:sp>
       <p:sp>
         <p:nvSpPr>
-          <p:cNvPr id="12" name="Text 10">
-            <a:extLst>
-              <a:ext uri="{FF2B5EF4-FFF2-40B4-BE49-F238E27FC236}">
-                <a16:creationId xmlns:a16="http://schemas.microsoft.com/office/drawing/2014/main" id="{E76E0881-D40A-4AC3-8432-61176833A0A1}"/>
-              </a:ext>
-            </a:extLst>
-          </p:cNvPr>
+          <p:cNvPr id="12" name="Text 10"/>
           <p:cNvSpPr>
             <a:spLocks noGrp="1"/>
           </p:cNvSpPr>
@@ -4777,13 +4562,7 @@
       </p:sp>
       <p:sp>
         <p:nvSpPr>
-          <p:cNvPr id="13" name="Text 11">
-            <a:extLst>
-              <a:ext uri="{FF2B5EF4-FFF2-40B4-BE49-F238E27FC236}">
-                <a16:creationId xmlns:a16="http://schemas.microsoft.com/office/drawing/2014/main" id="{0305FBEC-747D-4797-9810-6BADF2F58B08}"/>
-              </a:ext>
-            </a:extLst>
-          </p:cNvPr>
+          <p:cNvPr id="13" name="Text 11"/>
           <p:cNvSpPr>
             <a:spLocks noGrp="1"/>
           </p:cNvSpPr>
@@ -4832,13 +4611,7 @@
       </p:sp>
       <p:sp>
         <p:nvSpPr>
-          <p:cNvPr id="14" name="Text 12">
-            <a:extLst>
-              <a:ext uri="{FF2B5EF4-FFF2-40B4-BE49-F238E27FC236}">
-                <a16:creationId xmlns:a16="http://schemas.microsoft.com/office/drawing/2014/main" id="{A2ADC5CF-6EBF-46E3-AA8C-B8257FB32B64}"/>
-              </a:ext>
-            </a:extLst>
-          </p:cNvPr>
+          <p:cNvPr id="14" name="Text 12"/>
           <p:cNvSpPr>
             <a:spLocks noGrp="1"/>
           </p:cNvSpPr>
@@ -4880,13 +4653,7 @@
       </p:sp>
       <p:sp>
         <p:nvSpPr>
-          <p:cNvPr id="15" name="Text 13">
-            <a:extLst>
-              <a:ext uri="{FF2B5EF4-FFF2-40B4-BE49-F238E27FC236}">
-                <a16:creationId xmlns:a16="http://schemas.microsoft.com/office/drawing/2014/main" id="{2FAFEDCE-AE7A-4858-8438-7DF9C1806521}"/>
-              </a:ext>
-            </a:extLst>
-          </p:cNvPr>
+          <p:cNvPr id="15" name="Text 13"/>
           <p:cNvSpPr>
             <a:spLocks noGrp="1"/>
           </p:cNvSpPr>
@@ -4928,21 +4695,15 @@
       </p:sp>
       <p:sp>
         <p:nvSpPr>
-          <p:cNvPr id="17" name="矩形 16">
-            <a:extLst>
-              <a:ext uri="{FF2B5EF4-FFF2-40B4-BE49-F238E27FC236}">
-                <a16:creationId xmlns:a16="http://schemas.microsoft.com/office/drawing/2014/main" id="{4B1DB9E1-243E-4DE9-B2C5-66A02BC4CC8B}"/>
-              </a:ext>
-            </a:extLst>
-          </p:cNvPr>
-          <p:cNvSpPr>
-            <a:spLocks noGrp="1"/>
-          </p:cNvSpPr>
-          <p:nvPr/>
-        </p:nvSpPr>
-        <p:spPr>
-          <a:xfrm>
-            <a:off x="457200" y="1447800"/>
+          <p:cNvPr id="17" name="矩形 16"/>
+          <p:cNvSpPr>
+            <a:spLocks noGrp="1"/>
+          </p:cNvSpPr>
+          <p:nvPr/>
+        </p:nvSpPr>
+        <p:spPr>
+          <a:xfrm>
+            <a:off x="457200" y="1482725"/>
             <a:ext cx="11277600" cy="4743450"/>
           </a:xfrm>
           <a:prstGeom prst="rect">
@@ -4959,240 +4720,72 @@
           </a:ln>
         </p:spPr>
       </p:sp>
-      <p:sp>
-        <p:nvSpPr>
-          <p:cNvPr id="18" name="矩形 17">
-            <a:extLst>
-              <a:ext uri="{FF2B5EF4-FFF2-40B4-BE49-F238E27FC236}">
-                <a16:creationId xmlns:a16="http://schemas.microsoft.com/office/drawing/2014/main" id="{2C641B4E-E625-4F58-9203-4E9AC41D36F7}"/>
-              </a:ext>
-            </a:extLst>
-          </p:cNvPr>
-          <p:cNvSpPr>
-            <a:spLocks noGrp="1"/>
-          </p:cNvSpPr>
-          <p:nvPr/>
-        </p:nvSpPr>
-        <p:spPr>
-          <a:xfrm>
-            <a:off x="514350" y="1581150"/>
-            <a:ext cx="3638550" cy="257175"/>
-          </a:xfrm>
-          <a:prstGeom prst="rect">
-            <a:avLst/>
-          </a:prstGeom>
-          <a:noFill/>
-          <a:ln w="0">
-            <a:noFill/>
-            <a:prstDash val="solid"/>
-          </a:ln>
-        </p:spPr>
-        <p:txBody>
-          <a:bodyPr>
-            <a:normAutofit fontScale="90625"/>
-          </a:bodyPr>
-          <a:lstStyle/>
-          <a:p>
-            <a:pPr algn="ctr">
-              <a:defRPr sz="1200" b="1">
-                <a:solidFill>
-                  <a:srgbClr val="38D39F"/>
-                </a:solidFill>
-                <a:latin typeface="Microsoft YaHei"/>
-                <a:ea typeface="Microsoft YaHei"/>
-                <a:cs typeface="Microsoft YaHei"/>
-              </a:defRPr>
-            </a:pPr>
-            <a:r>
-              <a:rPr sz="1200" b="1">
-                <a:solidFill>
-                  <a:srgbClr val="38D39F"/>
-                </a:solidFill>
-                <a:latin typeface="Microsoft YaHei"/>
-                <a:ea typeface="Microsoft YaHei"/>
-                <a:cs typeface="Microsoft YaHei"/>
-              </a:rPr>
-              <a:t>双源前递</a:t>
-            </a:r>
-          </a:p>
-        </p:txBody>
-      </p:sp>
       <p:pic>
         <p:nvPicPr>
-          <p:cNvPr id="19" name="图片 18"/>
+          <p:cNvPr id="16" name="Picture 15" descr="screenshot-2026-09-11_01.18.39"/>
           <p:cNvPicPr>
             <a:picLocks noChangeAspect="1"/>
           </p:cNvPicPr>
           <p:nvPr/>
         </p:nvPicPr>
         <p:blipFill>
-          <a:blip r:embed="rId3"/>
-          <a:stretch/>
+          <a:blip r:embed="rId1"/>
+          <a:stretch>
+            <a:fillRect/>
+          </a:stretch>
         </p:blipFill>
         <p:spPr>
           <a:xfrm>
-            <a:off x="576183" y="1866900"/>
-            <a:ext cx="3514885" cy="2076450"/>
+            <a:off x="323215" y="3652520"/>
+            <a:ext cx="5346065" cy="1344930"/>
           </a:xfrm>
           <a:prstGeom prst="rect">
             <a:avLst/>
           </a:prstGeom>
         </p:spPr>
       </p:pic>
-      <p:sp>
-        <p:nvSpPr>
-          <p:cNvPr id="20" name="矩形 19">
-            <a:extLst>
-              <a:ext uri="{FF2B5EF4-FFF2-40B4-BE49-F238E27FC236}">
-                <a16:creationId xmlns:a16="http://schemas.microsoft.com/office/drawing/2014/main" id="{9599A282-80E1-4FA3-9E44-FF2EF5BE40CB}"/>
-              </a:ext>
-            </a:extLst>
-          </p:cNvPr>
-          <p:cNvSpPr>
-            <a:spLocks noGrp="1"/>
-          </p:cNvSpPr>
-          <p:nvPr/>
-        </p:nvSpPr>
-        <p:spPr>
-          <a:xfrm>
-            <a:off x="4400550" y="1581150"/>
-            <a:ext cx="3638550" cy="257175"/>
-          </a:xfrm>
-          <a:prstGeom prst="rect">
-            <a:avLst/>
-          </a:prstGeom>
-          <a:noFill/>
-          <a:ln w="0">
-            <a:noFill/>
-            <a:prstDash val="solid"/>
-          </a:ln>
-        </p:spPr>
-        <p:txBody>
-          <a:bodyPr>
-            <a:normAutofit fontScale="90625"/>
-          </a:bodyPr>
-          <a:lstStyle/>
-          <a:p>
-            <a:pPr algn="ctr">
-              <a:defRPr sz="1200" b="1">
-                <a:solidFill>
-                  <a:srgbClr val="FFAA00"/>
-                </a:solidFill>
-                <a:latin typeface="Microsoft YaHei"/>
-                <a:ea typeface="Microsoft YaHei"/>
-                <a:cs typeface="Microsoft YaHei"/>
-              </a:defRPr>
-            </a:pPr>
-            <a:r>
-              <a:rPr sz="1200" b="1">
-                <a:solidFill>
-                  <a:srgbClr val="FFAA00"/>
-                </a:solidFill>
-                <a:latin typeface="Microsoft YaHei"/>
-                <a:ea typeface="Microsoft YaHei"/>
-                <a:cs typeface="Microsoft YaHei"/>
-              </a:rPr>
-              <a:t>load-use 停顿</a:t>
-            </a:r>
-          </a:p>
-        </p:txBody>
-      </p:sp>
       <p:pic>
         <p:nvPicPr>
-          <p:cNvPr id="21" name="图片 20"/>
+          <p:cNvPr id="27" name="Picture 26" descr="screenshot-2026-09-11_01.18.00"/>
           <p:cNvPicPr>
             <a:picLocks noChangeAspect="1"/>
           </p:cNvPicPr>
           <p:nvPr/>
         </p:nvPicPr>
         <p:blipFill>
-          <a:blip r:embed="rId4"/>
-          <a:stretch/>
+          <a:blip r:embed="rId2"/>
+          <a:stretch>
+            <a:fillRect/>
+          </a:stretch>
         </p:blipFill>
         <p:spPr>
           <a:xfrm>
-            <a:off x="4400550" y="1895376"/>
-            <a:ext cx="3638550" cy="2019499"/>
+            <a:off x="6036310" y="3652520"/>
+            <a:ext cx="6389370" cy="1339850"/>
           </a:xfrm>
           <a:prstGeom prst="rect">
             <a:avLst/>
           </a:prstGeom>
         </p:spPr>
       </p:pic>
-      <p:sp>
-        <p:nvSpPr>
-          <p:cNvPr id="22" name="矩形 21">
-            <a:extLst>
-              <a:ext uri="{FF2B5EF4-FFF2-40B4-BE49-F238E27FC236}">
-                <a16:creationId xmlns:a16="http://schemas.microsoft.com/office/drawing/2014/main" id="{8B3FBFFB-DBE6-48E4-87A8-8FFBDA26524F}"/>
-              </a:ext>
-            </a:extLst>
-          </p:cNvPr>
-          <p:cNvSpPr>
-            <a:spLocks noGrp="1"/>
-          </p:cNvSpPr>
-          <p:nvPr/>
-        </p:nvSpPr>
-        <p:spPr>
-          <a:xfrm>
-            <a:off x="8286750" y="1581150"/>
-            <a:ext cx="3638550" cy="257175"/>
-          </a:xfrm>
-          <a:prstGeom prst="rect">
-            <a:avLst/>
-          </a:prstGeom>
-          <a:noFill/>
-          <a:ln w="0">
-            <a:noFill/>
-            <a:prstDash val="solid"/>
-          </a:ln>
-        </p:spPr>
-        <p:txBody>
-          <a:bodyPr>
-            <a:normAutofit fontScale="90625"/>
-          </a:bodyPr>
-          <a:lstStyle/>
-          <a:p>
-            <a:pPr algn="ctr">
-              <a:defRPr sz="1200" b="1">
-                <a:solidFill>
-                  <a:srgbClr val="FF6B6B"/>
-                </a:solidFill>
-                <a:latin typeface="Microsoft YaHei"/>
-                <a:ea typeface="Microsoft YaHei"/>
-                <a:cs typeface="Microsoft YaHei"/>
-              </a:defRPr>
-            </a:pPr>
-            <a:r>
-              <a:rPr sz="1200" b="1">
-                <a:solidFill>
-                  <a:srgbClr val="FF6B6B"/>
-                </a:solidFill>
-                <a:latin typeface="Microsoft YaHei"/>
-                <a:ea typeface="Microsoft YaHei"/>
-                <a:cs typeface="Microsoft YaHei"/>
-              </a:rPr>
-              <a:t>分支冲刷</a:t>
-            </a:r>
-          </a:p>
-        </p:txBody>
-      </p:sp>
       <p:pic>
         <p:nvPicPr>
-          <p:cNvPr id="23" name="图片 22"/>
+          <p:cNvPr id="28" name="Picture 27" descr="screenshot-2026-09-11_01.17.28"/>
           <p:cNvPicPr>
             <a:picLocks noChangeAspect="1"/>
           </p:cNvPicPr>
           <p:nvPr/>
         </p:nvPicPr>
         <p:blipFill>
-          <a:blip r:embed="rId5"/>
-          <a:stretch/>
+          <a:blip r:embed="rId3"/>
+          <a:stretch>
+            <a:fillRect/>
+          </a:stretch>
         </p:blipFill>
         <p:spPr>
           <a:xfrm>
-            <a:off x="8360438" y="1866900"/>
-            <a:ext cx="3491174" cy="2076450"/>
+            <a:off x="6036310" y="1945005"/>
+            <a:ext cx="5698490" cy="1274445"/>
           </a:xfrm>
           <a:prstGeom prst="rect">
             <a:avLst/>
@@ -5201,90 +4794,29 @@
       </p:pic>
       <p:pic>
         <p:nvPicPr>
-          <p:cNvPr id="24" name="图片 23"/>
+          <p:cNvPr id="29" name="Picture 28" descr="screenshot-2026-09-11_01.16.25"/>
           <p:cNvPicPr>
             <a:picLocks noChangeAspect="1"/>
           </p:cNvPicPr>
           <p:nvPr/>
         </p:nvPicPr>
         <p:blipFill>
-          <a:blip r:embed="rId6"/>
-          <a:stretch/>
+          <a:blip r:embed="rId4"/>
+          <a:stretch>
+            <a:fillRect/>
+          </a:stretch>
         </p:blipFill>
         <p:spPr>
           <a:xfrm>
-            <a:off x="3635508" y="4171950"/>
-            <a:ext cx="4920983" cy="1381125"/>
+            <a:off x="329565" y="1945005"/>
+            <a:ext cx="5465445" cy="1325880"/>
           </a:xfrm>
           <a:prstGeom prst="rect">
             <a:avLst/>
           </a:prstGeom>
         </p:spPr>
       </p:pic>
-      <p:sp>
-        <p:nvSpPr>
-          <p:cNvPr id="25" name="矩形 24">
-            <a:extLst>
-              <a:ext uri="{FF2B5EF4-FFF2-40B4-BE49-F238E27FC236}">
-                <a16:creationId xmlns:a16="http://schemas.microsoft.com/office/drawing/2014/main" id="{F7019026-687A-442E-8278-09B63CD3B977}"/>
-              </a:ext>
-            </a:extLst>
-          </p:cNvPr>
-          <p:cNvSpPr>
-            <a:spLocks noGrp="1"/>
-          </p:cNvSpPr>
-          <p:nvPr/>
-        </p:nvSpPr>
-        <p:spPr>
-          <a:xfrm>
-            <a:off x="876300" y="5657850"/>
-            <a:ext cx="10439400" cy="400050"/>
-          </a:xfrm>
-          <a:prstGeom prst="rect">
-            <a:avLst/>
-          </a:prstGeom>
-          <a:noFill/>
-          <a:ln w="0">
-            <a:noFill/>
-            <a:prstDash val="solid"/>
-          </a:ln>
-        </p:spPr>
-        <p:txBody>
-          <a:bodyPr>
-            <a:normAutofit/>
-          </a:bodyPr>
-          <a:lstStyle/>
-          <a:p>
-            <a:pPr algn="ctr">
-              <a:defRPr sz="1200" b="0">
-                <a:solidFill>
-                  <a:srgbClr val="A9B6D1"/>
-                </a:solidFill>
-                <a:latin typeface="Microsoft YaHei"/>
-                <a:ea typeface="Microsoft YaHei"/>
-                <a:cs typeface="Microsoft YaHei"/>
-              </a:defRPr>
-            </a:pPr>
-            <a:r>
-              <a:rPr sz="1200" b="0">
-                <a:solidFill>
-                  <a:srgbClr val="A9B6D1"/>
-                </a:solidFill>
-                <a:latin typeface="Microsoft YaHei"/>
-                <a:ea typeface="Microsoft YaHei"/>
-                <a:cs typeface="Microsoft YaHei"/>
-              </a:rPr>
-              <a:t>讲解定位：证明承载 MMIO 汇编程序的 CPU 能正确处理相关；LCD 协议证据仍以 SPI、初始化和握手波形为主</a:t>
-            </a:r>
-          </a:p>
-        </p:txBody>
-      </p:sp>
     </p:spTree>
-    <p:extLst>
-      <p:ext uri="{BB962C8B-B14F-4D97-AF65-F5344CB8AC3E}">
-        <p14:creationId xmlns:p14="http://schemas.microsoft.com/office/powerpoint/2010/main" val="1805117169"/>
-      </p:ext>
-    </p:extLst>
   </p:cSld>
   <p:clrMapOvr>
     <a:masterClrMapping/>
@@ -5319,13 +4851,7 @@
       </p:grpSpPr>
       <p:sp>
         <p:nvSpPr>
-          <p:cNvPr id="2" name="矩形 1">
-            <a:extLst>
-              <a:ext uri="{FF2B5EF4-FFF2-40B4-BE49-F238E27FC236}">
-                <a16:creationId xmlns:a16="http://schemas.microsoft.com/office/drawing/2014/main" id="{F02E8259-1432-430F-B08E-63707AC479E9}"/>
-              </a:ext>
-            </a:extLst>
-          </p:cNvPr>
+          <p:cNvPr id="2" name="矩形 1"/>
           <p:cNvSpPr>
             <a:spLocks noGrp="1"/>
           </p:cNvSpPr>
@@ -5371,18 +4897,20 @@
               </a:rPr>
               <a:t>中期答辩补充</a:t>
             </a:r>
-          </a:p>
-        </p:txBody>
-      </p:sp>
-      <p:sp>
-        <p:nvSpPr>
-          <p:cNvPr id="3" name="矩形 2">
-            <a:extLst>
-              <a:ext uri="{FF2B5EF4-FFF2-40B4-BE49-F238E27FC236}">
-                <a16:creationId xmlns:a16="http://schemas.microsoft.com/office/drawing/2014/main" id="{D7039E47-66E1-434F-AE00-408391CB59E1}"/>
-              </a:ext>
-            </a:extLst>
-          </p:cNvPr>
+            <a:endParaRPr sz="900" b="1">
+              <a:solidFill>
+                <a:srgbClr val="22D3EE"/>
+              </a:solidFill>
+              <a:latin typeface="Microsoft YaHei"/>
+              <a:ea typeface="Microsoft YaHei"/>
+              <a:cs typeface="Microsoft YaHei"/>
+            </a:endParaRPr>
+          </a:p>
+        </p:txBody>
+      </p:sp>
+      <p:sp>
+        <p:nvSpPr>
+          <p:cNvPr id="3" name="矩形 2"/>
           <p:cNvSpPr>
             <a:spLocks noGrp="1"/>
           </p:cNvSpPr>
@@ -5428,18 +4956,20 @@
               </a:rPr>
               <a:t>三人分工与接口协作</a:t>
             </a:r>
-          </a:p>
-        </p:txBody>
-      </p:sp>
-      <p:sp>
-        <p:nvSpPr>
-          <p:cNvPr id="4" name="矩形 3">
-            <a:extLst>
-              <a:ext uri="{FF2B5EF4-FFF2-40B4-BE49-F238E27FC236}">
-                <a16:creationId xmlns:a16="http://schemas.microsoft.com/office/drawing/2014/main" id="{5F4A7856-A61A-49FF-884C-0117ED9A7487}"/>
-              </a:ext>
-            </a:extLst>
-          </p:cNvPr>
+            <a:endParaRPr sz="2400" b="1">
+              <a:solidFill>
+                <a:srgbClr val="F7FAFF"/>
+              </a:solidFill>
+              <a:latin typeface="Microsoft YaHei"/>
+              <a:ea typeface="Microsoft YaHei"/>
+              <a:cs typeface="Microsoft YaHei"/>
+            </a:endParaRPr>
+          </a:p>
+        </p:txBody>
+      </p:sp>
+      <p:sp>
+        <p:nvSpPr>
+          <p:cNvPr id="4" name="矩形 3"/>
           <p:cNvSpPr>
             <a:spLocks noGrp="1"/>
           </p:cNvSpPr>
@@ -5485,18 +5015,20 @@
               </a:rPr>
               <a:t>每人承担模块设计、实现与验证，组长维护系统接口</a:t>
             </a:r>
-          </a:p>
-        </p:txBody>
-      </p:sp>
-      <p:sp>
-        <p:nvSpPr>
-          <p:cNvPr id="5" name="矩形 4">
-            <a:extLst>
-              <a:ext uri="{FF2B5EF4-FFF2-40B4-BE49-F238E27FC236}">
-                <a16:creationId xmlns:a16="http://schemas.microsoft.com/office/drawing/2014/main" id="{BAD1B3DF-42F0-4049-939A-A7D38E0AC1F9}"/>
-              </a:ext>
-            </a:extLst>
-          </p:cNvPr>
+            <a:endParaRPr sz="1275" b="0">
+              <a:solidFill>
+                <a:srgbClr val="BAC9E2"/>
+              </a:solidFill>
+              <a:latin typeface="Microsoft YaHei"/>
+              <a:ea typeface="Microsoft YaHei"/>
+              <a:cs typeface="Microsoft YaHei"/>
+            </a:endParaRPr>
+          </a:p>
+        </p:txBody>
+      </p:sp>
+      <p:sp>
+        <p:nvSpPr>
+          <p:cNvPr id="5" name="矩形 4"/>
           <p:cNvSpPr>
             <a:spLocks noGrp="1"/>
           </p:cNvSpPr>
@@ -5588,13 +5120,7 @@
       </p:sp>
       <p:sp>
         <p:nvSpPr>
-          <p:cNvPr id="6" name="矩形 5">
-            <a:extLst>
-              <a:ext uri="{FF2B5EF4-FFF2-40B4-BE49-F238E27FC236}">
-                <a16:creationId xmlns:a16="http://schemas.microsoft.com/office/drawing/2014/main" id="{379313DB-BCBD-41FA-A858-A99EA9B26C79}"/>
-              </a:ext>
-            </a:extLst>
-          </p:cNvPr>
+          <p:cNvPr id="6" name="矩形 5"/>
           <p:cNvSpPr>
             <a:spLocks noGrp="1"/>
           </p:cNvSpPr>
@@ -5640,18 +5166,20 @@
               </a:rPr>
               <a:t>ISA、水平微码、CPU / SoC 集成，维护控制字与接口文档</a:t>
             </a:r>
-          </a:p>
-        </p:txBody>
-      </p:sp>
-      <p:sp>
-        <p:nvSpPr>
-          <p:cNvPr id="7" name="矩形 6">
-            <a:extLst>
-              <a:ext uri="{FF2B5EF4-FFF2-40B4-BE49-F238E27FC236}">
-                <a16:creationId xmlns:a16="http://schemas.microsoft.com/office/drawing/2014/main" id="{E9F03568-0D0F-40EE-87C3-5C13371F3903}"/>
-              </a:ext>
-            </a:extLst>
-          </p:cNvPr>
+            <a:endParaRPr sz="1575" b="0">
+              <a:solidFill>
+                <a:srgbClr val="F7FAFF"/>
+              </a:solidFill>
+              <a:latin typeface="Microsoft YaHei"/>
+              <a:ea typeface="Microsoft YaHei"/>
+              <a:cs typeface="Microsoft YaHei"/>
+            </a:endParaRPr>
+          </a:p>
+        </p:txBody>
+      </p:sp>
+      <p:sp>
+        <p:nvSpPr>
+          <p:cNvPr id="7" name="矩形 6"/>
           <p:cNvSpPr>
             <a:spLocks noGrp="1"/>
           </p:cNvSpPr>
@@ -5732,13 +5260,7 @@
       </p:sp>
       <p:sp>
         <p:nvSpPr>
-          <p:cNvPr id="8" name="矩形 7">
-            <a:extLst>
-              <a:ext uri="{FF2B5EF4-FFF2-40B4-BE49-F238E27FC236}">
-                <a16:creationId xmlns:a16="http://schemas.microsoft.com/office/drawing/2014/main" id="{2659C222-8044-40E9-9D77-C6489694F408}"/>
-              </a:ext>
-            </a:extLst>
-          </p:cNvPr>
+          <p:cNvPr id="8" name="矩形 7"/>
           <p:cNvSpPr>
             <a:spLocks noGrp="1"/>
           </p:cNvSpPr>
@@ -5784,18 +5306,20 @@
               </a:rPr>
               <a:t>前递、load-use、分支冲刷、存储等待及 CPU 自检</a:t>
             </a:r>
-          </a:p>
-        </p:txBody>
-      </p:sp>
-      <p:sp>
-        <p:nvSpPr>
-          <p:cNvPr id="9" name="矩形 8">
-            <a:extLst>
-              <a:ext uri="{FF2B5EF4-FFF2-40B4-BE49-F238E27FC236}">
-                <a16:creationId xmlns:a16="http://schemas.microsoft.com/office/drawing/2014/main" id="{B5B11FA1-B181-4EAC-918A-4BE825744FD0}"/>
-              </a:ext>
-            </a:extLst>
-          </p:cNvPr>
+            <a:endParaRPr sz="1575" b="0">
+              <a:solidFill>
+                <a:srgbClr val="F7FAFF"/>
+              </a:solidFill>
+              <a:latin typeface="Microsoft YaHei"/>
+              <a:ea typeface="Microsoft YaHei"/>
+              <a:cs typeface="Microsoft YaHei"/>
+            </a:endParaRPr>
+          </a:p>
+        </p:txBody>
+      </p:sp>
+      <p:sp>
+        <p:nvSpPr>
+          <p:cNvPr id="9" name="矩形 8"/>
           <p:cNvSpPr>
             <a:spLocks noGrp="1"/>
           </p:cNvSpPr>
@@ -5876,13 +5400,7 @@
       </p:sp>
       <p:sp>
         <p:nvSpPr>
-          <p:cNvPr id="10" name="矩形 9">
-            <a:extLst>
-              <a:ext uri="{FF2B5EF4-FFF2-40B4-BE49-F238E27FC236}">
-                <a16:creationId xmlns:a16="http://schemas.microsoft.com/office/drawing/2014/main" id="{9A8FED82-2CDF-45B9-A300-BC57B21A2BBE}"/>
-              </a:ext>
-            </a:extLst>
-          </p:cNvPr>
+          <p:cNvPr id="10" name="矩形 9"/>
           <p:cNvSpPr>
             <a:spLocks noGrp="1"/>
           </p:cNvSpPr>
@@ -5928,18 +5446,20 @@
               </a:rPr>
               <a:t>LCD SPI、初始化、MMIO、汇编驱动及接口单元测试</a:t>
             </a:r>
-          </a:p>
-        </p:txBody>
-      </p:sp>
-      <p:sp>
-        <p:nvSpPr>
-          <p:cNvPr id="11" name="矩形 10">
-            <a:extLst>
-              <a:ext uri="{FF2B5EF4-FFF2-40B4-BE49-F238E27FC236}">
-                <a16:creationId xmlns:a16="http://schemas.microsoft.com/office/drawing/2014/main" id="{220444B3-9182-411A-A21B-58AC83BB753C}"/>
-              </a:ext>
-            </a:extLst>
-          </p:cNvPr>
+            <a:endParaRPr sz="1575" b="0">
+              <a:solidFill>
+                <a:srgbClr val="F7FAFF"/>
+              </a:solidFill>
+              <a:latin typeface="Microsoft YaHei"/>
+              <a:ea typeface="Microsoft YaHei"/>
+              <a:cs typeface="Microsoft YaHei"/>
+            </a:endParaRPr>
+          </a:p>
+        </p:txBody>
+      </p:sp>
+      <p:sp>
+        <p:nvSpPr>
+          <p:cNvPr id="11" name="矩形 10"/>
           <p:cNvSpPr>
             <a:spLocks noGrp="1"/>
           </p:cNvSpPr>
@@ -5985,18 +5505,20 @@
               </a:rPr>
               <a:t>联调方式</a:t>
             </a:r>
-          </a:p>
-        </p:txBody>
-      </p:sp>
-      <p:sp>
-        <p:nvSpPr>
-          <p:cNvPr id="12" name="矩形 11">
-            <a:extLst>
-              <a:ext uri="{FF2B5EF4-FFF2-40B4-BE49-F238E27FC236}">
-                <a16:creationId xmlns:a16="http://schemas.microsoft.com/office/drawing/2014/main" id="{503F666B-CAB0-433F-9066-D9B9D4BBAD80}"/>
-              </a:ext>
-            </a:extLst>
-          </p:cNvPr>
+            <a:endParaRPr sz="1650" b="1">
+              <a:solidFill>
+                <a:srgbClr val="22D3EE"/>
+              </a:solidFill>
+              <a:latin typeface="Microsoft YaHei"/>
+              <a:ea typeface="Microsoft YaHei"/>
+              <a:cs typeface="Microsoft YaHei"/>
+            </a:endParaRPr>
+          </a:p>
+        </p:txBody>
+      </p:sp>
+      <p:sp>
+        <p:nvSpPr>
+          <p:cNvPr id="12" name="矩形 11"/>
           <p:cNvSpPr>
             <a:spLocks noGrp="1"/>
           </p:cNvSpPr>
@@ -6042,18 +5564,20 @@
               </a:rPr>
               <a:t>A 统一规格与基线，B/C 分别验证 CPU 请求和外设接收</a:t>
             </a:r>
-          </a:p>
-        </p:txBody>
-      </p:sp>
-      <p:sp>
-        <p:nvSpPr>
-          <p:cNvPr id="14" name="Text 3">
-            <a:extLst>
-              <a:ext uri="{FF2B5EF4-FFF2-40B4-BE49-F238E27FC236}">
-                <a16:creationId xmlns:a16="http://schemas.microsoft.com/office/drawing/2014/main" id="{D36023B3-8F7B-417A-98FE-D48EA0D75A91}"/>
-              </a:ext>
-            </a:extLst>
-          </p:cNvPr>
+            <a:endParaRPr sz="1575" b="0">
+              <a:solidFill>
+                <a:srgbClr val="F7FAFF"/>
+              </a:solidFill>
+              <a:latin typeface="Microsoft YaHei"/>
+              <a:ea typeface="Microsoft YaHei"/>
+              <a:cs typeface="Microsoft YaHei"/>
+            </a:endParaRPr>
+          </a:p>
+        </p:txBody>
+      </p:sp>
+      <p:sp>
+        <p:nvSpPr>
+          <p:cNvPr id="14" name="Text 3"/>
           <p:cNvSpPr>
             <a:spLocks noGrp="1"/>
           </p:cNvSpPr>
@@ -6093,13 +5617,7 @@
       </p:sp>
       <p:sp>
         <p:nvSpPr>
-          <p:cNvPr id="16" name="Text 16">
-            <a:extLst>
-              <a:ext uri="{FF2B5EF4-FFF2-40B4-BE49-F238E27FC236}">
-                <a16:creationId xmlns:a16="http://schemas.microsoft.com/office/drawing/2014/main" id="{E4843210-7FA5-056B-19EB-F89466AC23E8}"/>
-              </a:ext>
-            </a:extLst>
-          </p:cNvPr>
+          <p:cNvPr id="16" name="Text 16"/>
           <p:cNvSpPr>
             <a:spLocks noGrp="1"/>
           </p:cNvSpPr>
@@ -6140,11 +5658,6 @@
         </p:txBody>
       </p:sp>
     </p:spTree>
-    <p:extLst>
-      <p:ext uri="{BB962C8B-B14F-4D97-AF65-F5344CB8AC3E}">
-        <p14:creationId xmlns:p14="http://schemas.microsoft.com/office/powerpoint/2010/main" val="770280989"/>
-      </p:ext>
-    </p:extLst>
   </p:cSld>
   <p:clrMapOvr>
     <a:masterClrMapping/>
@@ -6179,13 +5692,7 @@
       </p:grpSpPr>
       <p:sp>
         <p:nvSpPr>
-          <p:cNvPr id="2" name="矩形 1">
-            <a:extLst>
-              <a:ext uri="{FF2B5EF4-FFF2-40B4-BE49-F238E27FC236}">
-                <a16:creationId xmlns:a16="http://schemas.microsoft.com/office/drawing/2014/main" id="{9DA6B5F2-DA83-4AE1-889C-AF02090C33AE}"/>
-              </a:ext>
-            </a:extLst>
-          </p:cNvPr>
+          <p:cNvPr id="2" name="矩形 1"/>
           <p:cNvSpPr>
             <a:spLocks noGrp="1"/>
           </p:cNvSpPr>
@@ -6231,18 +5738,20 @@
               </a:rPr>
               <a:t>中期答辩补充</a:t>
             </a:r>
-          </a:p>
-        </p:txBody>
-      </p:sp>
-      <p:sp>
-        <p:nvSpPr>
-          <p:cNvPr id="3" name="矩形 2">
-            <a:extLst>
-              <a:ext uri="{FF2B5EF4-FFF2-40B4-BE49-F238E27FC236}">
-                <a16:creationId xmlns:a16="http://schemas.microsoft.com/office/drawing/2014/main" id="{1661F4DC-1A71-474A-8084-2B3B25B67BD9}"/>
-              </a:ext>
-            </a:extLst>
-          </p:cNvPr>
+            <a:endParaRPr sz="900" b="1">
+              <a:solidFill>
+                <a:srgbClr val="22D3EE"/>
+              </a:solidFill>
+              <a:latin typeface="Microsoft YaHei"/>
+              <a:ea typeface="Microsoft YaHei"/>
+              <a:cs typeface="Microsoft YaHei"/>
+            </a:endParaRPr>
+          </a:p>
+        </p:txBody>
+      </p:sp>
+      <p:sp>
+        <p:nvSpPr>
+          <p:cNvPr id="3" name="矩形 2"/>
           <p:cNvSpPr>
             <a:spLocks noGrp="1"/>
           </p:cNvSpPr>
@@ -6288,18 +5797,20 @@
               </a:rPr>
               <a:t>阶段安排与验收标准</a:t>
             </a:r>
-          </a:p>
-        </p:txBody>
-      </p:sp>
-      <p:sp>
-        <p:nvSpPr>
-          <p:cNvPr id="4" name="矩形 3">
-            <a:extLst>
-              <a:ext uri="{FF2B5EF4-FFF2-40B4-BE49-F238E27FC236}">
-                <a16:creationId xmlns:a16="http://schemas.microsoft.com/office/drawing/2014/main" id="{36B9B230-D21A-40F9-88A3-E4E08DE0C961}"/>
-              </a:ext>
-            </a:extLst>
-          </p:cNvPr>
+            <a:endParaRPr sz="2400" b="1">
+              <a:solidFill>
+                <a:srgbClr val="F7FAFF"/>
+              </a:solidFill>
+              <a:latin typeface="Microsoft YaHei"/>
+              <a:ea typeface="Microsoft YaHei"/>
+              <a:cs typeface="Microsoft YaHei"/>
+            </a:endParaRPr>
+          </a:p>
+        </p:txBody>
+      </p:sp>
+      <p:sp>
+        <p:nvSpPr>
+          <p:cNvPr id="4" name="矩形 3"/>
           <p:cNvSpPr>
             <a:spLocks noGrp="1"/>
           </p:cNvSpPr>
@@ -6345,18 +5856,20 @@
               </a:rPr>
               <a:t>按开发阶段回顾交付物，当前状态与汇报范围分开说明</a:t>
             </a:r>
-          </a:p>
-        </p:txBody>
-      </p:sp>
-      <p:sp>
-        <p:nvSpPr>
-          <p:cNvPr id="5" name="矩形 4">
-            <a:extLst>
-              <a:ext uri="{FF2B5EF4-FFF2-40B4-BE49-F238E27FC236}">
-                <a16:creationId xmlns:a16="http://schemas.microsoft.com/office/drawing/2014/main" id="{F60C0480-A16F-466B-B705-C4E7C284B2C5}"/>
-              </a:ext>
-            </a:extLst>
-          </p:cNvPr>
+            <a:endParaRPr sz="1275" b="0">
+              <a:solidFill>
+                <a:srgbClr val="BAC9E2"/>
+              </a:solidFill>
+              <a:latin typeface="Microsoft YaHei"/>
+              <a:ea typeface="Microsoft YaHei"/>
+              <a:cs typeface="Microsoft YaHei"/>
+            </a:endParaRPr>
+          </a:p>
+        </p:txBody>
+      </p:sp>
+      <p:sp>
+        <p:nvSpPr>
+          <p:cNvPr id="5" name="矩形 4"/>
           <p:cNvSpPr>
             <a:spLocks noGrp="1"/>
           </p:cNvSpPr>
@@ -6402,18 +5915,20 @@
               </a:rPr>
               <a:t>阶段一：规格</a:t>
             </a:r>
-          </a:p>
-        </p:txBody>
-      </p:sp>
-      <p:sp>
-        <p:nvSpPr>
-          <p:cNvPr id="6" name="矩形 5">
-            <a:extLst>
-              <a:ext uri="{FF2B5EF4-FFF2-40B4-BE49-F238E27FC236}">
-                <a16:creationId xmlns:a16="http://schemas.microsoft.com/office/drawing/2014/main" id="{C125962A-E2D4-488C-B2DF-EE4E4DF99431}"/>
-              </a:ext>
-            </a:extLst>
-          </p:cNvPr>
+            <a:endParaRPr sz="1650" b="1">
+              <a:solidFill>
+                <a:srgbClr val="22D3EE"/>
+              </a:solidFill>
+              <a:latin typeface="Microsoft YaHei"/>
+              <a:ea typeface="Microsoft YaHei"/>
+              <a:cs typeface="Microsoft YaHei"/>
+            </a:endParaRPr>
+          </a:p>
+        </p:txBody>
+      </p:sp>
+      <p:sp>
+        <p:nvSpPr>
+          <p:cNvPr id="6" name="矩形 5"/>
           <p:cNvSpPr>
             <a:spLocks noGrp="1"/>
           </p:cNvSpPr>
@@ -6459,18 +5974,20 @@
               </a:rPr>
               <a:t>指令表、控制字、流水寄存器、MMIO 约定完成并评审</a:t>
             </a:r>
-          </a:p>
-        </p:txBody>
-      </p:sp>
-      <p:sp>
-        <p:nvSpPr>
-          <p:cNvPr id="7" name="矩形 6">
-            <a:extLst>
-              <a:ext uri="{FF2B5EF4-FFF2-40B4-BE49-F238E27FC236}">
-                <a16:creationId xmlns:a16="http://schemas.microsoft.com/office/drawing/2014/main" id="{3E1E8C6C-2847-4AF2-BFA6-00C02EE9895C}"/>
-              </a:ext>
-            </a:extLst>
-          </p:cNvPr>
+            <a:endParaRPr sz="1575" b="0">
+              <a:solidFill>
+                <a:srgbClr val="F7FAFF"/>
+              </a:solidFill>
+              <a:latin typeface="Microsoft YaHei"/>
+              <a:ea typeface="Microsoft YaHei"/>
+              <a:cs typeface="Microsoft YaHei"/>
+            </a:endParaRPr>
+          </a:p>
+        </p:txBody>
+      </p:sp>
+      <p:sp>
+        <p:nvSpPr>
+          <p:cNvPr id="7" name="矩形 6"/>
           <p:cNvSpPr>
             <a:spLocks noGrp="1"/>
           </p:cNvSpPr>
@@ -6516,18 +6033,20 @@
               </a:rPr>
               <a:t>阶段二：模块</a:t>
             </a:r>
-          </a:p>
-        </p:txBody>
-      </p:sp>
-      <p:sp>
-        <p:nvSpPr>
-          <p:cNvPr id="8" name="矩形 7">
-            <a:extLst>
-              <a:ext uri="{FF2B5EF4-FFF2-40B4-BE49-F238E27FC236}">
-                <a16:creationId xmlns:a16="http://schemas.microsoft.com/office/drawing/2014/main" id="{359745EF-345D-4642-9971-35F4CE3A726A}"/>
-              </a:ext>
-            </a:extLst>
-          </p:cNvPr>
+            <a:endParaRPr sz="1650" b="1">
+              <a:solidFill>
+                <a:srgbClr val="22D3EE"/>
+              </a:solidFill>
+              <a:latin typeface="Microsoft YaHei"/>
+              <a:ea typeface="Microsoft YaHei"/>
+              <a:cs typeface="Microsoft YaHei"/>
+            </a:endParaRPr>
+          </a:p>
+        </p:txBody>
+      </p:sp>
+      <p:sp>
+        <p:nvSpPr>
+          <p:cNvPr id="8" name="矩形 7"/>
           <p:cNvSpPr>
             <a:spLocks noGrp="1"/>
           </p:cNvSpPr>
@@ -6573,18 +6092,20 @@
               </a:rPr>
               <a:t>三人并行实现各自 RTL，单元测试通过后进入集成</a:t>
             </a:r>
-          </a:p>
-        </p:txBody>
-      </p:sp>
-      <p:sp>
-        <p:nvSpPr>
-          <p:cNvPr id="9" name="矩形 8">
-            <a:extLst>
-              <a:ext uri="{FF2B5EF4-FFF2-40B4-BE49-F238E27FC236}">
-                <a16:creationId xmlns:a16="http://schemas.microsoft.com/office/drawing/2014/main" id="{1CE88A26-A070-4604-A9DF-30A83E3ACD7B}"/>
-              </a:ext>
-            </a:extLst>
-          </p:cNvPr>
+            <a:endParaRPr sz="1575" b="0">
+              <a:solidFill>
+                <a:srgbClr val="F7FAFF"/>
+              </a:solidFill>
+              <a:latin typeface="Microsoft YaHei"/>
+              <a:ea typeface="Microsoft YaHei"/>
+              <a:cs typeface="Microsoft YaHei"/>
+            </a:endParaRPr>
+          </a:p>
+        </p:txBody>
+      </p:sp>
+      <p:sp>
+        <p:nvSpPr>
+          <p:cNvPr id="9" name="矩形 8"/>
           <p:cNvSpPr>
             <a:spLocks noGrp="1"/>
           </p:cNvSpPr>
@@ -6630,18 +6151,20 @@
               </a:rPr>
               <a:t>阶段三：联调</a:t>
             </a:r>
-          </a:p>
-        </p:txBody>
-      </p:sp>
-      <p:sp>
-        <p:nvSpPr>
-          <p:cNvPr id="10" name="矩形 9">
-            <a:extLst>
-              <a:ext uri="{FF2B5EF4-FFF2-40B4-BE49-F238E27FC236}">
-                <a16:creationId xmlns:a16="http://schemas.microsoft.com/office/drawing/2014/main" id="{E844F9ED-BB7C-451E-839B-A62BF53E2EFE}"/>
-              </a:ext>
-            </a:extLst>
-          </p:cNvPr>
+            <a:endParaRPr sz="1650" b="1">
+              <a:solidFill>
+                <a:srgbClr val="22D3EE"/>
+              </a:solidFill>
+              <a:latin typeface="Microsoft YaHei"/>
+              <a:ea typeface="Microsoft YaHei"/>
+              <a:cs typeface="Microsoft YaHei"/>
+            </a:endParaRPr>
+          </a:p>
+        </p:txBody>
+      </p:sp>
+      <p:sp>
+        <p:nvSpPr>
+          <p:cNvPr id="10" name="矩形 9"/>
           <p:cNvSpPr>
             <a:spLocks noGrp="1"/>
           </p:cNvSpPr>
@@ -6687,18 +6210,20 @@
               </a:rPr>
               <a:t>核对架构结果、退休序列、等待与外设单次副作用</a:t>
             </a:r>
-          </a:p>
-        </p:txBody>
-      </p:sp>
-      <p:sp>
-        <p:nvSpPr>
-          <p:cNvPr id="11" name="矩形 10">
-            <a:extLst>
-              <a:ext uri="{FF2B5EF4-FFF2-40B4-BE49-F238E27FC236}">
-                <a16:creationId xmlns:a16="http://schemas.microsoft.com/office/drawing/2014/main" id="{D4C276EB-0034-44FB-8B36-C3FD65CA46F0}"/>
-              </a:ext>
-            </a:extLst>
-          </p:cNvPr>
+            <a:endParaRPr sz="1575" b="0">
+              <a:solidFill>
+                <a:srgbClr val="F7FAFF"/>
+              </a:solidFill>
+              <a:latin typeface="Microsoft YaHei"/>
+              <a:ea typeface="Microsoft YaHei"/>
+              <a:cs typeface="Microsoft YaHei"/>
+            </a:endParaRPr>
+          </a:p>
+        </p:txBody>
+      </p:sp>
+      <p:sp>
+        <p:nvSpPr>
+          <p:cNvPr id="11" name="矩形 10"/>
           <p:cNvSpPr>
             <a:spLocks noGrp="1"/>
           </p:cNvSpPr>
@@ -6744,18 +6269,20 @@
               </a:rPr>
               <a:t>阶段四：交付</a:t>
             </a:r>
-          </a:p>
-        </p:txBody>
-      </p:sp>
-      <p:sp>
-        <p:nvSpPr>
-          <p:cNvPr id="12" name="矩形 11">
-            <a:extLst>
-              <a:ext uri="{FF2B5EF4-FFF2-40B4-BE49-F238E27FC236}">
-                <a16:creationId xmlns:a16="http://schemas.microsoft.com/office/drawing/2014/main" id="{29DE7226-E114-4FBC-A780-19E1555AD0CB}"/>
-              </a:ext>
-            </a:extLst>
-          </p:cNvPr>
+            <a:endParaRPr sz="1650" b="1">
+              <a:solidFill>
+                <a:srgbClr val="22D3EE"/>
+              </a:solidFill>
+              <a:latin typeface="Microsoft YaHei"/>
+              <a:ea typeface="Microsoft YaHei"/>
+              <a:cs typeface="Microsoft YaHei"/>
+            </a:endParaRPr>
+          </a:p>
+        </p:txBody>
+      </p:sp>
+      <p:sp>
+        <p:nvSpPr>
+          <p:cNvPr id="12" name="矩形 11"/>
           <p:cNvSpPr>
             <a:spLocks noGrp="1"/>
           </p:cNvSpPr>
@@ -6801,18 +6328,20 @@
               </a:rPr>
               <a:t>复核测试结果，整理文档、波形与答辩材料</a:t>
             </a:r>
-          </a:p>
-        </p:txBody>
-      </p:sp>
-      <p:sp>
-        <p:nvSpPr>
-          <p:cNvPr id="14" name="Text 3">
-            <a:extLst>
-              <a:ext uri="{FF2B5EF4-FFF2-40B4-BE49-F238E27FC236}">
-                <a16:creationId xmlns:a16="http://schemas.microsoft.com/office/drawing/2014/main" id="{4D6D8058-470E-4119-8998-3A52D585992F}"/>
-              </a:ext>
-            </a:extLst>
-          </p:cNvPr>
+            <a:endParaRPr sz="1575" b="0">
+              <a:solidFill>
+                <a:srgbClr val="F7FAFF"/>
+              </a:solidFill>
+              <a:latin typeface="Microsoft YaHei"/>
+              <a:ea typeface="Microsoft YaHei"/>
+              <a:cs typeface="Microsoft YaHei"/>
+            </a:endParaRPr>
+          </a:p>
+        </p:txBody>
+      </p:sp>
+      <p:sp>
+        <p:nvSpPr>
+          <p:cNvPr id="14" name="Text 3"/>
           <p:cNvSpPr>
             <a:spLocks noGrp="1"/>
           </p:cNvSpPr>
@@ -6852,13 +6381,7 @@
       </p:sp>
       <p:sp>
         <p:nvSpPr>
-          <p:cNvPr id="16" name="Text 16">
-            <a:extLst>
-              <a:ext uri="{FF2B5EF4-FFF2-40B4-BE49-F238E27FC236}">
-                <a16:creationId xmlns:a16="http://schemas.microsoft.com/office/drawing/2014/main" id="{A5066672-5247-606F-19D7-F418F67F2E4E}"/>
-              </a:ext>
-            </a:extLst>
-          </p:cNvPr>
+          <p:cNvPr id="16" name="Text 16"/>
           <p:cNvSpPr>
             <a:spLocks noGrp="1"/>
           </p:cNvSpPr>
@@ -6899,11 +6422,6 @@
         </p:txBody>
       </p:sp>
     </p:spTree>
-    <p:extLst>
-      <p:ext uri="{BB962C8B-B14F-4D97-AF65-F5344CB8AC3E}">
-        <p14:creationId xmlns:p14="http://schemas.microsoft.com/office/powerpoint/2010/main" val="1910311476"/>
-      </p:ext>
-    </p:extLst>
   </p:cSld>
   <p:clrMapOvr>
     <a:masterClrMapping/>
@@ -6938,13 +6456,7 @@
       </p:grpSpPr>
       <p:sp>
         <p:nvSpPr>
-          <p:cNvPr id="2" name="Text 0">
-            <a:extLst>
-              <a:ext uri="{FF2B5EF4-FFF2-40B4-BE49-F238E27FC236}">
-                <a16:creationId xmlns:a16="http://schemas.microsoft.com/office/drawing/2014/main" id="{5FB8B271-E01D-4B09-8914-95CF8EFBC40F}"/>
-              </a:ext>
-            </a:extLst>
-          </p:cNvPr>
+          <p:cNvPr id="2" name="Text 0"/>
           <p:cNvSpPr>
             <a:spLocks noGrp="1"/>
           </p:cNvSpPr>
@@ -6986,13 +6498,7 @@
       </p:sp>
       <p:sp>
         <p:nvSpPr>
-          <p:cNvPr id="3" name="Text 1">
-            <a:extLst>
-              <a:ext uri="{FF2B5EF4-FFF2-40B4-BE49-F238E27FC236}">
-                <a16:creationId xmlns:a16="http://schemas.microsoft.com/office/drawing/2014/main" id="{3770C655-275D-40AA-BE9D-73E737C8C46C}"/>
-              </a:ext>
-            </a:extLst>
-          </p:cNvPr>
+          <p:cNvPr id="3" name="Text 1"/>
           <p:cNvSpPr>
             <a:spLocks noGrp="1"/>
           </p:cNvSpPr>
@@ -7034,13 +6540,7 @@
       </p:sp>
       <p:sp>
         <p:nvSpPr>
-          <p:cNvPr id="4" name="Text 2">
-            <a:extLst>
-              <a:ext uri="{FF2B5EF4-FFF2-40B4-BE49-F238E27FC236}">
-                <a16:creationId xmlns:a16="http://schemas.microsoft.com/office/drawing/2014/main" id="{CC6DEFC5-51B3-43B1-BF39-C5B3471ECB50}"/>
-              </a:ext>
-            </a:extLst>
-          </p:cNvPr>
+          <p:cNvPr id="4" name="Text 2"/>
           <p:cNvSpPr>
             <a:spLocks noGrp="1"/>
           </p:cNvSpPr>
@@ -7082,13 +6582,7 @@
       </p:sp>
       <p:sp>
         <p:nvSpPr>
-          <p:cNvPr id="5" name="Text 3">
-            <a:extLst>
-              <a:ext uri="{FF2B5EF4-FFF2-40B4-BE49-F238E27FC236}">
-                <a16:creationId xmlns:a16="http://schemas.microsoft.com/office/drawing/2014/main" id="{46311D23-D46B-464D-838F-B7CD5E2C4891}"/>
-              </a:ext>
-            </a:extLst>
-          </p:cNvPr>
+          <p:cNvPr id="5" name="Text 3"/>
           <p:cNvSpPr>
             <a:spLocks noGrp="1"/>
           </p:cNvSpPr>
@@ -7128,13 +6622,7 @@
       </p:sp>
       <p:sp>
         <p:nvSpPr>
-          <p:cNvPr id="6" name="Shape 4">
-            <a:extLst>
-              <a:ext uri="{FF2B5EF4-FFF2-40B4-BE49-F238E27FC236}">
-                <a16:creationId xmlns:a16="http://schemas.microsoft.com/office/drawing/2014/main" id="{131D346D-802D-4EFA-BD6D-2567D5BCE96C}"/>
-              </a:ext>
-            </a:extLst>
-          </p:cNvPr>
+          <p:cNvPr id="6" name="Shape 4"/>
           <p:cNvSpPr>
             <a:spLocks noGrp="1"/>
           </p:cNvSpPr>
@@ -7161,13 +6649,7 @@
       </p:sp>
       <p:sp>
         <p:nvSpPr>
-          <p:cNvPr id="7" name="Shape 5">
-            <a:extLst>
-              <a:ext uri="{FF2B5EF4-FFF2-40B4-BE49-F238E27FC236}">
-                <a16:creationId xmlns:a16="http://schemas.microsoft.com/office/drawing/2014/main" id="{7199FC26-DF40-4E77-9984-C5042738CB5B}"/>
-              </a:ext>
-            </a:extLst>
-          </p:cNvPr>
+          <p:cNvPr id="7" name="Shape 5"/>
           <p:cNvSpPr>
             <a:spLocks noGrp="1"/>
           </p:cNvSpPr>
@@ -7192,13 +6674,7 @@
       </p:sp>
       <p:sp>
         <p:nvSpPr>
-          <p:cNvPr id="8" name="Text 6">
-            <a:extLst>
-              <a:ext uri="{FF2B5EF4-FFF2-40B4-BE49-F238E27FC236}">
-                <a16:creationId xmlns:a16="http://schemas.microsoft.com/office/drawing/2014/main" id="{FA8F3072-6F70-4D18-BE87-C60ED2468489}"/>
-              </a:ext>
-            </a:extLst>
-          </p:cNvPr>
+          <p:cNvPr id="8" name="Text 6"/>
           <p:cNvSpPr>
             <a:spLocks noGrp="1"/>
           </p:cNvSpPr>
@@ -7298,13 +6774,7 @@
       </p:sp>
       <p:sp>
         <p:nvSpPr>
-          <p:cNvPr id="9" name="Text 7">
-            <a:extLst>
-              <a:ext uri="{FF2B5EF4-FFF2-40B4-BE49-F238E27FC236}">
-                <a16:creationId xmlns:a16="http://schemas.microsoft.com/office/drawing/2014/main" id="{9204BA65-F399-45C5-8A07-AD426240EB8F}"/>
-              </a:ext>
-            </a:extLst>
-          </p:cNvPr>
+          <p:cNvPr id="9" name="Text 7"/>
           <p:cNvSpPr>
             <a:spLocks noGrp="1"/>
           </p:cNvSpPr>
@@ -7404,13 +6874,7 @@
       </p:sp>
       <p:sp>
         <p:nvSpPr>
-          <p:cNvPr id="10" name="Text 8">
-            <a:extLst>
-              <a:ext uri="{FF2B5EF4-FFF2-40B4-BE49-F238E27FC236}">
-                <a16:creationId xmlns:a16="http://schemas.microsoft.com/office/drawing/2014/main" id="{96AD2A5F-9580-466C-8D91-DD48F07A5FC8}"/>
-              </a:ext>
-            </a:extLst>
-          </p:cNvPr>
+          <p:cNvPr id="10" name="Text 8"/>
           <p:cNvSpPr>
             <a:spLocks noGrp="1"/>
           </p:cNvSpPr>
@@ -7510,13 +6974,7 @@
       </p:sp>
       <p:sp>
         <p:nvSpPr>
-          <p:cNvPr id="11" name="Text 9">
-            <a:extLst>
-              <a:ext uri="{FF2B5EF4-FFF2-40B4-BE49-F238E27FC236}">
-                <a16:creationId xmlns:a16="http://schemas.microsoft.com/office/drawing/2014/main" id="{A411F031-68A6-410E-A1A3-5FC77BA894F0}"/>
-              </a:ext>
-            </a:extLst>
-          </p:cNvPr>
+          <p:cNvPr id="11" name="Text 9"/>
           <p:cNvSpPr>
             <a:spLocks noGrp="1"/>
           </p:cNvSpPr>
@@ -7558,13 +7016,7 @@
       </p:sp>
       <p:sp>
         <p:nvSpPr>
-          <p:cNvPr id="12" name="Shape 10">
-            <a:extLst>
-              <a:ext uri="{FF2B5EF4-FFF2-40B4-BE49-F238E27FC236}">
-                <a16:creationId xmlns:a16="http://schemas.microsoft.com/office/drawing/2014/main" id="{0DF4EDD0-329B-4B7E-9F58-1D67BA0BCBD8}"/>
-              </a:ext>
-            </a:extLst>
-          </p:cNvPr>
+          <p:cNvPr id="12" name="Shape 10"/>
           <p:cNvSpPr>
             <a:spLocks noGrp="1"/>
           </p:cNvSpPr>
@@ -7591,13 +7043,7 @@
       </p:sp>
       <p:sp>
         <p:nvSpPr>
-          <p:cNvPr id="13" name="Shape 11">
-            <a:extLst>
-              <a:ext uri="{FF2B5EF4-FFF2-40B4-BE49-F238E27FC236}">
-                <a16:creationId xmlns:a16="http://schemas.microsoft.com/office/drawing/2014/main" id="{5B46D986-3468-4550-A36D-0B23C482E91E}"/>
-              </a:ext>
-            </a:extLst>
-          </p:cNvPr>
+          <p:cNvPr id="13" name="Shape 11"/>
           <p:cNvSpPr>
             <a:spLocks noGrp="1"/>
           </p:cNvSpPr>
@@ -7624,13 +7070,7 @@
       </p:sp>
       <p:sp>
         <p:nvSpPr>
-          <p:cNvPr id="14" name="Text 12">
-            <a:extLst>
-              <a:ext uri="{FF2B5EF4-FFF2-40B4-BE49-F238E27FC236}">
-                <a16:creationId xmlns:a16="http://schemas.microsoft.com/office/drawing/2014/main" id="{A62F91C2-A98D-4AE4-BB5B-5C8D87FE17EC}"/>
-              </a:ext>
-            </a:extLst>
-          </p:cNvPr>
+          <p:cNvPr id="14" name="Text 12"/>
           <p:cNvSpPr>
             <a:spLocks noGrp="1"/>
           </p:cNvSpPr>
@@ -7696,13 +7136,7 @@
       </p:sp>
       <p:sp>
         <p:nvSpPr>
-          <p:cNvPr id="15" name="Text 13">
-            <a:extLst>
-              <a:ext uri="{FF2B5EF4-FFF2-40B4-BE49-F238E27FC236}">
-                <a16:creationId xmlns:a16="http://schemas.microsoft.com/office/drawing/2014/main" id="{D3903A9C-8860-4BD0-B798-95ACAD7D1E7B}"/>
-              </a:ext>
-            </a:extLst>
-          </p:cNvPr>
+          <p:cNvPr id="15" name="Text 13"/>
           <p:cNvSpPr>
             <a:spLocks noGrp="1"/>
           </p:cNvSpPr>
@@ -7768,13 +7202,7 @@
       </p:sp>
       <p:sp>
         <p:nvSpPr>
-          <p:cNvPr id="16" name="Text 14">
-            <a:extLst>
-              <a:ext uri="{FF2B5EF4-FFF2-40B4-BE49-F238E27FC236}">
-                <a16:creationId xmlns:a16="http://schemas.microsoft.com/office/drawing/2014/main" id="{7D809E4B-8CBD-4EA2-9273-C3E393C15FB7}"/>
-              </a:ext>
-            </a:extLst>
-          </p:cNvPr>
+          <p:cNvPr id="16" name="Text 14"/>
           <p:cNvSpPr>
             <a:spLocks noGrp="1"/>
           </p:cNvSpPr>
@@ -7840,13 +7268,7 @@
       </p:sp>
       <p:sp>
         <p:nvSpPr>
-          <p:cNvPr id="17" name="Text 15">
-            <a:extLst>
-              <a:ext uri="{FF2B5EF4-FFF2-40B4-BE49-F238E27FC236}">
-                <a16:creationId xmlns:a16="http://schemas.microsoft.com/office/drawing/2014/main" id="{050C6DB2-F0ED-4E11-B1E0-AB0712EC718F}"/>
-              </a:ext>
-            </a:extLst>
-          </p:cNvPr>
+          <p:cNvPr id="17" name="Text 15"/>
           <p:cNvSpPr>
             <a:spLocks noGrp="1"/>
           </p:cNvSpPr>
@@ -7895,13 +7317,7 @@
       </p:sp>
       <p:sp>
         <p:nvSpPr>
-          <p:cNvPr id="18" name="Text 16">
-            <a:extLst>
-              <a:ext uri="{FF2B5EF4-FFF2-40B4-BE49-F238E27FC236}">
-                <a16:creationId xmlns:a16="http://schemas.microsoft.com/office/drawing/2014/main" id="{0045B4C8-7E1A-4D35-A5D0-B8427CF5EBE7}"/>
-              </a:ext>
-            </a:extLst>
-          </p:cNvPr>
+          <p:cNvPr id="18" name="Text 16"/>
           <p:cNvSpPr>
             <a:spLocks noGrp="1"/>
           </p:cNvSpPr>
@@ -7942,11 +7358,6 @@
         </p:txBody>
       </p:sp>
     </p:spTree>
-    <p:extLst>
-      <p:ext uri="{BB962C8B-B14F-4D97-AF65-F5344CB8AC3E}">
-        <p14:creationId xmlns:p14="http://schemas.microsoft.com/office/powerpoint/2010/main" val="304622194"/>
-      </p:ext>
-    </p:extLst>
   </p:cSld>
   <p:clrMapOvr>
     <a:masterClrMapping/>
@@ -7981,13 +7392,7 @@
       </p:grpSpPr>
       <p:sp>
         <p:nvSpPr>
-          <p:cNvPr id="2" name="Text 0">
-            <a:extLst>
-              <a:ext uri="{FF2B5EF4-FFF2-40B4-BE49-F238E27FC236}">
-                <a16:creationId xmlns:a16="http://schemas.microsoft.com/office/drawing/2014/main" id="{9C37CF1B-9DD0-4127-8CF4-A156AE9ABD96}"/>
-              </a:ext>
-            </a:extLst>
-          </p:cNvPr>
+          <p:cNvPr id="2" name="Text 0"/>
           <p:cNvSpPr>
             <a:spLocks noGrp="1"/>
           </p:cNvSpPr>
@@ -8029,13 +7434,7 @@
       </p:sp>
       <p:sp>
         <p:nvSpPr>
-          <p:cNvPr id="3" name="Text 1">
-            <a:extLst>
-              <a:ext uri="{FF2B5EF4-FFF2-40B4-BE49-F238E27FC236}">
-                <a16:creationId xmlns:a16="http://schemas.microsoft.com/office/drawing/2014/main" id="{8D98CA64-212F-46C7-98E5-C7AD4561A75B}"/>
-              </a:ext>
-            </a:extLst>
-          </p:cNvPr>
+          <p:cNvPr id="3" name="Text 1"/>
           <p:cNvSpPr>
             <a:spLocks noGrp="1"/>
           </p:cNvSpPr>
@@ -8077,13 +7476,7 @@
       </p:sp>
       <p:sp>
         <p:nvSpPr>
-          <p:cNvPr id="4" name="Text 2">
-            <a:extLst>
-              <a:ext uri="{FF2B5EF4-FFF2-40B4-BE49-F238E27FC236}">
-                <a16:creationId xmlns:a16="http://schemas.microsoft.com/office/drawing/2014/main" id="{3DFA3F80-4474-4BD8-AF4A-BF6D381A16D0}"/>
-              </a:ext>
-            </a:extLst>
-          </p:cNvPr>
+          <p:cNvPr id="4" name="Text 2"/>
           <p:cNvSpPr>
             <a:spLocks noGrp="1"/>
           </p:cNvSpPr>
@@ -8125,13 +7518,7 @@
       </p:sp>
       <p:sp>
         <p:nvSpPr>
-          <p:cNvPr id="5" name="Text 3">
-            <a:extLst>
-              <a:ext uri="{FF2B5EF4-FFF2-40B4-BE49-F238E27FC236}">
-                <a16:creationId xmlns:a16="http://schemas.microsoft.com/office/drawing/2014/main" id="{209D77D8-44CF-4670-B207-CC326AA385DF}"/>
-              </a:ext>
-            </a:extLst>
-          </p:cNvPr>
+          <p:cNvPr id="5" name="Text 3"/>
           <p:cNvSpPr>
             <a:spLocks noGrp="1"/>
           </p:cNvSpPr>
@@ -8171,13 +7558,7 @@
       </p:sp>
       <p:sp>
         <p:nvSpPr>
-          <p:cNvPr id="6" name="Shape 4">
-            <a:extLst>
-              <a:ext uri="{FF2B5EF4-FFF2-40B4-BE49-F238E27FC236}">
-                <a16:creationId xmlns:a16="http://schemas.microsoft.com/office/drawing/2014/main" id="{18C38BE8-D42D-4252-BF6B-D9B60682DE0B}"/>
-              </a:ext>
-            </a:extLst>
-          </p:cNvPr>
+          <p:cNvPr id="6" name="Shape 4"/>
           <p:cNvSpPr>
             <a:spLocks noGrp="1"/>
           </p:cNvSpPr>
@@ -8204,13 +7585,7 @@
       </p:sp>
       <p:sp>
         <p:nvSpPr>
-          <p:cNvPr id="7" name="Shape 5">
-            <a:extLst>
-              <a:ext uri="{FF2B5EF4-FFF2-40B4-BE49-F238E27FC236}">
-                <a16:creationId xmlns:a16="http://schemas.microsoft.com/office/drawing/2014/main" id="{91A2B711-79F2-4FC8-943C-4179A40E96E2}"/>
-              </a:ext>
-            </a:extLst>
-          </p:cNvPr>
+          <p:cNvPr id="7" name="Shape 5"/>
           <p:cNvSpPr>
             <a:spLocks noGrp="1"/>
           </p:cNvSpPr>
@@ -8235,13 +7610,7 @@
       </p:sp>
       <p:sp>
         <p:nvSpPr>
-          <p:cNvPr id="8" name="Text 6">
-            <a:extLst>
-              <a:ext uri="{FF2B5EF4-FFF2-40B4-BE49-F238E27FC236}">
-                <a16:creationId xmlns:a16="http://schemas.microsoft.com/office/drawing/2014/main" id="{3892A2F9-FF27-4858-B27F-AF834C142B8C}"/>
-              </a:ext>
-            </a:extLst>
-          </p:cNvPr>
+          <p:cNvPr id="8" name="Text 6"/>
           <p:cNvSpPr>
             <a:spLocks noGrp="1"/>
           </p:cNvSpPr>
@@ -8307,13 +7676,7 @@
       </p:sp>
       <p:sp>
         <p:nvSpPr>
-          <p:cNvPr id="9" name="Text 7">
-            <a:extLst>
-              <a:ext uri="{FF2B5EF4-FFF2-40B4-BE49-F238E27FC236}">
-                <a16:creationId xmlns:a16="http://schemas.microsoft.com/office/drawing/2014/main" id="{D1FD1969-D324-402D-9625-4329DAFBA303}"/>
-              </a:ext>
-            </a:extLst>
-          </p:cNvPr>
+          <p:cNvPr id="9" name="Text 7"/>
           <p:cNvSpPr>
             <a:spLocks noGrp="1"/>
           </p:cNvSpPr>
@@ -8379,13 +7742,7 @@
       </p:sp>
       <p:sp>
         <p:nvSpPr>
-          <p:cNvPr id="10" name="Text 8">
-            <a:extLst>
-              <a:ext uri="{FF2B5EF4-FFF2-40B4-BE49-F238E27FC236}">
-                <a16:creationId xmlns:a16="http://schemas.microsoft.com/office/drawing/2014/main" id="{AD17D552-3E1E-4D5C-A76C-0FF8DBFB5D20}"/>
-              </a:ext>
-            </a:extLst>
-          </p:cNvPr>
+          <p:cNvPr id="10" name="Text 8"/>
           <p:cNvSpPr>
             <a:spLocks noGrp="1"/>
           </p:cNvSpPr>
@@ -8451,13 +7808,7 @@
       </p:sp>
       <p:sp>
         <p:nvSpPr>
-          <p:cNvPr id="11" name="Text 9">
-            <a:extLst>
-              <a:ext uri="{FF2B5EF4-FFF2-40B4-BE49-F238E27FC236}">
-                <a16:creationId xmlns:a16="http://schemas.microsoft.com/office/drawing/2014/main" id="{03B12CAA-476F-4D4A-A758-3E6970CBBC45}"/>
-              </a:ext>
-            </a:extLst>
-          </p:cNvPr>
+          <p:cNvPr id="11" name="Text 9"/>
           <p:cNvSpPr>
             <a:spLocks noGrp="1"/>
           </p:cNvSpPr>
@@ -8523,13 +7874,7 @@
       </p:sp>
       <p:sp>
         <p:nvSpPr>
-          <p:cNvPr id="12" name="Text 10">
-            <a:extLst>
-              <a:ext uri="{FF2B5EF4-FFF2-40B4-BE49-F238E27FC236}">
-                <a16:creationId xmlns:a16="http://schemas.microsoft.com/office/drawing/2014/main" id="{32348FFA-2FBF-44AB-9BCE-CC7AF075CE57}"/>
-              </a:ext>
-            </a:extLst>
-          </p:cNvPr>
+          <p:cNvPr id="12" name="Text 10"/>
           <p:cNvSpPr>
             <a:spLocks noGrp="1"/>
           </p:cNvSpPr>
@@ -8595,13 +7940,7 @@
       </p:sp>
       <p:sp>
         <p:nvSpPr>
-          <p:cNvPr id="13" name="Text 11">
-            <a:extLst>
-              <a:ext uri="{FF2B5EF4-FFF2-40B4-BE49-F238E27FC236}">
-                <a16:creationId xmlns:a16="http://schemas.microsoft.com/office/drawing/2014/main" id="{6164C221-78B4-4152-86A6-16A2182E9E33}"/>
-              </a:ext>
-            </a:extLst>
-          </p:cNvPr>
+          <p:cNvPr id="13" name="Text 11"/>
           <p:cNvSpPr>
             <a:spLocks noGrp="1"/>
           </p:cNvSpPr>
@@ -8643,13 +7982,7 @@
       </p:sp>
       <p:sp>
         <p:nvSpPr>
-          <p:cNvPr id="14" name="Text 12">
-            <a:extLst>
-              <a:ext uri="{FF2B5EF4-FFF2-40B4-BE49-F238E27FC236}">
-                <a16:creationId xmlns:a16="http://schemas.microsoft.com/office/drawing/2014/main" id="{88D68588-9E2D-4644-BE19-AEC84094B2AC}"/>
-              </a:ext>
-            </a:extLst>
-          </p:cNvPr>
+          <p:cNvPr id="14" name="Text 12"/>
           <p:cNvSpPr>
             <a:spLocks noGrp="1"/>
           </p:cNvSpPr>
@@ -8742,13 +8075,7 @@
       </p:sp>
       <p:sp>
         <p:nvSpPr>
-          <p:cNvPr id="15" name="Text 13">
-            <a:extLst>
-              <a:ext uri="{FF2B5EF4-FFF2-40B4-BE49-F238E27FC236}">
-                <a16:creationId xmlns:a16="http://schemas.microsoft.com/office/drawing/2014/main" id="{B55963AE-58E4-46FA-A071-D981F3FFAAEA}"/>
-              </a:ext>
-            </a:extLst>
-          </p:cNvPr>
+          <p:cNvPr id="15" name="Text 13"/>
           <p:cNvSpPr>
             <a:spLocks noGrp="1"/>
           </p:cNvSpPr>
@@ -8819,13 +8146,7 @@
       </p:sp>
       <p:sp>
         <p:nvSpPr>
-          <p:cNvPr id="16" name="Text 14">
-            <a:extLst>
-              <a:ext uri="{FF2B5EF4-FFF2-40B4-BE49-F238E27FC236}">
-                <a16:creationId xmlns:a16="http://schemas.microsoft.com/office/drawing/2014/main" id="{D35C0F09-607E-4A68-A937-BB876B622FFA}"/>
-              </a:ext>
-            </a:extLst>
-          </p:cNvPr>
+          <p:cNvPr id="16" name="Text 14"/>
           <p:cNvSpPr>
             <a:spLocks noGrp="1"/>
           </p:cNvSpPr>
@@ -8867,13 +8188,7 @@
       </p:sp>
       <p:sp>
         <p:nvSpPr>
-          <p:cNvPr id="17" name="Shape 15">
-            <a:extLst>
-              <a:ext uri="{FF2B5EF4-FFF2-40B4-BE49-F238E27FC236}">
-                <a16:creationId xmlns:a16="http://schemas.microsoft.com/office/drawing/2014/main" id="{B2301EC3-4A86-464F-920F-5AD8812BCEB8}"/>
-              </a:ext>
-            </a:extLst>
-          </p:cNvPr>
+          <p:cNvPr id="17" name="Shape 15"/>
           <p:cNvSpPr>
             <a:spLocks noGrp="1"/>
           </p:cNvSpPr>
@@ -8900,13 +8215,7 @@
       </p:sp>
       <p:sp>
         <p:nvSpPr>
-          <p:cNvPr id="18" name="Shape 16">
-            <a:extLst>
-              <a:ext uri="{FF2B5EF4-FFF2-40B4-BE49-F238E27FC236}">
-                <a16:creationId xmlns:a16="http://schemas.microsoft.com/office/drawing/2014/main" id="{2BAA8D22-A71E-457F-AFEC-5C8851C3F9BC}"/>
-              </a:ext>
-            </a:extLst>
-          </p:cNvPr>
+          <p:cNvPr id="18" name="Shape 16"/>
           <p:cNvSpPr>
             <a:spLocks noGrp="1"/>
           </p:cNvSpPr>
@@ -8933,13 +8242,7 @@
       </p:sp>
       <p:sp>
         <p:nvSpPr>
-          <p:cNvPr id="19" name="Text 17">
-            <a:extLst>
-              <a:ext uri="{FF2B5EF4-FFF2-40B4-BE49-F238E27FC236}">
-                <a16:creationId xmlns:a16="http://schemas.microsoft.com/office/drawing/2014/main" id="{ED76B72A-8AA9-4F19-9A1C-685F6626C525}"/>
-              </a:ext>
-            </a:extLst>
-          </p:cNvPr>
+          <p:cNvPr id="19" name="Text 17"/>
           <p:cNvSpPr>
             <a:spLocks noGrp="1"/>
           </p:cNvSpPr>
@@ -9005,13 +8308,7 @@
       </p:sp>
       <p:sp>
         <p:nvSpPr>
-          <p:cNvPr id="20" name="Text 18">
-            <a:extLst>
-              <a:ext uri="{FF2B5EF4-FFF2-40B4-BE49-F238E27FC236}">
-                <a16:creationId xmlns:a16="http://schemas.microsoft.com/office/drawing/2014/main" id="{FD904104-0429-4055-83EF-E5BA61F400B6}"/>
-              </a:ext>
-            </a:extLst>
-          </p:cNvPr>
+          <p:cNvPr id="20" name="Text 18"/>
           <p:cNvSpPr>
             <a:spLocks noGrp="1"/>
           </p:cNvSpPr>
@@ -9077,13 +8374,7 @@
       </p:sp>
       <p:sp>
         <p:nvSpPr>
-          <p:cNvPr id="21" name="Text 19">
-            <a:extLst>
-              <a:ext uri="{FF2B5EF4-FFF2-40B4-BE49-F238E27FC236}">
-                <a16:creationId xmlns:a16="http://schemas.microsoft.com/office/drawing/2014/main" id="{A02EDB19-A65B-43C0-BE75-2850BC4DA18F}"/>
-              </a:ext>
-            </a:extLst>
-          </p:cNvPr>
+          <p:cNvPr id="21" name="Text 19"/>
           <p:cNvSpPr>
             <a:spLocks noGrp="1"/>
           </p:cNvSpPr>
@@ -9149,13 +8440,7 @@
       </p:sp>
       <p:sp>
         <p:nvSpPr>
-          <p:cNvPr id="22" name="Text 20">
-            <a:extLst>
-              <a:ext uri="{FF2B5EF4-FFF2-40B4-BE49-F238E27FC236}">
-                <a16:creationId xmlns:a16="http://schemas.microsoft.com/office/drawing/2014/main" id="{B9EA1070-B971-4F25-9DEF-7794B4346717}"/>
-              </a:ext>
-            </a:extLst>
-          </p:cNvPr>
+          <p:cNvPr id="22" name="Text 20"/>
           <p:cNvSpPr>
             <a:spLocks noGrp="1"/>
           </p:cNvSpPr>
@@ -9196,11 +8481,6 @@
         </p:txBody>
       </p:sp>
     </p:spTree>
-    <p:extLst>
-      <p:ext uri="{BB962C8B-B14F-4D97-AF65-F5344CB8AC3E}">
-        <p14:creationId xmlns:p14="http://schemas.microsoft.com/office/powerpoint/2010/main" val="1943496028"/>
-      </p:ext>
-    </p:extLst>
   </p:cSld>
   <p:clrMapOvr>
     <a:masterClrMapping/>
@@ -9235,13 +8515,7 @@
       </p:grpSpPr>
       <p:sp>
         <p:nvSpPr>
-          <p:cNvPr id="2" name="Text 0">
-            <a:extLst>
-              <a:ext uri="{FF2B5EF4-FFF2-40B4-BE49-F238E27FC236}">
-                <a16:creationId xmlns:a16="http://schemas.microsoft.com/office/drawing/2014/main" id="{D303AA25-DCB1-485E-A244-94468B7759F2}"/>
-              </a:ext>
-            </a:extLst>
-          </p:cNvPr>
+          <p:cNvPr id="2" name="Text 0"/>
           <p:cNvSpPr>
             <a:spLocks noGrp="1"/>
           </p:cNvSpPr>
@@ -9283,13 +8557,7 @@
       </p:sp>
       <p:sp>
         <p:nvSpPr>
-          <p:cNvPr id="3" name="Text 1">
-            <a:extLst>
-              <a:ext uri="{FF2B5EF4-FFF2-40B4-BE49-F238E27FC236}">
-                <a16:creationId xmlns:a16="http://schemas.microsoft.com/office/drawing/2014/main" id="{1ABA21CC-7CF1-40D9-B6C0-69DA10390D3F}"/>
-              </a:ext>
-            </a:extLst>
-          </p:cNvPr>
+          <p:cNvPr id="3" name="Text 1"/>
           <p:cNvSpPr>
             <a:spLocks noGrp="1"/>
           </p:cNvSpPr>
@@ -9331,13 +8599,7 @@
       </p:sp>
       <p:sp>
         <p:nvSpPr>
-          <p:cNvPr id="4" name="Text 2">
-            <a:extLst>
-              <a:ext uri="{FF2B5EF4-FFF2-40B4-BE49-F238E27FC236}">
-                <a16:creationId xmlns:a16="http://schemas.microsoft.com/office/drawing/2014/main" id="{31238720-CCBD-4697-A04A-EE14C11D5D40}"/>
-              </a:ext>
-            </a:extLst>
-          </p:cNvPr>
+          <p:cNvPr id="4" name="Text 2"/>
           <p:cNvSpPr>
             <a:spLocks noGrp="1"/>
           </p:cNvSpPr>
@@ -9379,13 +8641,7 @@
       </p:sp>
       <p:sp>
         <p:nvSpPr>
-          <p:cNvPr id="5" name="Text 3">
-            <a:extLst>
-              <a:ext uri="{FF2B5EF4-FFF2-40B4-BE49-F238E27FC236}">
-                <a16:creationId xmlns:a16="http://schemas.microsoft.com/office/drawing/2014/main" id="{F9299BA2-B99D-40A7-B2BA-A39BFE0DF3E8}"/>
-              </a:ext>
-            </a:extLst>
-          </p:cNvPr>
+          <p:cNvPr id="5" name="Text 3"/>
           <p:cNvSpPr>
             <a:spLocks noGrp="1"/>
           </p:cNvSpPr>
@@ -9425,13 +8681,7 @@
       </p:sp>
       <p:sp>
         <p:nvSpPr>
-          <p:cNvPr id="6" name="Shape 4">
-            <a:extLst>
-              <a:ext uri="{FF2B5EF4-FFF2-40B4-BE49-F238E27FC236}">
-                <a16:creationId xmlns:a16="http://schemas.microsoft.com/office/drawing/2014/main" id="{F6619B22-C404-46A3-8416-5F3A3AFA6B1B}"/>
-              </a:ext>
-            </a:extLst>
-          </p:cNvPr>
+          <p:cNvPr id="6" name="Shape 4"/>
           <p:cNvSpPr>
             <a:spLocks noGrp="1"/>
           </p:cNvSpPr>
@@ -9458,13 +8708,7 @@
       </p:sp>
       <p:sp>
         <p:nvSpPr>
-          <p:cNvPr id="7" name="Shape 5">
-            <a:extLst>
-              <a:ext uri="{FF2B5EF4-FFF2-40B4-BE49-F238E27FC236}">
-                <a16:creationId xmlns:a16="http://schemas.microsoft.com/office/drawing/2014/main" id="{15D1D8B3-1D75-4B9A-96FF-F4B65619EA4D}"/>
-              </a:ext>
-            </a:extLst>
-          </p:cNvPr>
+          <p:cNvPr id="7" name="Shape 5"/>
           <p:cNvSpPr>
             <a:spLocks noGrp="1"/>
           </p:cNvSpPr>
@@ -9489,13 +8733,7 @@
       </p:sp>
       <p:sp>
         <p:nvSpPr>
-          <p:cNvPr id="8" name="Shape 6">
-            <a:extLst>
-              <a:ext uri="{FF2B5EF4-FFF2-40B4-BE49-F238E27FC236}">
-                <a16:creationId xmlns:a16="http://schemas.microsoft.com/office/drawing/2014/main" id="{B63149E8-DE8F-4FB5-96D7-9AEFF41063BC}"/>
-              </a:ext>
-            </a:extLst>
-          </p:cNvPr>
+          <p:cNvPr id="8" name="Shape 6"/>
           <p:cNvSpPr>
             <a:spLocks noGrp="1"/>
           </p:cNvSpPr>
@@ -9522,13 +8760,7 @@
       </p:sp>
       <p:sp>
         <p:nvSpPr>
-          <p:cNvPr id="9" name="Shape 7">
-            <a:extLst>
-              <a:ext uri="{FF2B5EF4-FFF2-40B4-BE49-F238E27FC236}">
-                <a16:creationId xmlns:a16="http://schemas.microsoft.com/office/drawing/2014/main" id="{6033FFEF-56EA-44CE-8F3C-088825BE8BF5}"/>
-              </a:ext>
-            </a:extLst>
-          </p:cNvPr>
+          <p:cNvPr id="9" name="Shape 7"/>
           <p:cNvSpPr>
             <a:spLocks noGrp="1"/>
           </p:cNvSpPr>
@@ -9555,13 +8787,7 @@
       </p:sp>
       <p:sp>
         <p:nvSpPr>
-          <p:cNvPr id="10" name="Shape 8">
-            <a:extLst>
-              <a:ext uri="{FF2B5EF4-FFF2-40B4-BE49-F238E27FC236}">
-                <a16:creationId xmlns:a16="http://schemas.microsoft.com/office/drawing/2014/main" id="{99757CF2-1800-40D4-A1E8-6B51C755ECC5}"/>
-              </a:ext>
-            </a:extLst>
-          </p:cNvPr>
+          <p:cNvPr id="10" name="Shape 8"/>
           <p:cNvSpPr>
             <a:spLocks noGrp="1"/>
           </p:cNvSpPr>
@@ -9588,13 +8814,7 @@
       </p:sp>
       <p:sp>
         <p:nvSpPr>
-          <p:cNvPr id="11" name="Shape 9">
-            <a:extLst>
-              <a:ext uri="{FF2B5EF4-FFF2-40B4-BE49-F238E27FC236}">
-                <a16:creationId xmlns:a16="http://schemas.microsoft.com/office/drawing/2014/main" id="{E4208618-91DA-4FE9-965E-455301EA11F0}"/>
-              </a:ext>
-            </a:extLst>
-          </p:cNvPr>
+          <p:cNvPr id="11" name="Shape 9"/>
           <p:cNvSpPr>
             <a:spLocks noGrp="1"/>
           </p:cNvSpPr>
@@ -9621,13 +8841,7 @@
       </p:sp>
       <p:sp>
         <p:nvSpPr>
-          <p:cNvPr id="12" name="Shape 10">
-            <a:extLst>
-              <a:ext uri="{FF2B5EF4-FFF2-40B4-BE49-F238E27FC236}">
-                <a16:creationId xmlns:a16="http://schemas.microsoft.com/office/drawing/2014/main" id="{1EF83FB7-FF97-4BC2-9ED7-CDB86FFF76C8}"/>
-              </a:ext>
-            </a:extLst>
-          </p:cNvPr>
+          <p:cNvPr id="12" name="Shape 10"/>
           <p:cNvSpPr>
             <a:spLocks noGrp="1"/>
           </p:cNvSpPr>
@@ -9654,13 +8868,7 @@
       </p:sp>
       <p:sp>
         <p:nvSpPr>
-          <p:cNvPr id="13" name="Text 11">
-            <a:extLst>
-              <a:ext uri="{FF2B5EF4-FFF2-40B4-BE49-F238E27FC236}">
-                <a16:creationId xmlns:a16="http://schemas.microsoft.com/office/drawing/2014/main" id="{712687F9-4C93-4312-805C-77333D1D4FC4}"/>
-              </a:ext>
-            </a:extLst>
-          </p:cNvPr>
+          <p:cNvPr id="13" name="Text 11"/>
           <p:cNvSpPr>
             <a:spLocks noGrp="1"/>
           </p:cNvSpPr>
@@ -9726,13 +8934,7 @@
       </p:sp>
       <p:sp>
         <p:nvSpPr>
-          <p:cNvPr id="14" name="Text 12">
-            <a:extLst>
-              <a:ext uri="{FF2B5EF4-FFF2-40B4-BE49-F238E27FC236}">
-                <a16:creationId xmlns:a16="http://schemas.microsoft.com/office/drawing/2014/main" id="{569FBA43-B2B3-4C8C-9A7E-4D1EE51AB5C2}"/>
-              </a:ext>
-            </a:extLst>
-          </p:cNvPr>
+          <p:cNvPr id="14" name="Text 12"/>
           <p:cNvSpPr>
             <a:spLocks noGrp="1"/>
           </p:cNvSpPr>
@@ -9798,13 +9000,7 @@
       </p:sp>
       <p:sp>
         <p:nvSpPr>
-          <p:cNvPr id="15" name="Text 13">
-            <a:extLst>
-              <a:ext uri="{FF2B5EF4-FFF2-40B4-BE49-F238E27FC236}">
-                <a16:creationId xmlns:a16="http://schemas.microsoft.com/office/drawing/2014/main" id="{EAC7C21D-0F71-4DD6-909F-D6BD04ED0BBE}"/>
-              </a:ext>
-            </a:extLst>
-          </p:cNvPr>
+          <p:cNvPr id="15" name="Text 13"/>
           <p:cNvSpPr>
             <a:spLocks noGrp="1"/>
           </p:cNvSpPr>
@@ -9870,13 +9066,7 @@
       </p:sp>
       <p:sp>
         <p:nvSpPr>
-          <p:cNvPr id="16" name="Text 14">
-            <a:extLst>
-              <a:ext uri="{FF2B5EF4-FFF2-40B4-BE49-F238E27FC236}">
-                <a16:creationId xmlns:a16="http://schemas.microsoft.com/office/drawing/2014/main" id="{949126E9-4746-4A2F-9798-BA24149ED591}"/>
-              </a:ext>
-            </a:extLst>
-          </p:cNvPr>
+          <p:cNvPr id="16" name="Text 14"/>
           <p:cNvSpPr>
             <a:spLocks noGrp="1"/>
           </p:cNvSpPr>
@@ -9942,13 +9132,7 @@
       </p:sp>
       <p:sp>
         <p:nvSpPr>
-          <p:cNvPr id="17" name="Text 15">
-            <a:extLst>
-              <a:ext uri="{FF2B5EF4-FFF2-40B4-BE49-F238E27FC236}">
-                <a16:creationId xmlns:a16="http://schemas.microsoft.com/office/drawing/2014/main" id="{61F0358B-6EBD-42EE-A239-A9371F727C4A}"/>
-              </a:ext>
-            </a:extLst>
-          </p:cNvPr>
+          <p:cNvPr id="17" name="Text 15"/>
           <p:cNvSpPr>
             <a:spLocks noGrp="1"/>
           </p:cNvSpPr>
@@ -10014,13 +9198,7 @@
       </p:sp>
       <p:sp>
         <p:nvSpPr>
-          <p:cNvPr id="18" name="Text 16">
-            <a:extLst>
-              <a:ext uri="{FF2B5EF4-FFF2-40B4-BE49-F238E27FC236}">
-                <a16:creationId xmlns:a16="http://schemas.microsoft.com/office/drawing/2014/main" id="{327DD1E6-A43B-4FE9-89FC-69F2841155AF}"/>
-              </a:ext>
-            </a:extLst>
-          </p:cNvPr>
+          <p:cNvPr id="18" name="Text 16"/>
           <p:cNvSpPr>
             <a:spLocks noGrp="1"/>
           </p:cNvSpPr>
@@ -10086,13 +9264,7 @@
       </p:sp>
       <p:sp>
         <p:nvSpPr>
-          <p:cNvPr id="19" name="Text 17">
-            <a:extLst>
-              <a:ext uri="{FF2B5EF4-FFF2-40B4-BE49-F238E27FC236}">
-                <a16:creationId xmlns:a16="http://schemas.microsoft.com/office/drawing/2014/main" id="{CE7E5528-F794-48ED-AFF2-C9A5879F5A07}"/>
-              </a:ext>
-            </a:extLst>
-          </p:cNvPr>
+          <p:cNvPr id="19" name="Text 17"/>
           <p:cNvSpPr>
             <a:spLocks noGrp="1"/>
           </p:cNvSpPr>
@@ -10175,13 +9347,7 @@
       </p:sp>
       <p:sp>
         <p:nvSpPr>
-          <p:cNvPr id="20" name="Text 18">
-            <a:extLst>
-              <a:ext uri="{FF2B5EF4-FFF2-40B4-BE49-F238E27FC236}">
-                <a16:creationId xmlns:a16="http://schemas.microsoft.com/office/drawing/2014/main" id="{FA55E0FB-3E40-486E-9F89-569A95BADDC3}"/>
-              </a:ext>
-            </a:extLst>
-          </p:cNvPr>
+          <p:cNvPr id="20" name="Text 18"/>
           <p:cNvSpPr>
             <a:spLocks noGrp="1"/>
           </p:cNvSpPr>
@@ -10264,13 +9430,7 @@
       </p:sp>
       <p:sp>
         <p:nvSpPr>
-          <p:cNvPr id="21" name="Text 19">
-            <a:extLst>
-              <a:ext uri="{FF2B5EF4-FFF2-40B4-BE49-F238E27FC236}">
-                <a16:creationId xmlns:a16="http://schemas.microsoft.com/office/drawing/2014/main" id="{6756DE6B-5B4A-456F-8EB3-FC557478A852}"/>
-              </a:ext>
-            </a:extLst>
-          </p:cNvPr>
+          <p:cNvPr id="21" name="Text 19"/>
           <p:cNvSpPr>
             <a:spLocks noGrp="1"/>
           </p:cNvSpPr>
@@ -10353,13 +9513,7 @@
       </p:sp>
       <p:sp>
         <p:nvSpPr>
-          <p:cNvPr id="22" name="Text 20">
-            <a:extLst>
-              <a:ext uri="{FF2B5EF4-FFF2-40B4-BE49-F238E27FC236}">
-                <a16:creationId xmlns:a16="http://schemas.microsoft.com/office/drawing/2014/main" id="{E2F3D13A-24C8-4B3B-95AE-0F1F90BF3B3D}"/>
-              </a:ext>
-            </a:extLst>
-          </p:cNvPr>
+          <p:cNvPr id="22" name="Text 20"/>
           <p:cNvSpPr>
             <a:spLocks noGrp="1"/>
           </p:cNvSpPr>
@@ -10400,11 +9554,6 @@
         </p:txBody>
       </p:sp>
     </p:spTree>
-    <p:extLst>
-      <p:ext uri="{BB962C8B-B14F-4D97-AF65-F5344CB8AC3E}">
-        <p14:creationId xmlns:p14="http://schemas.microsoft.com/office/powerpoint/2010/main" val="883589287"/>
-      </p:ext>
-    </p:extLst>
   </p:cSld>
   <p:clrMapOvr>
     <a:masterClrMapping/>
@@ -10439,13 +9588,7 @@
       </p:grpSpPr>
       <p:sp>
         <p:nvSpPr>
-          <p:cNvPr id="2" name="Text 0">
-            <a:extLst>
-              <a:ext uri="{FF2B5EF4-FFF2-40B4-BE49-F238E27FC236}">
-                <a16:creationId xmlns:a16="http://schemas.microsoft.com/office/drawing/2014/main" id="{40185906-D8E3-4B9A-BA7E-F8DDBFACD95D}"/>
-              </a:ext>
-            </a:extLst>
-          </p:cNvPr>
+          <p:cNvPr id="2" name="Text 0"/>
           <p:cNvSpPr>
             <a:spLocks noGrp="1"/>
           </p:cNvSpPr>
@@ -10487,13 +9630,7 @@
       </p:sp>
       <p:sp>
         <p:nvSpPr>
-          <p:cNvPr id="3" name="Text 1">
-            <a:extLst>
-              <a:ext uri="{FF2B5EF4-FFF2-40B4-BE49-F238E27FC236}">
-                <a16:creationId xmlns:a16="http://schemas.microsoft.com/office/drawing/2014/main" id="{8A768BD3-53AB-4796-B735-C117676B9E8D}"/>
-              </a:ext>
-            </a:extLst>
-          </p:cNvPr>
+          <p:cNvPr id="3" name="Text 1"/>
           <p:cNvSpPr>
             <a:spLocks noGrp="1"/>
           </p:cNvSpPr>
@@ -10535,13 +9672,7 @@
       </p:sp>
       <p:sp>
         <p:nvSpPr>
-          <p:cNvPr id="4" name="Text 2">
-            <a:extLst>
-              <a:ext uri="{FF2B5EF4-FFF2-40B4-BE49-F238E27FC236}">
-                <a16:creationId xmlns:a16="http://schemas.microsoft.com/office/drawing/2014/main" id="{01DE9311-761D-406E-90C7-7DC7A9A2A536}"/>
-              </a:ext>
-            </a:extLst>
-          </p:cNvPr>
+          <p:cNvPr id="4" name="Text 2"/>
           <p:cNvSpPr>
             <a:spLocks noGrp="1"/>
           </p:cNvSpPr>
@@ -10583,13 +9714,7 @@
       </p:sp>
       <p:sp>
         <p:nvSpPr>
-          <p:cNvPr id="5" name="Text 3">
-            <a:extLst>
-              <a:ext uri="{FF2B5EF4-FFF2-40B4-BE49-F238E27FC236}">
-                <a16:creationId xmlns:a16="http://schemas.microsoft.com/office/drawing/2014/main" id="{1CE97A9F-8760-4388-88E7-E671B8EEBE7B}"/>
-              </a:ext>
-            </a:extLst>
-          </p:cNvPr>
+          <p:cNvPr id="5" name="Text 3"/>
           <p:cNvSpPr>
             <a:spLocks noGrp="1"/>
           </p:cNvSpPr>
@@ -10629,13 +9754,7 @@
       </p:sp>
       <p:sp>
         <p:nvSpPr>
-          <p:cNvPr id="6" name="Shape 4">
-            <a:extLst>
-              <a:ext uri="{FF2B5EF4-FFF2-40B4-BE49-F238E27FC236}">
-                <a16:creationId xmlns:a16="http://schemas.microsoft.com/office/drawing/2014/main" id="{432BD06B-47E6-4D54-8E5B-1F2EEEA40206}"/>
-              </a:ext>
-            </a:extLst>
-          </p:cNvPr>
+          <p:cNvPr id="6" name="Shape 4"/>
           <p:cNvSpPr>
             <a:spLocks noGrp="1"/>
           </p:cNvSpPr>
@@ -10662,13 +9781,7 @@
       </p:sp>
       <p:sp>
         <p:nvSpPr>
-          <p:cNvPr id="7" name="Shape 5">
-            <a:extLst>
-              <a:ext uri="{FF2B5EF4-FFF2-40B4-BE49-F238E27FC236}">
-                <a16:creationId xmlns:a16="http://schemas.microsoft.com/office/drawing/2014/main" id="{08710B1B-05EE-4AAB-B993-AB3E0B939549}"/>
-              </a:ext>
-            </a:extLst>
-          </p:cNvPr>
+          <p:cNvPr id="7" name="Shape 5"/>
           <p:cNvSpPr>
             <a:spLocks noGrp="1"/>
           </p:cNvSpPr>
@@ -10693,13 +9806,7 @@
       </p:sp>
       <p:sp>
         <p:nvSpPr>
-          <p:cNvPr id="8" name="Text 6">
-            <a:extLst>
-              <a:ext uri="{FF2B5EF4-FFF2-40B4-BE49-F238E27FC236}">
-                <a16:creationId xmlns:a16="http://schemas.microsoft.com/office/drawing/2014/main" id="{B97CABDC-4853-4999-B9BD-5B1D2AA7A9A2}"/>
-              </a:ext>
-            </a:extLst>
-          </p:cNvPr>
+          <p:cNvPr id="8" name="Text 6"/>
           <p:cNvSpPr>
             <a:spLocks noGrp="1"/>
           </p:cNvSpPr>
@@ -10741,13 +9848,7 @@
       </p:sp>
       <p:sp>
         <p:nvSpPr>
-          <p:cNvPr id="9" name="Text 7">
-            <a:extLst>
-              <a:ext uri="{FF2B5EF4-FFF2-40B4-BE49-F238E27FC236}">
-                <a16:creationId xmlns:a16="http://schemas.microsoft.com/office/drawing/2014/main" id="{CA5FF8C3-D7D5-402D-8C42-8908BDCDA3F2}"/>
-              </a:ext>
-            </a:extLst>
-          </p:cNvPr>
+          <p:cNvPr id="9" name="Text 7"/>
           <p:cNvSpPr>
             <a:spLocks noGrp="1"/>
           </p:cNvSpPr>
@@ -10796,13 +9897,7 @@
       </p:sp>
       <p:sp>
         <p:nvSpPr>
-          <p:cNvPr id="10" name="Text 8">
-            <a:extLst>
-              <a:ext uri="{FF2B5EF4-FFF2-40B4-BE49-F238E27FC236}">
-                <a16:creationId xmlns:a16="http://schemas.microsoft.com/office/drawing/2014/main" id="{1ED01602-5FCA-4F16-BAA3-035A2D180A4F}"/>
-              </a:ext>
-            </a:extLst>
-          </p:cNvPr>
+          <p:cNvPr id="10" name="Text 8"/>
           <p:cNvSpPr>
             <a:spLocks noGrp="1"/>
           </p:cNvSpPr>
@@ -10851,13 +9946,7 @@
       </p:sp>
       <p:sp>
         <p:nvSpPr>
-          <p:cNvPr id="11" name="Text 9">
-            <a:extLst>
-              <a:ext uri="{FF2B5EF4-FFF2-40B4-BE49-F238E27FC236}">
-                <a16:creationId xmlns:a16="http://schemas.microsoft.com/office/drawing/2014/main" id="{54F6D23B-564A-49AA-AE36-914814102E83}"/>
-              </a:ext>
-            </a:extLst>
-          </p:cNvPr>
+          <p:cNvPr id="11" name="Text 9"/>
           <p:cNvSpPr>
             <a:spLocks noGrp="1"/>
           </p:cNvSpPr>
@@ -10906,13 +9995,7 @@
       </p:sp>
       <p:sp>
         <p:nvSpPr>
-          <p:cNvPr id="12" name="Text 10">
-            <a:extLst>
-              <a:ext uri="{FF2B5EF4-FFF2-40B4-BE49-F238E27FC236}">
-                <a16:creationId xmlns:a16="http://schemas.microsoft.com/office/drawing/2014/main" id="{19B61225-585B-457A-B45C-ADA0C82AD624}"/>
-              </a:ext>
-            </a:extLst>
-          </p:cNvPr>
+          <p:cNvPr id="12" name="Text 10"/>
           <p:cNvSpPr>
             <a:spLocks noGrp="1"/>
           </p:cNvSpPr>
@@ -10961,13 +10044,7 @@
       </p:sp>
       <p:sp>
         <p:nvSpPr>
-          <p:cNvPr id="13" name="Text 11">
-            <a:extLst>
-              <a:ext uri="{FF2B5EF4-FFF2-40B4-BE49-F238E27FC236}">
-                <a16:creationId xmlns:a16="http://schemas.microsoft.com/office/drawing/2014/main" id="{6054EC66-B6CF-46E9-B881-6B042551F074}"/>
-              </a:ext>
-            </a:extLst>
-          </p:cNvPr>
+          <p:cNvPr id="13" name="Text 11"/>
           <p:cNvSpPr>
             <a:spLocks noGrp="1"/>
           </p:cNvSpPr>
@@ -11016,13 +10093,7 @@
       </p:sp>
       <p:sp>
         <p:nvSpPr>
-          <p:cNvPr id="14" name="Text 12">
-            <a:extLst>
-              <a:ext uri="{FF2B5EF4-FFF2-40B4-BE49-F238E27FC236}">
-                <a16:creationId xmlns:a16="http://schemas.microsoft.com/office/drawing/2014/main" id="{48E2B95B-AE6D-4F06-A23D-B9EF11EF247F}"/>
-              </a:ext>
-            </a:extLst>
-          </p:cNvPr>
+          <p:cNvPr id="14" name="Text 12"/>
           <p:cNvSpPr>
             <a:spLocks noGrp="1"/>
           </p:cNvSpPr>
@@ -11071,13 +10142,7 @@
       </p:sp>
       <p:sp>
         <p:nvSpPr>
-          <p:cNvPr id="15" name="Text 13">
-            <a:extLst>
-              <a:ext uri="{FF2B5EF4-FFF2-40B4-BE49-F238E27FC236}">
-                <a16:creationId xmlns:a16="http://schemas.microsoft.com/office/drawing/2014/main" id="{B09F3800-AF06-45B8-8C4B-2C4C057A2E08}"/>
-              </a:ext>
-            </a:extLst>
-          </p:cNvPr>
+          <p:cNvPr id="15" name="Text 13"/>
           <p:cNvSpPr>
             <a:spLocks noGrp="1"/>
           </p:cNvSpPr>
@@ -11126,13 +10191,7 @@
       </p:sp>
       <p:sp>
         <p:nvSpPr>
-          <p:cNvPr id="16" name="Text 14">
-            <a:extLst>
-              <a:ext uri="{FF2B5EF4-FFF2-40B4-BE49-F238E27FC236}">
-                <a16:creationId xmlns:a16="http://schemas.microsoft.com/office/drawing/2014/main" id="{3B017D91-90B5-4A6C-B814-8ADD569F04F6}"/>
-              </a:ext>
-            </a:extLst>
-          </p:cNvPr>
+          <p:cNvPr id="16" name="Text 14"/>
           <p:cNvSpPr>
             <a:spLocks noGrp="1"/>
           </p:cNvSpPr>
@@ -11181,13 +10240,7 @@
       </p:sp>
       <p:sp>
         <p:nvSpPr>
-          <p:cNvPr id="17" name="Text 15">
-            <a:extLst>
-              <a:ext uri="{FF2B5EF4-FFF2-40B4-BE49-F238E27FC236}">
-                <a16:creationId xmlns:a16="http://schemas.microsoft.com/office/drawing/2014/main" id="{38122CC0-0AC9-469C-80D0-2B785A6F27E1}"/>
-              </a:ext>
-            </a:extLst>
-          </p:cNvPr>
+          <p:cNvPr id="17" name="Text 15"/>
           <p:cNvSpPr>
             <a:spLocks noGrp="1"/>
           </p:cNvSpPr>
@@ -11229,13 +10282,7 @@
       </p:sp>
       <p:sp>
         <p:nvSpPr>
-          <p:cNvPr id="18" name="Shape 16">
-            <a:extLst>
-              <a:ext uri="{FF2B5EF4-FFF2-40B4-BE49-F238E27FC236}">
-                <a16:creationId xmlns:a16="http://schemas.microsoft.com/office/drawing/2014/main" id="{DAE029D9-6A21-473A-AAE8-F155A41C6687}"/>
-              </a:ext>
-            </a:extLst>
-          </p:cNvPr>
+          <p:cNvPr id="18" name="Shape 16"/>
           <p:cNvSpPr>
             <a:spLocks noGrp="1"/>
           </p:cNvSpPr>
@@ -11260,13 +10307,7 @@
       </p:sp>
       <p:sp>
         <p:nvSpPr>
-          <p:cNvPr id="19" name="Shape 17">
-            <a:extLst>
-              <a:ext uri="{FF2B5EF4-FFF2-40B4-BE49-F238E27FC236}">
-                <a16:creationId xmlns:a16="http://schemas.microsoft.com/office/drawing/2014/main" id="{A5F75EEB-7754-4957-97A5-47BA35A78A72}"/>
-              </a:ext>
-            </a:extLst>
-          </p:cNvPr>
+          <p:cNvPr id="19" name="Shape 17"/>
           <p:cNvSpPr>
             <a:spLocks noGrp="1"/>
           </p:cNvSpPr>
@@ -11291,13 +10332,7 @@
       </p:sp>
       <p:sp>
         <p:nvSpPr>
-          <p:cNvPr id="20" name="Shape 18">
-            <a:extLst>
-              <a:ext uri="{FF2B5EF4-FFF2-40B4-BE49-F238E27FC236}">
-                <a16:creationId xmlns:a16="http://schemas.microsoft.com/office/drawing/2014/main" id="{9C54D73A-DA01-40F1-9775-E8DA92D81A26}"/>
-              </a:ext>
-            </a:extLst>
-          </p:cNvPr>
+          <p:cNvPr id="20" name="Shape 18"/>
           <p:cNvSpPr>
             <a:spLocks noGrp="1"/>
           </p:cNvSpPr>
@@ -11322,13 +10357,7 @@
       </p:sp>
       <p:sp>
         <p:nvSpPr>
-          <p:cNvPr id="21" name="Shape 19">
-            <a:extLst>
-              <a:ext uri="{FF2B5EF4-FFF2-40B4-BE49-F238E27FC236}">
-                <a16:creationId xmlns:a16="http://schemas.microsoft.com/office/drawing/2014/main" id="{DCDA27CB-C903-4E1F-8969-7BC380EDDCF4}"/>
-              </a:ext>
-            </a:extLst>
-          </p:cNvPr>
+          <p:cNvPr id="21" name="Shape 19"/>
           <p:cNvSpPr>
             <a:spLocks noGrp="1"/>
           </p:cNvSpPr>
@@ -11353,13 +10382,7 @@
       </p:sp>
       <p:sp>
         <p:nvSpPr>
-          <p:cNvPr id="22" name="Shape 20">
-            <a:extLst>
-              <a:ext uri="{FF2B5EF4-FFF2-40B4-BE49-F238E27FC236}">
-                <a16:creationId xmlns:a16="http://schemas.microsoft.com/office/drawing/2014/main" id="{2B1CF2D9-450D-4B3D-A4E6-6D3D6C818DB8}"/>
-              </a:ext>
-            </a:extLst>
-          </p:cNvPr>
+          <p:cNvPr id="22" name="Shape 20"/>
           <p:cNvSpPr>
             <a:spLocks noGrp="1"/>
           </p:cNvSpPr>
@@ -11384,13 +10407,7 @@
       </p:sp>
       <p:sp>
         <p:nvSpPr>
-          <p:cNvPr id="23" name="Shape 21">
-            <a:extLst>
-              <a:ext uri="{FF2B5EF4-FFF2-40B4-BE49-F238E27FC236}">
-                <a16:creationId xmlns:a16="http://schemas.microsoft.com/office/drawing/2014/main" id="{C6BC846D-3BE8-48F8-8069-2F4F078001FF}"/>
-              </a:ext>
-            </a:extLst>
-          </p:cNvPr>
+          <p:cNvPr id="23" name="Shape 21"/>
           <p:cNvSpPr>
             <a:spLocks noGrp="1"/>
           </p:cNvSpPr>
@@ -11415,13 +10432,7 @@
       </p:sp>
       <p:sp>
         <p:nvSpPr>
-          <p:cNvPr id="24" name="Shape 22">
-            <a:extLst>
-              <a:ext uri="{FF2B5EF4-FFF2-40B4-BE49-F238E27FC236}">
-                <a16:creationId xmlns:a16="http://schemas.microsoft.com/office/drawing/2014/main" id="{FD933D53-1599-4930-A348-829D8ED647A2}"/>
-              </a:ext>
-            </a:extLst>
-          </p:cNvPr>
+          <p:cNvPr id="24" name="Shape 22"/>
           <p:cNvSpPr>
             <a:spLocks noGrp="1"/>
           </p:cNvSpPr>
@@ -11446,13 +10457,7 @@
       </p:sp>
       <p:sp>
         <p:nvSpPr>
-          <p:cNvPr id="25" name="Shape 23">
-            <a:extLst>
-              <a:ext uri="{FF2B5EF4-FFF2-40B4-BE49-F238E27FC236}">
-                <a16:creationId xmlns:a16="http://schemas.microsoft.com/office/drawing/2014/main" id="{EEC588F3-5B29-4E2A-ADB0-DB4A05DA275F}"/>
-              </a:ext>
-            </a:extLst>
-          </p:cNvPr>
+          <p:cNvPr id="25" name="Shape 23"/>
           <p:cNvSpPr>
             <a:spLocks noGrp="1"/>
           </p:cNvSpPr>
@@ -11477,13 +10482,7 @@
       </p:sp>
       <p:sp>
         <p:nvSpPr>
-          <p:cNvPr id="26" name="Shape 24">
-            <a:extLst>
-              <a:ext uri="{FF2B5EF4-FFF2-40B4-BE49-F238E27FC236}">
-                <a16:creationId xmlns:a16="http://schemas.microsoft.com/office/drawing/2014/main" id="{2B26AC7A-133E-4359-AC4C-7586AD95BB17}"/>
-              </a:ext>
-            </a:extLst>
-          </p:cNvPr>
+          <p:cNvPr id="26" name="Shape 24"/>
           <p:cNvSpPr>
             <a:spLocks noGrp="1"/>
           </p:cNvSpPr>
@@ -11508,13 +10507,7 @@
       </p:sp>
       <p:sp>
         <p:nvSpPr>
-          <p:cNvPr id="27" name="Shape 25">
-            <a:extLst>
-              <a:ext uri="{FF2B5EF4-FFF2-40B4-BE49-F238E27FC236}">
-                <a16:creationId xmlns:a16="http://schemas.microsoft.com/office/drawing/2014/main" id="{8B718FFC-B231-4B3C-BFFC-FC21A06A2F93}"/>
-              </a:ext>
-            </a:extLst>
-          </p:cNvPr>
+          <p:cNvPr id="27" name="Shape 25"/>
           <p:cNvSpPr>
             <a:spLocks noGrp="1"/>
           </p:cNvSpPr>
@@ -11539,13 +10532,7 @@
       </p:sp>
       <p:sp>
         <p:nvSpPr>
-          <p:cNvPr id="28" name="Shape 26">
-            <a:extLst>
-              <a:ext uri="{FF2B5EF4-FFF2-40B4-BE49-F238E27FC236}">
-                <a16:creationId xmlns:a16="http://schemas.microsoft.com/office/drawing/2014/main" id="{AB2206EE-C52B-4866-BF2A-23F49CE3DD34}"/>
-              </a:ext>
-            </a:extLst>
-          </p:cNvPr>
+          <p:cNvPr id="28" name="Shape 26"/>
           <p:cNvSpPr>
             <a:spLocks noGrp="1"/>
           </p:cNvSpPr>
@@ -11570,13 +10557,7 @@
       </p:sp>
       <p:sp>
         <p:nvSpPr>
-          <p:cNvPr id="29" name="Shape 27">
-            <a:extLst>
-              <a:ext uri="{FF2B5EF4-FFF2-40B4-BE49-F238E27FC236}">
-                <a16:creationId xmlns:a16="http://schemas.microsoft.com/office/drawing/2014/main" id="{F6C935AD-0EA4-418A-8715-0F5D6E68A852}"/>
-              </a:ext>
-            </a:extLst>
-          </p:cNvPr>
+          <p:cNvPr id="29" name="Shape 27"/>
           <p:cNvSpPr>
             <a:spLocks noGrp="1"/>
           </p:cNvSpPr>
@@ -11601,13 +10582,7 @@
       </p:sp>
       <p:sp>
         <p:nvSpPr>
-          <p:cNvPr id="30" name="Shape 28">
-            <a:extLst>
-              <a:ext uri="{FF2B5EF4-FFF2-40B4-BE49-F238E27FC236}">
-                <a16:creationId xmlns:a16="http://schemas.microsoft.com/office/drawing/2014/main" id="{EEDB3A9F-9B30-4B90-A17C-C41D6B67A510}"/>
-              </a:ext>
-            </a:extLst>
-          </p:cNvPr>
+          <p:cNvPr id="30" name="Shape 28"/>
           <p:cNvSpPr>
             <a:spLocks noGrp="1"/>
           </p:cNvSpPr>
@@ -11632,13 +10607,7 @@
       </p:sp>
       <p:sp>
         <p:nvSpPr>
-          <p:cNvPr id="31" name="Shape 29">
-            <a:extLst>
-              <a:ext uri="{FF2B5EF4-FFF2-40B4-BE49-F238E27FC236}">
-                <a16:creationId xmlns:a16="http://schemas.microsoft.com/office/drawing/2014/main" id="{D842E4A9-2462-4F58-9528-E9FD2E213B9A}"/>
-              </a:ext>
-            </a:extLst>
-          </p:cNvPr>
+          <p:cNvPr id="31" name="Shape 29"/>
           <p:cNvSpPr>
             <a:spLocks noGrp="1"/>
           </p:cNvSpPr>
@@ -11663,13 +10632,7 @@
       </p:sp>
       <p:sp>
         <p:nvSpPr>
-          <p:cNvPr id="32" name="Shape 30">
-            <a:extLst>
-              <a:ext uri="{FF2B5EF4-FFF2-40B4-BE49-F238E27FC236}">
-                <a16:creationId xmlns:a16="http://schemas.microsoft.com/office/drawing/2014/main" id="{8AA182B7-AE6A-4F1F-8D29-625D903D0224}"/>
-              </a:ext>
-            </a:extLst>
-          </p:cNvPr>
+          <p:cNvPr id="32" name="Shape 30"/>
           <p:cNvSpPr>
             <a:spLocks noGrp="1"/>
           </p:cNvSpPr>
@@ -11694,13 +10657,7 @@
       </p:sp>
       <p:sp>
         <p:nvSpPr>
-          <p:cNvPr id="33" name="Shape 31">
-            <a:extLst>
-              <a:ext uri="{FF2B5EF4-FFF2-40B4-BE49-F238E27FC236}">
-                <a16:creationId xmlns:a16="http://schemas.microsoft.com/office/drawing/2014/main" id="{72A648EF-8FC9-4F3C-8FC5-4FCC8655EF09}"/>
-              </a:ext>
-            </a:extLst>
-          </p:cNvPr>
+          <p:cNvPr id="33" name="Shape 31"/>
           <p:cNvSpPr>
             <a:spLocks noGrp="1"/>
           </p:cNvSpPr>
@@ -11725,13 +10682,7 @@
       </p:sp>
       <p:sp>
         <p:nvSpPr>
-          <p:cNvPr id="34" name="Shape 32">
-            <a:extLst>
-              <a:ext uri="{FF2B5EF4-FFF2-40B4-BE49-F238E27FC236}">
-                <a16:creationId xmlns:a16="http://schemas.microsoft.com/office/drawing/2014/main" id="{C2148BD8-5FAA-440B-A574-F19DF6411003}"/>
-              </a:ext>
-            </a:extLst>
-          </p:cNvPr>
+          <p:cNvPr id="34" name="Shape 32"/>
           <p:cNvSpPr>
             <a:spLocks noGrp="1"/>
           </p:cNvSpPr>
@@ -11756,13 +10707,7 @@
       </p:sp>
       <p:sp>
         <p:nvSpPr>
-          <p:cNvPr id="35" name="Shape 33">
-            <a:extLst>
-              <a:ext uri="{FF2B5EF4-FFF2-40B4-BE49-F238E27FC236}">
-                <a16:creationId xmlns:a16="http://schemas.microsoft.com/office/drawing/2014/main" id="{9A34186F-301B-4DC9-A0AA-846BFB1619DA}"/>
-              </a:ext>
-            </a:extLst>
-          </p:cNvPr>
+          <p:cNvPr id="35" name="Shape 33"/>
           <p:cNvSpPr>
             <a:spLocks noGrp="1"/>
           </p:cNvSpPr>
@@ -11787,13 +10732,7 @@
       </p:sp>
       <p:sp>
         <p:nvSpPr>
-          <p:cNvPr id="36" name="Shape 34">
-            <a:extLst>
-              <a:ext uri="{FF2B5EF4-FFF2-40B4-BE49-F238E27FC236}">
-                <a16:creationId xmlns:a16="http://schemas.microsoft.com/office/drawing/2014/main" id="{CF1206AA-15C1-40E4-9C25-C5B448A79E43}"/>
-              </a:ext>
-            </a:extLst>
-          </p:cNvPr>
+          <p:cNvPr id="36" name="Shape 34"/>
           <p:cNvSpPr>
             <a:spLocks noGrp="1"/>
           </p:cNvSpPr>
@@ -11818,13 +10757,7 @@
       </p:sp>
       <p:sp>
         <p:nvSpPr>
-          <p:cNvPr id="37" name="Shape 35">
-            <a:extLst>
-              <a:ext uri="{FF2B5EF4-FFF2-40B4-BE49-F238E27FC236}">
-                <a16:creationId xmlns:a16="http://schemas.microsoft.com/office/drawing/2014/main" id="{52F3E815-ACEA-4E98-82B5-B8D9FBA5DDE1}"/>
-              </a:ext>
-            </a:extLst>
-          </p:cNvPr>
+          <p:cNvPr id="37" name="Shape 35"/>
           <p:cNvSpPr>
             <a:spLocks noGrp="1"/>
           </p:cNvSpPr>
@@ -11849,13 +10782,7 @@
       </p:sp>
       <p:sp>
         <p:nvSpPr>
-          <p:cNvPr id="38" name="Shape 36">
-            <a:extLst>
-              <a:ext uri="{FF2B5EF4-FFF2-40B4-BE49-F238E27FC236}">
-                <a16:creationId xmlns:a16="http://schemas.microsoft.com/office/drawing/2014/main" id="{EB7DEB56-CD46-4233-871F-CEA9BD9E3F79}"/>
-              </a:ext>
-            </a:extLst>
-          </p:cNvPr>
+          <p:cNvPr id="38" name="Shape 36"/>
           <p:cNvSpPr>
             <a:spLocks noGrp="1"/>
           </p:cNvSpPr>
@@ -11880,13 +10807,7 @@
       </p:sp>
       <p:sp>
         <p:nvSpPr>
-          <p:cNvPr id="39" name="Shape 37">
-            <a:extLst>
-              <a:ext uri="{FF2B5EF4-FFF2-40B4-BE49-F238E27FC236}">
-                <a16:creationId xmlns:a16="http://schemas.microsoft.com/office/drawing/2014/main" id="{B483FF1B-2FBA-427B-9FAB-0305464E3DE5}"/>
-              </a:ext>
-            </a:extLst>
-          </p:cNvPr>
+          <p:cNvPr id="39" name="Shape 37"/>
           <p:cNvSpPr>
             <a:spLocks noGrp="1"/>
           </p:cNvSpPr>
@@ -11911,13 +10832,7 @@
       </p:sp>
       <p:sp>
         <p:nvSpPr>
-          <p:cNvPr id="40" name="Shape 38">
-            <a:extLst>
-              <a:ext uri="{FF2B5EF4-FFF2-40B4-BE49-F238E27FC236}">
-                <a16:creationId xmlns:a16="http://schemas.microsoft.com/office/drawing/2014/main" id="{786509A5-D34D-4984-8925-6E1D8F497BCF}"/>
-              </a:ext>
-            </a:extLst>
-          </p:cNvPr>
+          <p:cNvPr id="40" name="Shape 38"/>
           <p:cNvSpPr>
             <a:spLocks noGrp="1"/>
           </p:cNvSpPr>
@@ -11942,13 +10857,7 @@
       </p:sp>
       <p:sp>
         <p:nvSpPr>
-          <p:cNvPr id="41" name="Shape 39">
-            <a:extLst>
-              <a:ext uri="{FF2B5EF4-FFF2-40B4-BE49-F238E27FC236}">
-                <a16:creationId xmlns:a16="http://schemas.microsoft.com/office/drawing/2014/main" id="{3BA0062E-9923-440E-A045-2E47FF5C0CC1}"/>
-              </a:ext>
-            </a:extLst>
-          </p:cNvPr>
+          <p:cNvPr id="41" name="Shape 39"/>
           <p:cNvSpPr>
             <a:spLocks noGrp="1"/>
           </p:cNvSpPr>
@@ -11973,13 +10882,7 @@
       </p:sp>
       <p:sp>
         <p:nvSpPr>
-          <p:cNvPr id="42" name="Shape 40">
-            <a:extLst>
-              <a:ext uri="{FF2B5EF4-FFF2-40B4-BE49-F238E27FC236}">
-                <a16:creationId xmlns:a16="http://schemas.microsoft.com/office/drawing/2014/main" id="{E0DC2932-5081-470E-B4A0-CF8A110DFA1E}"/>
-              </a:ext>
-            </a:extLst>
-          </p:cNvPr>
+          <p:cNvPr id="42" name="Shape 40"/>
           <p:cNvSpPr>
             <a:spLocks noGrp="1"/>
           </p:cNvSpPr>
@@ -12004,13 +10907,7 @@
       </p:sp>
       <p:sp>
         <p:nvSpPr>
-          <p:cNvPr id="43" name="Shape 41">
-            <a:extLst>
-              <a:ext uri="{FF2B5EF4-FFF2-40B4-BE49-F238E27FC236}">
-                <a16:creationId xmlns:a16="http://schemas.microsoft.com/office/drawing/2014/main" id="{C4BDDC03-E62B-49E1-9905-BD448AAEF080}"/>
-              </a:ext>
-            </a:extLst>
-          </p:cNvPr>
+          <p:cNvPr id="43" name="Shape 41"/>
           <p:cNvSpPr>
             <a:spLocks noGrp="1"/>
           </p:cNvSpPr>
@@ -12035,13 +10932,7 @@
       </p:sp>
       <p:sp>
         <p:nvSpPr>
-          <p:cNvPr id="44" name="Shape 42">
-            <a:extLst>
-              <a:ext uri="{FF2B5EF4-FFF2-40B4-BE49-F238E27FC236}">
-                <a16:creationId xmlns:a16="http://schemas.microsoft.com/office/drawing/2014/main" id="{889F7B95-6DDC-4845-ADE6-86F27EE1734E}"/>
-              </a:ext>
-            </a:extLst>
-          </p:cNvPr>
+          <p:cNvPr id="44" name="Shape 42"/>
           <p:cNvSpPr>
             <a:spLocks noGrp="1"/>
           </p:cNvSpPr>
@@ -12066,13 +10957,7 @@
       </p:sp>
       <p:sp>
         <p:nvSpPr>
-          <p:cNvPr id="45" name="Shape 43">
-            <a:extLst>
-              <a:ext uri="{FF2B5EF4-FFF2-40B4-BE49-F238E27FC236}">
-                <a16:creationId xmlns:a16="http://schemas.microsoft.com/office/drawing/2014/main" id="{37669C7E-F969-434F-9C96-C992662E101E}"/>
-              </a:ext>
-            </a:extLst>
-          </p:cNvPr>
+          <p:cNvPr id="45" name="Shape 43"/>
           <p:cNvSpPr>
             <a:spLocks noGrp="1"/>
           </p:cNvSpPr>
@@ -12097,13 +10982,7 @@
       </p:sp>
       <p:sp>
         <p:nvSpPr>
-          <p:cNvPr id="46" name="Shape 44">
-            <a:extLst>
-              <a:ext uri="{FF2B5EF4-FFF2-40B4-BE49-F238E27FC236}">
-                <a16:creationId xmlns:a16="http://schemas.microsoft.com/office/drawing/2014/main" id="{70AB4371-0CF9-4B14-9D4A-5A796D480852}"/>
-              </a:ext>
-            </a:extLst>
-          </p:cNvPr>
+          <p:cNvPr id="46" name="Shape 44"/>
           <p:cNvSpPr>
             <a:spLocks noGrp="1"/>
           </p:cNvSpPr>
@@ -12128,13 +11007,7 @@
       </p:sp>
       <p:sp>
         <p:nvSpPr>
-          <p:cNvPr id="47" name="Shape 45">
-            <a:extLst>
-              <a:ext uri="{FF2B5EF4-FFF2-40B4-BE49-F238E27FC236}">
-                <a16:creationId xmlns:a16="http://schemas.microsoft.com/office/drawing/2014/main" id="{1D9C4A63-B2FD-4934-8D52-B4E9C111E3C4}"/>
-              </a:ext>
-            </a:extLst>
-          </p:cNvPr>
+          <p:cNvPr id="47" name="Shape 45"/>
           <p:cNvSpPr>
             <a:spLocks noGrp="1"/>
           </p:cNvSpPr>
@@ -12159,13 +11032,7 @@
       </p:sp>
       <p:sp>
         <p:nvSpPr>
-          <p:cNvPr id="48" name="Shape 46">
-            <a:extLst>
-              <a:ext uri="{FF2B5EF4-FFF2-40B4-BE49-F238E27FC236}">
-                <a16:creationId xmlns:a16="http://schemas.microsoft.com/office/drawing/2014/main" id="{F1E07F15-A280-4065-B0E1-8D43EF8FDDEB}"/>
-              </a:ext>
-            </a:extLst>
-          </p:cNvPr>
+          <p:cNvPr id="48" name="Shape 46"/>
           <p:cNvSpPr>
             <a:spLocks noGrp="1"/>
           </p:cNvSpPr>
@@ -12190,13 +11057,7 @@
       </p:sp>
       <p:sp>
         <p:nvSpPr>
-          <p:cNvPr id="49" name="Shape 47">
-            <a:extLst>
-              <a:ext uri="{FF2B5EF4-FFF2-40B4-BE49-F238E27FC236}">
-                <a16:creationId xmlns:a16="http://schemas.microsoft.com/office/drawing/2014/main" id="{25894E68-F622-444A-8B30-F6C346D7AA01}"/>
-              </a:ext>
-            </a:extLst>
-          </p:cNvPr>
+          <p:cNvPr id="49" name="Shape 47"/>
           <p:cNvSpPr>
             <a:spLocks noGrp="1"/>
           </p:cNvSpPr>
@@ -12221,13 +11082,7 @@
       </p:sp>
       <p:sp>
         <p:nvSpPr>
-          <p:cNvPr id="50" name="Shape 48">
-            <a:extLst>
-              <a:ext uri="{FF2B5EF4-FFF2-40B4-BE49-F238E27FC236}">
-                <a16:creationId xmlns:a16="http://schemas.microsoft.com/office/drawing/2014/main" id="{367C6EB9-9CD0-49A1-AE6D-AB99D14A615A}"/>
-              </a:ext>
-            </a:extLst>
-          </p:cNvPr>
+          <p:cNvPr id="50" name="Shape 48"/>
           <p:cNvSpPr>
             <a:spLocks noGrp="1"/>
           </p:cNvSpPr>
@@ -12252,13 +11107,7 @@
       </p:sp>
       <p:sp>
         <p:nvSpPr>
-          <p:cNvPr id="51" name="Shape 49">
-            <a:extLst>
-              <a:ext uri="{FF2B5EF4-FFF2-40B4-BE49-F238E27FC236}">
-                <a16:creationId xmlns:a16="http://schemas.microsoft.com/office/drawing/2014/main" id="{20A668D9-05CE-4977-A55F-E235CEED0261}"/>
-              </a:ext>
-            </a:extLst>
-          </p:cNvPr>
+          <p:cNvPr id="51" name="Shape 49"/>
           <p:cNvSpPr>
             <a:spLocks noGrp="1"/>
           </p:cNvSpPr>
@@ -12283,13 +11132,7 @@
       </p:sp>
       <p:sp>
         <p:nvSpPr>
-          <p:cNvPr id="52" name="Shape 50">
-            <a:extLst>
-              <a:ext uri="{FF2B5EF4-FFF2-40B4-BE49-F238E27FC236}">
-                <a16:creationId xmlns:a16="http://schemas.microsoft.com/office/drawing/2014/main" id="{27CF87C9-4963-4F91-B2CB-160336047747}"/>
-              </a:ext>
-            </a:extLst>
-          </p:cNvPr>
+          <p:cNvPr id="52" name="Shape 50"/>
           <p:cNvSpPr>
             <a:spLocks noGrp="1"/>
           </p:cNvSpPr>
@@ -12314,13 +11157,7 @@
       </p:sp>
       <p:sp>
         <p:nvSpPr>
-          <p:cNvPr id="53" name="Shape 51">
-            <a:extLst>
-              <a:ext uri="{FF2B5EF4-FFF2-40B4-BE49-F238E27FC236}">
-                <a16:creationId xmlns:a16="http://schemas.microsoft.com/office/drawing/2014/main" id="{018DEA65-A24C-4524-BDAD-2A565974C452}"/>
-              </a:ext>
-            </a:extLst>
-          </p:cNvPr>
+          <p:cNvPr id="53" name="Shape 51"/>
           <p:cNvSpPr>
             <a:spLocks noGrp="1"/>
           </p:cNvSpPr>
@@ -12345,13 +11182,7 @@
       </p:sp>
       <p:sp>
         <p:nvSpPr>
-          <p:cNvPr id="54" name="Shape 52">
-            <a:extLst>
-              <a:ext uri="{FF2B5EF4-FFF2-40B4-BE49-F238E27FC236}">
-                <a16:creationId xmlns:a16="http://schemas.microsoft.com/office/drawing/2014/main" id="{38B1CC3A-EA1B-429B-9894-C1D92EB9BCD9}"/>
-              </a:ext>
-            </a:extLst>
-          </p:cNvPr>
+          <p:cNvPr id="54" name="Shape 52"/>
           <p:cNvSpPr>
             <a:spLocks noGrp="1"/>
           </p:cNvSpPr>
@@ -12376,13 +11207,7 @@
       </p:sp>
       <p:sp>
         <p:nvSpPr>
-          <p:cNvPr id="55" name="Shape 53">
-            <a:extLst>
-              <a:ext uri="{FF2B5EF4-FFF2-40B4-BE49-F238E27FC236}">
-                <a16:creationId xmlns:a16="http://schemas.microsoft.com/office/drawing/2014/main" id="{3D2ED27F-4708-41E3-B6F2-FC637AB4632F}"/>
-              </a:ext>
-            </a:extLst>
-          </p:cNvPr>
+          <p:cNvPr id="55" name="Shape 53"/>
           <p:cNvSpPr>
             <a:spLocks noGrp="1"/>
           </p:cNvSpPr>
@@ -12407,13 +11232,7 @@
       </p:sp>
       <p:sp>
         <p:nvSpPr>
-          <p:cNvPr id="56" name="Shape 54">
-            <a:extLst>
-              <a:ext uri="{FF2B5EF4-FFF2-40B4-BE49-F238E27FC236}">
-                <a16:creationId xmlns:a16="http://schemas.microsoft.com/office/drawing/2014/main" id="{CCB948B6-F712-4925-8D84-CA825B4228EB}"/>
-              </a:ext>
-            </a:extLst>
-          </p:cNvPr>
+          <p:cNvPr id="56" name="Shape 54"/>
           <p:cNvSpPr>
             <a:spLocks noGrp="1"/>
           </p:cNvSpPr>
@@ -12438,13 +11257,7 @@
       </p:sp>
       <p:sp>
         <p:nvSpPr>
-          <p:cNvPr id="57" name="Shape 55">
-            <a:extLst>
-              <a:ext uri="{FF2B5EF4-FFF2-40B4-BE49-F238E27FC236}">
-                <a16:creationId xmlns:a16="http://schemas.microsoft.com/office/drawing/2014/main" id="{88E7A153-1465-4D5F-A640-D10AE3268E3B}"/>
-              </a:ext>
-            </a:extLst>
-          </p:cNvPr>
+          <p:cNvPr id="57" name="Shape 55"/>
           <p:cNvSpPr>
             <a:spLocks noGrp="1"/>
           </p:cNvSpPr>
@@ -12469,13 +11282,7 @@
       </p:sp>
       <p:sp>
         <p:nvSpPr>
-          <p:cNvPr id="58" name="Text 56">
-            <a:extLst>
-              <a:ext uri="{FF2B5EF4-FFF2-40B4-BE49-F238E27FC236}">
-                <a16:creationId xmlns:a16="http://schemas.microsoft.com/office/drawing/2014/main" id="{03836F8B-5F17-44AE-B604-9CAC559D575F}"/>
-              </a:ext>
-            </a:extLst>
-          </p:cNvPr>
+          <p:cNvPr id="58" name="Text 56"/>
           <p:cNvSpPr>
             <a:spLocks noGrp="1"/>
           </p:cNvSpPr>
@@ -12517,13 +11324,7 @@
       </p:sp>
       <p:sp>
         <p:nvSpPr>
-          <p:cNvPr id="59" name="Text 57">
-            <a:extLst>
-              <a:ext uri="{FF2B5EF4-FFF2-40B4-BE49-F238E27FC236}">
-                <a16:creationId xmlns:a16="http://schemas.microsoft.com/office/drawing/2014/main" id="{36D9FBE6-B495-46C2-834F-8A760E93DBE0}"/>
-              </a:ext>
-            </a:extLst>
-          </p:cNvPr>
+          <p:cNvPr id="59" name="Text 57"/>
           <p:cNvSpPr>
             <a:spLocks noGrp="1"/>
           </p:cNvSpPr>
@@ -12572,13 +11373,7 @@
       </p:sp>
       <p:sp>
         <p:nvSpPr>
-          <p:cNvPr id="60" name="Text 58">
-            <a:extLst>
-              <a:ext uri="{FF2B5EF4-FFF2-40B4-BE49-F238E27FC236}">
-                <a16:creationId xmlns:a16="http://schemas.microsoft.com/office/drawing/2014/main" id="{7A161DFA-6279-4272-ABD4-38A933C5602C}"/>
-              </a:ext>
-            </a:extLst>
-          </p:cNvPr>
+          <p:cNvPr id="60" name="Text 58"/>
           <p:cNvSpPr>
             <a:spLocks noGrp="1"/>
           </p:cNvSpPr>
@@ -12627,13 +11422,7 @@
       </p:sp>
       <p:sp>
         <p:nvSpPr>
-          <p:cNvPr id="61" name="Text 59">
-            <a:extLst>
-              <a:ext uri="{FF2B5EF4-FFF2-40B4-BE49-F238E27FC236}">
-                <a16:creationId xmlns:a16="http://schemas.microsoft.com/office/drawing/2014/main" id="{96BD1C0B-6A68-43EF-9349-02D6339845C7}"/>
-              </a:ext>
-            </a:extLst>
-          </p:cNvPr>
+          <p:cNvPr id="61" name="Text 59"/>
           <p:cNvSpPr>
             <a:spLocks noGrp="1"/>
           </p:cNvSpPr>
@@ -12682,13 +11471,7 @@
       </p:sp>
       <p:sp>
         <p:nvSpPr>
-          <p:cNvPr id="62" name="Text 60">
-            <a:extLst>
-              <a:ext uri="{FF2B5EF4-FFF2-40B4-BE49-F238E27FC236}">
-                <a16:creationId xmlns:a16="http://schemas.microsoft.com/office/drawing/2014/main" id="{745C394C-D194-4B3C-A240-446F2EDB7D76}"/>
-              </a:ext>
-            </a:extLst>
-          </p:cNvPr>
+          <p:cNvPr id="62" name="Text 60"/>
           <p:cNvSpPr>
             <a:spLocks noGrp="1"/>
           </p:cNvSpPr>
@@ -12737,13 +11520,7 @@
       </p:sp>
       <p:sp>
         <p:nvSpPr>
-          <p:cNvPr id="63" name="Text 61">
-            <a:extLst>
-              <a:ext uri="{FF2B5EF4-FFF2-40B4-BE49-F238E27FC236}">
-                <a16:creationId xmlns:a16="http://schemas.microsoft.com/office/drawing/2014/main" id="{AFACC300-03A1-46B8-BAE1-6079B9603F8C}"/>
-              </a:ext>
-            </a:extLst>
-          </p:cNvPr>
+          <p:cNvPr id="63" name="Text 61"/>
           <p:cNvSpPr>
             <a:spLocks noGrp="1"/>
           </p:cNvSpPr>
@@ -12792,13 +11569,7 @@
       </p:sp>
       <p:sp>
         <p:nvSpPr>
-          <p:cNvPr id="64" name="Text 62">
-            <a:extLst>
-              <a:ext uri="{FF2B5EF4-FFF2-40B4-BE49-F238E27FC236}">
-                <a16:creationId xmlns:a16="http://schemas.microsoft.com/office/drawing/2014/main" id="{438468FB-70DB-4B65-93FA-BE4AFC6C9AF6}"/>
-              </a:ext>
-            </a:extLst>
-          </p:cNvPr>
+          <p:cNvPr id="64" name="Text 62"/>
           <p:cNvSpPr>
             <a:spLocks noGrp="1"/>
           </p:cNvSpPr>
@@ -12847,13 +11618,7 @@
       </p:sp>
       <p:sp>
         <p:nvSpPr>
-          <p:cNvPr id="65" name="Text 63">
-            <a:extLst>
-              <a:ext uri="{FF2B5EF4-FFF2-40B4-BE49-F238E27FC236}">
-                <a16:creationId xmlns:a16="http://schemas.microsoft.com/office/drawing/2014/main" id="{7DDE1113-2074-43DC-8180-1D34AE78EE8A}"/>
-              </a:ext>
-            </a:extLst>
-          </p:cNvPr>
+          <p:cNvPr id="65" name="Text 63"/>
           <p:cNvSpPr>
             <a:spLocks noGrp="1"/>
           </p:cNvSpPr>
@@ -12902,13 +11667,7 @@
       </p:sp>
       <p:sp>
         <p:nvSpPr>
-          <p:cNvPr id="66" name="Text 64">
-            <a:extLst>
-              <a:ext uri="{FF2B5EF4-FFF2-40B4-BE49-F238E27FC236}">
-                <a16:creationId xmlns:a16="http://schemas.microsoft.com/office/drawing/2014/main" id="{EDA37F72-4190-4FC5-8DAF-8A4053913B52}"/>
-              </a:ext>
-            </a:extLst>
-          </p:cNvPr>
+          <p:cNvPr id="66" name="Text 64"/>
           <p:cNvSpPr>
             <a:spLocks noGrp="1"/>
           </p:cNvSpPr>
@@ -12957,13 +11716,7 @@
       </p:sp>
       <p:sp>
         <p:nvSpPr>
-          <p:cNvPr id="67" name="Text 65">
-            <a:extLst>
-              <a:ext uri="{FF2B5EF4-FFF2-40B4-BE49-F238E27FC236}">
-                <a16:creationId xmlns:a16="http://schemas.microsoft.com/office/drawing/2014/main" id="{CA1B6A80-9EC9-4073-A75E-31BF76772C11}"/>
-              </a:ext>
-            </a:extLst>
-          </p:cNvPr>
+          <p:cNvPr id="67" name="Text 65"/>
           <p:cNvSpPr>
             <a:spLocks noGrp="1"/>
           </p:cNvSpPr>
@@ -13005,13 +11758,7 @@
       </p:sp>
       <p:sp>
         <p:nvSpPr>
-          <p:cNvPr id="68" name="Shape 66">
-            <a:extLst>
-              <a:ext uri="{FF2B5EF4-FFF2-40B4-BE49-F238E27FC236}">
-                <a16:creationId xmlns:a16="http://schemas.microsoft.com/office/drawing/2014/main" id="{92EA4E1D-C654-4A8F-93FF-E139B574253E}"/>
-              </a:ext>
-            </a:extLst>
-          </p:cNvPr>
+          <p:cNvPr id="68" name="Shape 66"/>
           <p:cNvSpPr>
             <a:spLocks noGrp="1"/>
           </p:cNvSpPr>
@@ -13036,13 +11783,7 @@
       </p:sp>
       <p:sp>
         <p:nvSpPr>
-          <p:cNvPr id="69" name="Shape 67">
-            <a:extLst>
-              <a:ext uri="{FF2B5EF4-FFF2-40B4-BE49-F238E27FC236}">
-                <a16:creationId xmlns:a16="http://schemas.microsoft.com/office/drawing/2014/main" id="{7B989140-4F94-4D3E-8F98-2982D4D29004}"/>
-              </a:ext>
-            </a:extLst>
-          </p:cNvPr>
+          <p:cNvPr id="69" name="Shape 67"/>
           <p:cNvSpPr>
             <a:spLocks noGrp="1"/>
           </p:cNvSpPr>
@@ -13067,13 +11808,7 @@
       </p:sp>
       <p:sp>
         <p:nvSpPr>
-          <p:cNvPr id="70" name="Shape 68">
-            <a:extLst>
-              <a:ext uri="{FF2B5EF4-FFF2-40B4-BE49-F238E27FC236}">
-                <a16:creationId xmlns:a16="http://schemas.microsoft.com/office/drawing/2014/main" id="{79E1A9DE-A710-4B5E-BC16-F2179AD0DCDB}"/>
-              </a:ext>
-            </a:extLst>
-          </p:cNvPr>
+          <p:cNvPr id="70" name="Shape 68"/>
           <p:cNvSpPr>
             <a:spLocks noGrp="1"/>
           </p:cNvSpPr>
@@ -13098,13 +11833,7 @@
       </p:sp>
       <p:sp>
         <p:nvSpPr>
-          <p:cNvPr id="71" name="Shape 69">
-            <a:extLst>
-              <a:ext uri="{FF2B5EF4-FFF2-40B4-BE49-F238E27FC236}">
-                <a16:creationId xmlns:a16="http://schemas.microsoft.com/office/drawing/2014/main" id="{0327CE86-851C-4A0E-9EAE-67A2243B131A}"/>
-              </a:ext>
-            </a:extLst>
-          </p:cNvPr>
+          <p:cNvPr id="71" name="Shape 69"/>
           <p:cNvSpPr>
             <a:spLocks noGrp="1"/>
           </p:cNvSpPr>
@@ -13129,13 +11858,7 @@
       </p:sp>
       <p:sp>
         <p:nvSpPr>
-          <p:cNvPr id="72" name="Shape 70">
-            <a:extLst>
-              <a:ext uri="{FF2B5EF4-FFF2-40B4-BE49-F238E27FC236}">
-                <a16:creationId xmlns:a16="http://schemas.microsoft.com/office/drawing/2014/main" id="{33E7B928-1955-4014-96B4-205AA7BED154}"/>
-              </a:ext>
-            </a:extLst>
-          </p:cNvPr>
+          <p:cNvPr id="72" name="Shape 70"/>
           <p:cNvSpPr>
             <a:spLocks noGrp="1"/>
           </p:cNvSpPr>
@@ -13160,13 +11883,7 @@
       </p:sp>
       <p:sp>
         <p:nvSpPr>
-          <p:cNvPr id="73" name="Text 71">
-            <a:extLst>
-              <a:ext uri="{FF2B5EF4-FFF2-40B4-BE49-F238E27FC236}">
-                <a16:creationId xmlns:a16="http://schemas.microsoft.com/office/drawing/2014/main" id="{F003A360-1C56-4DF0-958D-97F5FC8AF3E1}"/>
-              </a:ext>
-            </a:extLst>
-          </p:cNvPr>
+          <p:cNvPr id="73" name="Text 71"/>
           <p:cNvSpPr>
             <a:spLocks noGrp="1"/>
           </p:cNvSpPr>
@@ -13215,13 +11932,7 @@
       </p:sp>
       <p:sp>
         <p:nvSpPr>
-          <p:cNvPr id="74" name="Text 72">
-            <a:extLst>
-              <a:ext uri="{FF2B5EF4-FFF2-40B4-BE49-F238E27FC236}">
-                <a16:creationId xmlns:a16="http://schemas.microsoft.com/office/drawing/2014/main" id="{40FEFC0C-7D83-4B47-87BA-128D1DF915FF}"/>
-              </a:ext>
-            </a:extLst>
-          </p:cNvPr>
+          <p:cNvPr id="74" name="Text 72"/>
           <p:cNvSpPr>
             <a:spLocks noGrp="1"/>
           </p:cNvSpPr>
@@ -13270,13 +11981,7 @@
       </p:sp>
       <p:sp>
         <p:nvSpPr>
-          <p:cNvPr id="75" name="Text 73">
-            <a:extLst>
-              <a:ext uri="{FF2B5EF4-FFF2-40B4-BE49-F238E27FC236}">
-                <a16:creationId xmlns:a16="http://schemas.microsoft.com/office/drawing/2014/main" id="{EF46D5A6-D6AF-43F1-946B-F28760E8809D}"/>
-              </a:ext>
-            </a:extLst>
-          </p:cNvPr>
+          <p:cNvPr id="75" name="Text 73"/>
           <p:cNvSpPr>
             <a:spLocks noGrp="1"/>
           </p:cNvSpPr>
@@ -13318,13 +12023,7 @@
       </p:sp>
       <p:sp>
         <p:nvSpPr>
-          <p:cNvPr id="76" name="Text 74">
-            <a:extLst>
-              <a:ext uri="{FF2B5EF4-FFF2-40B4-BE49-F238E27FC236}">
-                <a16:creationId xmlns:a16="http://schemas.microsoft.com/office/drawing/2014/main" id="{36C755B7-B7F9-49D9-B13B-2982F172DB9C}"/>
-              </a:ext>
-            </a:extLst>
-          </p:cNvPr>
+          <p:cNvPr id="76" name="Text 74"/>
           <p:cNvSpPr>
             <a:spLocks noGrp="1"/>
           </p:cNvSpPr>
@@ -13365,11 +12064,6 @@
         </p:txBody>
       </p:sp>
     </p:spTree>
-    <p:extLst>
-      <p:ext uri="{BB962C8B-B14F-4D97-AF65-F5344CB8AC3E}">
-        <p14:creationId xmlns:p14="http://schemas.microsoft.com/office/powerpoint/2010/main" val="84793988"/>
-      </p:ext>
-    </p:extLst>
   </p:cSld>
   <p:clrMapOvr>
     <a:masterClrMapping/>
@@ -13404,13 +12098,7 @@
       </p:grpSpPr>
       <p:sp>
         <p:nvSpPr>
-          <p:cNvPr id="2" name="Text 0">
-            <a:extLst>
-              <a:ext uri="{FF2B5EF4-FFF2-40B4-BE49-F238E27FC236}">
-                <a16:creationId xmlns:a16="http://schemas.microsoft.com/office/drawing/2014/main" id="{95B832D8-0011-425C-BD2B-9536ACDCC218}"/>
-              </a:ext>
-            </a:extLst>
-          </p:cNvPr>
+          <p:cNvPr id="2" name="Text 0"/>
           <p:cNvSpPr>
             <a:spLocks noGrp="1"/>
           </p:cNvSpPr>
@@ -13452,13 +12140,7 @@
       </p:sp>
       <p:sp>
         <p:nvSpPr>
-          <p:cNvPr id="3" name="Text 1">
-            <a:extLst>
-              <a:ext uri="{FF2B5EF4-FFF2-40B4-BE49-F238E27FC236}">
-                <a16:creationId xmlns:a16="http://schemas.microsoft.com/office/drawing/2014/main" id="{198C5525-0C36-454B-99D2-4902C2B608DA}"/>
-              </a:ext>
-            </a:extLst>
-          </p:cNvPr>
+          <p:cNvPr id="3" name="Text 1"/>
           <p:cNvSpPr>
             <a:spLocks noGrp="1"/>
           </p:cNvSpPr>
@@ -13500,13 +12182,7 @@
       </p:sp>
       <p:sp>
         <p:nvSpPr>
-          <p:cNvPr id="4" name="Text 2">
-            <a:extLst>
-              <a:ext uri="{FF2B5EF4-FFF2-40B4-BE49-F238E27FC236}">
-                <a16:creationId xmlns:a16="http://schemas.microsoft.com/office/drawing/2014/main" id="{BAB42D5A-50AC-4012-941F-CA34E4EA83C9}"/>
-              </a:ext>
-            </a:extLst>
-          </p:cNvPr>
+          <p:cNvPr id="4" name="Text 2"/>
           <p:cNvSpPr>
             <a:spLocks noGrp="1"/>
           </p:cNvSpPr>
@@ -13548,13 +12224,7 @@
       </p:sp>
       <p:sp>
         <p:nvSpPr>
-          <p:cNvPr id="5" name="Text 3">
-            <a:extLst>
-              <a:ext uri="{FF2B5EF4-FFF2-40B4-BE49-F238E27FC236}">
-                <a16:creationId xmlns:a16="http://schemas.microsoft.com/office/drawing/2014/main" id="{C52FA43A-C573-4BDE-8E10-4B3C083671CB}"/>
-              </a:ext>
-            </a:extLst>
-          </p:cNvPr>
+          <p:cNvPr id="5" name="Text 3"/>
           <p:cNvSpPr>
             <a:spLocks noGrp="1"/>
           </p:cNvSpPr>
@@ -13594,13 +12264,7 @@
       </p:sp>
       <p:sp>
         <p:nvSpPr>
-          <p:cNvPr id="6" name="Shape 4">
-            <a:extLst>
-              <a:ext uri="{FF2B5EF4-FFF2-40B4-BE49-F238E27FC236}">
-                <a16:creationId xmlns:a16="http://schemas.microsoft.com/office/drawing/2014/main" id="{30060026-B155-4932-8A71-F17787CBCCEC}"/>
-              </a:ext>
-            </a:extLst>
-          </p:cNvPr>
+          <p:cNvPr id="6" name="Shape 4"/>
           <p:cNvSpPr>
             <a:spLocks noGrp="1"/>
           </p:cNvSpPr>
@@ -13627,13 +12291,7 @@
       </p:sp>
       <p:sp>
         <p:nvSpPr>
-          <p:cNvPr id="7" name="Shape 5">
-            <a:extLst>
-              <a:ext uri="{FF2B5EF4-FFF2-40B4-BE49-F238E27FC236}">
-                <a16:creationId xmlns:a16="http://schemas.microsoft.com/office/drawing/2014/main" id="{8AD59A3A-950E-4C29-8901-DFF16BA22CF8}"/>
-              </a:ext>
-            </a:extLst>
-          </p:cNvPr>
+          <p:cNvPr id="7" name="Shape 5"/>
           <p:cNvSpPr>
             <a:spLocks noGrp="1"/>
           </p:cNvSpPr>
@@ -13658,13 +12316,7 @@
       </p:sp>
       <p:sp>
         <p:nvSpPr>
-          <p:cNvPr id="8" name="Shape 6">
-            <a:extLst>
-              <a:ext uri="{FF2B5EF4-FFF2-40B4-BE49-F238E27FC236}">
-                <a16:creationId xmlns:a16="http://schemas.microsoft.com/office/drawing/2014/main" id="{5655F75D-B630-4CDA-94F7-3C718478D7BC}"/>
-              </a:ext>
-            </a:extLst>
-          </p:cNvPr>
+          <p:cNvPr id="8" name="Shape 6"/>
           <p:cNvSpPr>
             <a:spLocks noGrp="1"/>
           </p:cNvSpPr>
@@ -13691,13 +12343,7 @@
       </p:sp>
       <p:sp>
         <p:nvSpPr>
-          <p:cNvPr id="9" name="Shape 7">
-            <a:extLst>
-              <a:ext uri="{FF2B5EF4-FFF2-40B4-BE49-F238E27FC236}">
-                <a16:creationId xmlns:a16="http://schemas.microsoft.com/office/drawing/2014/main" id="{81574F92-5A2A-4FF9-8251-E33B302D85CC}"/>
-              </a:ext>
-            </a:extLst>
-          </p:cNvPr>
+          <p:cNvPr id="9" name="Shape 7"/>
           <p:cNvSpPr>
             <a:spLocks noGrp="1"/>
           </p:cNvSpPr>
@@ -13724,13 +12370,7 @@
       </p:sp>
       <p:sp>
         <p:nvSpPr>
-          <p:cNvPr id="10" name="Shape 8">
-            <a:extLst>
-              <a:ext uri="{FF2B5EF4-FFF2-40B4-BE49-F238E27FC236}">
-                <a16:creationId xmlns:a16="http://schemas.microsoft.com/office/drawing/2014/main" id="{917CC7E6-F77C-4BC7-A599-0E241CE82C73}"/>
-              </a:ext>
-            </a:extLst>
-          </p:cNvPr>
+          <p:cNvPr id="10" name="Shape 8"/>
           <p:cNvSpPr>
             <a:spLocks noGrp="1"/>
           </p:cNvSpPr>
@@ -13757,13 +12397,7 @@
       </p:sp>
       <p:sp>
         <p:nvSpPr>
-          <p:cNvPr id="11" name="Shape 9">
-            <a:extLst>
-              <a:ext uri="{FF2B5EF4-FFF2-40B4-BE49-F238E27FC236}">
-                <a16:creationId xmlns:a16="http://schemas.microsoft.com/office/drawing/2014/main" id="{7BEB8D5A-D0A9-406E-B53A-950A13597F61}"/>
-              </a:ext>
-            </a:extLst>
-          </p:cNvPr>
+          <p:cNvPr id="11" name="Shape 9"/>
           <p:cNvSpPr>
             <a:spLocks noGrp="1"/>
           </p:cNvSpPr>
@@ -13790,13 +12424,7 @@
       </p:sp>
       <p:sp>
         <p:nvSpPr>
-          <p:cNvPr id="12" name="Shape 10">
-            <a:extLst>
-              <a:ext uri="{FF2B5EF4-FFF2-40B4-BE49-F238E27FC236}">
-                <a16:creationId xmlns:a16="http://schemas.microsoft.com/office/drawing/2014/main" id="{C36D60CE-72B1-4C26-A271-B1F55D38D125}"/>
-              </a:ext>
-            </a:extLst>
-          </p:cNvPr>
+          <p:cNvPr id="12" name="Shape 10"/>
           <p:cNvSpPr>
             <a:spLocks noGrp="1"/>
           </p:cNvSpPr>
@@ -13823,13 +12451,7 @@
       </p:sp>
       <p:sp>
         <p:nvSpPr>
-          <p:cNvPr id="13" name="Shape 11">
-            <a:extLst>
-              <a:ext uri="{FF2B5EF4-FFF2-40B4-BE49-F238E27FC236}">
-                <a16:creationId xmlns:a16="http://schemas.microsoft.com/office/drawing/2014/main" id="{6BFD50F2-38B0-4422-8445-59003F614F99}"/>
-              </a:ext>
-            </a:extLst>
-          </p:cNvPr>
+          <p:cNvPr id="13" name="Shape 11"/>
           <p:cNvSpPr>
             <a:spLocks noGrp="1"/>
           </p:cNvSpPr>
@@ -13856,13 +12478,7 @@
       </p:sp>
       <p:sp>
         <p:nvSpPr>
-          <p:cNvPr id="14" name="Text 12">
-            <a:extLst>
-              <a:ext uri="{FF2B5EF4-FFF2-40B4-BE49-F238E27FC236}">
-                <a16:creationId xmlns:a16="http://schemas.microsoft.com/office/drawing/2014/main" id="{BFC8F7D8-8C9C-4D62-84C0-9A48A27CEAD3}"/>
-              </a:ext>
-            </a:extLst>
-          </p:cNvPr>
+          <p:cNvPr id="14" name="Text 12"/>
           <p:cNvSpPr>
             <a:spLocks noGrp="1"/>
           </p:cNvSpPr>
@@ -13928,13 +12544,7 @@
       </p:sp>
       <p:sp>
         <p:nvSpPr>
-          <p:cNvPr id="15" name="Text 13">
-            <a:extLst>
-              <a:ext uri="{FF2B5EF4-FFF2-40B4-BE49-F238E27FC236}">
-                <a16:creationId xmlns:a16="http://schemas.microsoft.com/office/drawing/2014/main" id="{6BAD5BCA-4BF8-425B-9DA7-1D29D590A2EF}"/>
-              </a:ext>
-            </a:extLst>
-          </p:cNvPr>
+          <p:cNvPr id="15" name="Text 13"/>
           <p:cNvSpPr>
             <a:spLocks noGrp="1"/>
           </p:cNvSpPr>
@@ -14000,13 +12610,7 @@
       </p:sp>
       <p:sp>
         <p:nvSpPr>
-          <p:cNvPr id="16" name="Text 14">
-            <a:extLst>
-              <a:ext uri="{FF2B5EF4-FFF2-40B4-BE49-F238E27FC236}">
-                <a16:creationId xmlns:a16="http://schemas.microsoft.com/office/drawing/2014/main" id="{FF022D6F-3188-44D9-9DC6-757FFC1DFBD6}"/>
-              </a:ext>
-            </a:extLst>
-          </p:cNvPr>
+          <p:cNvPr id="16" name="Text 14"/>
           <p:cNvSpPr>
             <a:spLocks noGrp="1"/>
           </p:cNvSpPr>
@@ -14072,13 +12676,7 @@
       </p:sp>
       <p:sp>
         <p:nvSpPr>
-          <p:cNvPr id="17" name="Text 15">
-            <a:extLst>
-              <a:ext uri="{FF2B5EF4-FFF2-40B4-BE49-F238E27FC236}">
-                <a16:creationId xmlns:a16="http://schemas.microsoft.com/office/drawing/2014/main" id="{C30E2178-479E-40C6-86E9-A2E6B702DEF3}"/>
-              </a:ext>
-            </a:extLst>
-          </p:cNvPr>
+          <p:cNvPr id="17" name="Text 15"/>
           <p:cNvSpPr>
             <a:spLocks noGrp="1"/>
           </p:cNvSpPr>
@@ -14144,13 +12742,7 @@
       </p:sp>
       <p:sp>
         <p:nvSpPr>
-          <p:cNvPr id="18" name="Text 16">
-            <a:extLst>
-              <a:ext uri="{FF2B5EF4-FFF2-40B4-BE49-F238E27FC236}">
-                <a16:creationId xmlns:a16="http://schemas.microsoft.com/office/drawing/2014/main" id="{9DBEA8A4-7141-401A-B31D-043D6ECC58A9}"/>
-              </a:ext>
-            </a:extLst>
-          </p:cNvPr>
+          <p:cNvPr id="18" name="Text 16"/>
           <p:cNvSpPr>
             <a:spLocks noGrp="1"/>
           </p:cNvSpPr>
@@ -14216,13 +12808,7 @@
       </p:sp>
       <p:sp>
         <p:nvSpPr>
-          <p:cNvPr id="19" name="Text 17">
-            <a:extLst>
-              <a:ext uri="{FF2B5EF4-FFF2-40B4-BE49-F238E27FC236}">
-                <a16:creationId xmlns:a16="http://schemas.microsoft.com/office/drawing/2014/main" id="{8A40D50B-1DFE-4721-96DB-CAF21D00C15C}"/>
-              </a:ext>
-            </a:extLst>
-          </p:cNvPr>
+          <p:cNvPr id="19" name="Text 17"/>
           <p:cNvSpPr>
             <a:spLocks noGrp="1"/>
           </p:cNvSpPr>
@@ -14288,13 +12874,7 @@
       </p:sp>
       <p:sp>
         <p:nvSpPr>
-          <p:cNvPr id="20" name="Text 18">
-            <a:extLst>
-              <a:ext uri="{FF2B5EF4-FFF2-40B4-BE49-F238E27FC236}">
-                <a16:creationId xmlns:a16="http://schemas.microsoft.com/office/drawing/2014/main" id="{D6128B20-404E-44C4-B620-2305E461EE66}"/>
-              </a:ext>
-            </a:extLst>
-          </p:cNvPr>
+          <p:cNvPr id="20" name="Text 18"/>
           <p:cNvSpPr>
             <a:spLocks noGrp="1"/>
           </p:cNvSpPr>
@@ -14360,13 +12940,7 @@
       </p:sp>
       <p:sp>
         <p:nvSpPr>
-          <p:cNvPr id="21" name="Text 19">
-            <a:extLst>
-              <a:ext uri="{FF2B5EF4-FFF2-40B4-BE49-F238E27FC236}">
-                <a16:creationId xmlns:a16="http://schemas.microsoft.com/office/drawing/2014/main" id="{D58CB77B-5286-4020-AE19-102AFC6F3D63}"/>
-              </a:ext>
-            </a:extLst>
-          </p:cNvPr>
+          <p:cNvPr id="21" name="Text 19"/>
           <p:cNvSpPr>
             <a:spLocks noGrp="1"/>
           </p:cNvSpPr>
@@ -14408,13 +12982,7 @@
       </p:sp>
       <p:sp>
         <p:nvSpPr>
-          <p:cNvPr id="22" name="Text 20">
-            <a:extLst>
-              <a:ext uri="{FF2B5EF4-FFF2-40B4-BE49-F238E27FC236}">
-                <a16:creationId xmlns:a16="http://schemas.microsoft.com/office/drawing/2014/main" id="{47B63739-C0BE-4507-A3D9-B4ECBCD8C3BF}"/>
-              </a:ext>
-            </a:extLst>
-          </p:cNvPr>
+          <p:cNvPr id="22" name="Text 20"/>
           <p:cNvSpPr>
             <a:spLocks noGrp="1"/>
           </p:cNvSpPr>
@@ -14529,13 +13097,7 @@
       </p:sp>
       <p:sp>
         <p:nvSpPr>
-          <p:cNvPr id="23" name="Text 21">
-            <a:extLst>
-              <a:ext uri="{FF2B5EF4-FFF2-40B4-BE49-F238E27FC236}">
-                <a16:creationId xmlns:a16="http://schemas.microsoft.com/office/drawing/2014/main" id="{F912B654-8468-4A5C-896B-46E099FD859A}"/>
-              </a:ext>
-            </a:extLst>
-          </p:cNvPr>
+          <p:cNvPr id="23" name="Text 21"/>
           <p:cNvSpPr>
             <a:spLocks noGrp="1"/>
           </p:cNvSpPr>
@@ -14577,13 +13139,7 @@
       </p:sp>
       <p:sp>
         <p:nvSpPr>
-          <p:cNvPr id="24" name="Text 22">
-            <a:extLst>
-              <a:ext uri="{FF2B5EF4-FFF2-40B4-BE49-F238E27FC236}">
-                <a16:creationId xmlns:a16="http://schemas.microsoft.com/office/drawing/2014/main" id="{4B9C424B-3DEB-4976-B38B-78843A6D7A30}"/>
-              </a:ext>
-            </a:extLst>
-          </p:cNvPr>
+          <p:cNvPr id="24" name="Text 22"/>
           <p:cNvSpPr>
             <a:spLocks noGrp="1"/>
           </p:cNvSpPr>
@@ -14709,13 +13265,7 @@
       </p:sp>
       <p:sp>
         <p:nvSpPr>
-          <p:cNvPr id="25" name="Text 23">
-            <a:extLst>
-              <a:ext uri="{FF2B5EF4-FFF2-40B4-BE49-F238E27FC236}">
-                <a16:creationId xmlns:a16="http://schemas.microsoft.com/office/drawing/2014/main" id="{D6194E83-D0EC-44C2-A991-CFBCEC66CBA2}"/>
-              </a:ext>
-            </a:extLst>
-          </p:cNvPr>
+          <p:cNvPr id="25" name="Text 23"/>
           <p:cNvSpPr>
             <a:spLocks noGrp="1"/>
           </p:cNvSpPr>
@@ -14756,11 +13306,6 @@
         </p:txBody>
       </p:sp>
     </p:spTree>
-    <p:extLst>
-      <p:ext uri="{BB962C8B-B14F-4D97-AF65-F5344CB8AC3E}">
-        <p14:creationId xmlns:p14="http://schemas.microsoft.com/office/powerpoint/2010/main" val="1480964819"/>
-      </p:ext>
-    </p:extLst>
   </p:cSld>
   <p:clrMapOvr>
     <a:masterClrMapping/>
@@ -14795,13 +13340,7 @@
       </p:grpSpPr>
       <p:sp>
         <p:nvSpPr>
-          <p:cNvPr id="2" name="Text 0">
-            <a:extLst>
-              <a:ext uri="{FF2B5EF4-FFF2-40B4-BE49-F238E27FC236}">
-                <a16:creationId xmlns:a16="http://schemas.microsoft.com/office/drawing/2014/main" id="{777BA8C4-1C8E-44C8-BB6D-714626B705A2}"/>
-              </a:ext>
-            </a:extLst>
-          </p:cNvPr>
+          <p:cNvPr id="2" name="Text 0"/>
           <p:cNvSpPr>
             <a:spLocks noGrp="1"/>
           </p:cNvSpPr>
@@ -14843,13 +13382,7 @@
       </p:sp>
       <p:sp>
         <p:nvSpPr>
-          <p:cNvPr id="3" name="Text 1">
-            <a:extLst>
-              <a:ext uri="{FF2B5EF4-FFF2-40B4-BE49-F238E27FC236}">
-                <a16:creationId xmlns:a16="http://schemas.microsoft.com/office/drawing/2014/main" id="{81551097-54BE-4C1D-A0DF-BE2DC4930D03}"/>
-              </a:ext>
-            </a:extLst>
-          </p:cNvPr>
+          <p:cNvPr id="3" name="Text 1"/>
           <p:cNvSpPr>
             <a:spLocks noGrp="1"/>
           </p:cNvSpPr>
@@ -14891,13 +13424,7 @@
       </p:sp>
       <p:sp>
         <p:nvSpPr>
-          <p:cNvPr id="4" name="Text 2">
-            <a:extLst>
-              <a:ext uri="{FF2B5EF4-FFF2-40B4-BE49-F238E27FC236}">
-                <a16:creationId xmlns:a16="http://schemas.microsoft.com/office/drawing/2014/main" id="{8EBD8B0A-BAB7-4A7D-A164-1BD619B4190F}"/>
-              </a:ext>
-            </a:extLst>
-          </p:cNvPr>
+          <p:cNvPr id="4" name="Text 2"/>
           <p:cNvSpPr>
             <a:spLocks noGrp="1"/>
           </p:cNvSpPr>
@@ -14939,13 +13466,7 @@
       </p:sp>
       <p:sp>
         <p:nvSpPr>
-          <p:cNvPr id="5" name="Text 3">
-            <a:extLst>
-              <a:ext uri="{FF2B5EF4-FFF2-40B4-BE49-F238E27FC236}">
-                <a16:creationId xmlns:a16="http://schemas.microsoft.com/office/drawing/2014/main" id="{1FB8B0D0-DC33-45AA-A8EB-E9813E18CEBD}"/>
-              </a:ext>
-            </a:extLst>
-          </p:cNvPr>
+          <p:cNvPr id="5" name="Text 3"/>
           <p:cNvSpPr>
             <a:spLocks noGrp="1"/>
           </p:cNvSpPr>
@@ -14985,13 +13506,7 @@
       </p:sp>
       <p:sp>
         <p:nvSpPr>
-          <p:cNvPr id="6" name="Shape 4">
-            <a:extLst>
-              <a:ext uri="{FF2B5EF4-FFF2-40B4-BE49-F238E27FC236}">
-                <a16:creationId xmlns:a16="http://schemas.microsoft.com/office/drawing/2014/main" id="{1B2DB7A6-3C02-4E04-89FA-C05D3DE807E0}"/>
-              </a:ext>
-            </a:extLst>
-          </p:cNvPr>
+          <p:cNvPr id="6" name="Shape 4"/>
           <p:cNvSpPr>
             <a:spLocks noGrp="1"/>
           </p:cNvSpPr>
@@ -15018,13 +13533,7 @@
       </p:sp>
       <p:sp>
         <p:nvSpPr>
-          <p:cNvPr id="7" name="Shape 5">
-            <a:extLst>
-              <a:ext uri="{FF2B5EF4-FFF2-40B4-BE49-F238E27FC236}">
-                <a16:creationId xmlns:a16="http://schemas.microsoft.com/office/drawing/2014/main" id="{B0BFB2A4-7916-45AD-9F45-C003B4FDCF67}"/>
-              </a:ext>
-            </a:extLst>
-          </p:cNvPr>
+          <p:cNvPr id="7" name="Shape 5"/>
           <p:cNvSpPr>
             <a:spLocks noGrp="1"/>
           </p:cNvSpPr>
@@ -15049,13 +13558,7 @@
       </p:sp>
       <p:sp>
         <p:nvSpPr>
-          <p:cNvPr id="8" name="Shape 6">
-            <a:extLst>
-              <a:ext uri="{FF2B5EF4-FFF2-40B4-BE49-F238E27FC236}">
-                <a16:creationId xmlns:a16="http://schemas.microsoft.com/office/drawing/2014/main" id="{46C540D3-843A-4FDE-9CBE-CD1F7181EB6A}"/>
-              </a:ext>
-            </a:extLst>
-          </p:cNvPr>
+          <p:cNvPr id="8" name="Shape 6"/>
           <p:cNvSpPr>
             <a:spLocks noGrp="1"/>
           </p:cNvSpPr>
@@ -15082,13 +13585,7 @@
       </p:sp>
       <p:sp>
         <p:nvSpPr>
-          <p:cNvPr id="9" name="Shape 7">
-            <a:extLst>
-              <a:ext uri="{FF2B5EF4-FFF2-40B4-BE49-F238E27FC236}">
-                <a16:creationId xmlns:a16="http://schemas.microsoft.com/office/drawing/2014/main" id="{066BC139-52AE-4534-957A-B6907551F4F5}"/>
-              </a:ext>
-            </a:extLst>
-          </p:cNvPr>
+          <p:cNvPr id="9" name="Shape 7"/>
           <p:cNvSpPr>
             <a:spLocks noGrp="1"/>
           </p:cNvSpPr>
@@ -15115,13 +13612,7 @@
       </p:sp>
       <p:sp>
         <p:nvSpPr>
-          <p:cNvPr id="10" name="Shape 8">
-            <a:extLst>
-              <a:ext uri="{FF2B5EF4-FFF2-40B4-BE49-F238E27FC236}">
-                <a16:creationId xmlns:a16="http://schemas.microsoft.com/office/drawing/2014/main" id="{795398F4-44C8-4B6B-9894-2D2176FB4D73}"/>
-              </a:ext>
-            </a:extLst>
-          </p:cNvPr>
+          <p:cNvPr id="10" name="Shape 8"/>
           <p:cNvSpPr>
             <a:spLocks noGrp="1"/>
           </p:cNvSpPr>
@@ -15148,13 +13639,7 @@
       </p:sp>
       <p:sp>
         <p:nvSpPr>
-          <p:cNvPr id="11" name="Shape 9">
-            <a:extLst>
-              <a:ext uri="{FF2B5EF4-FFF2-40B4-BE49-F238E27FC236}">
-                <a16:creationId xmlns:a16="http://schemas.microsoft.com/office/drawing/2014/main" id="{39868366-2765-457D-8325-E0E574574A8D}"/>
-              </a:ext>
-            </a:extLst>
-          </p:cNvPr>
+          <p:cNvPr id="11" name="Shape 9"/>
           <p:cNvSpPr>
             <a:spLocks noGrp="1"/>
           </p:cNvSpPr>
@@ -15181,13 +13666,7 @@
       </p:sp>
       <p:sp>
         <p:nvSpPr>
-          <p:cNvPr id="12" name="Text 10">
-            <a:extLst>
-              <a:ext uri="{FF2B5EF4-FFF2-40B4-BE49-F238E27FC236}">
-                <a16:creationId xmlns:a16="http://schemas.microsoft.com/office/drawing/2014/main" id="{07C806A0-01EB-45CD-B8B2-EC72BB9E37B7}"/>
-              </a:ext>
-            </a:extLst>
-          </p:cNvPr>
+          <p:cNvPr id="12" name="Text 10"/>
           <p:cNvSpPr>
             <a:spLocks noGrp="1"/>
           </p:cNvSpPr>
@@ -15253,13 +13732,7 @@
       </p:sp>
       <p:sp>
         <p:nvSpPr>
-          <p:cNvPr id="13" name="Text 11">
-            <a:extLst>
-              <a:ext uri="{FF2B5EF4-FFF2-40B4-BE49-F238E27FC236}">
-                <a16:creationId xmlns:a16="http://schemas.microsoft.com/office/drawing/2014/main" id="{9DFC448D-0E61-4AA2-9D3A-1072DF115C66}"/>
-              </a:ext>
-            </a:extLst>
-          </p:cNvPr>
+          <p:cNvPr id="13" name="Text 11"/>
           <p:cNvSpPr>
             <a:spLocks noGrp="1"/>
           </p:cNvSpPr>
@@ -15325,13 +13798,7 @@
       </p:sp>
       <p:sp>
         <p:nvSpPr>
-          <p:cNvPr id="14" name="Text 12">
-            <a:extLst>
-              <a:ext uri="{FF2B5EF4-FFF2-40B4-BE49-F238E27FC236}">
-                <a16:creationId xmlns:a16="http://schemas.microsoft.com/office/drawing/2014/main" id="{040A33F1-4D12-45EB-9620-5C2C3C9FF2B1}"/>
-              </a:ext>
-            </a:extLst>
-          </p:cNvPr>
+          <p:cNvPr id="14" name="Text 12"/>
           <p:cNvSpPr>
             <a:spLocks noGrp="1"/>
           </p:cNvSpPr>
@@ -15397,13 +13864,7 @@
       </p:sp>
       <p:sp>
         <p:nvSpPr>
-          <p:cNvPr id="15" name="Text 13">
-            <a:extLst>
-              <a:ext uri="{FF2B5EF4-FFF2-40B4-BE49-F238E27FC236}">
-                <a16:creationId xmlns:a16="http://schemas.microsoft.com/office/drawing/2014/main" id="{6FAD6ADB-ECAF-4D8C-B519-4F10593861C7}"/>
-              </a:ext>
-            </a:extLst>
-          </p:cNvPr>
+          <p:cNvPr id="15" name="Text 13"/>
           <p:cNvSpPr>
             <a:spLocks noGrp="1"/>
           </p:cNvSpPr>
@@ -15469,13 +13930,7 @@
       </p:sp>
       <p:sp>
         <p:nvSpPr>
-          <p:cNvPr id="16" name="Text 14">
-            <a:extLst>
-              <a:ext uri="{FF2B5EF4-FFF2-40B4-BE49-F238E27FC236}">
-                <a16:creationId xmlns:a16="http://schemas.microsoft.com/office/drawing/2014/main" id="{099B0ABF-E881-48F8-9070-8A4D500F10FA}"/>
-              </a:ext>
-            </a:extLst>
-          </p:cNvPr>
+          <p:cNvPr id="16" name="Text 14"/>
           <p:cNvSpPr>
             <a:spLocks noGrp="1"/>
           </p:cNvSpPr>
@@ -15541,13 +13996,7 @@
       </p:sp>
       <p:sp>
         <p:nvSpPr>
-          <p:cNvPr id="17" name="Text 15">
-            <a:extLst>
-              <a:ext uri="{FF2B5EF4-FFF2-40B4-BE49-F238E27FC236}">
-                <a16:creationId xmlns:a16="http://schemas.microsoft.com/office/drawing/2014/main" id="{AE8C3DDE-AC62-4035-A34E-B4810B759DB5}"/>
-              </a:ext>
-            </a:extLst>
-          </p:cNvPr>
+          <p:cNvPr id="17" name="Text 15"/>
           <p:cNvSpPr>
             <a:spLocks noGrp="1"/>
           </p:cNvSpPr>
@@ -15647,13 +14096,7 @@
       </p:sp>
       <p:sp>
         <p:nvSpPr>
-          <p:cNvPr id="18" name="Text 16">
-            <a:extLst>
-              <a:ext uri="{FF2B5EF4-FFF2-40B4-BE49-F238E27FC236}">
-                <a16:creationId xmlns:a16="http://schemas.microsoft.com/office/drawing/2014/main" id="{750F5AF9-3E66-4FC6-870B-352F3A67E130}"/>
-              </a:ext>
-            </a:extLst>
-          </p:cNvPr>
+          <p:cNvPr id="18" name="Text 16"/>
           <p:cNvSpPr>
             <a:spLocks noGrp="1"/>
           </p:cNvSpPr>
@@ -15753,13 +14196,7 @@
       </p:sp>
       <p:sp>
         <p:nvSpPr>
-          <p:cNvPr id="19" name="Text 17">
-            <a:extLst>
-              <a:ext uri="{FF2B5EF4-FFF2-40B4-BE49-F238E27FC236}">
-                <a16:creationId xmlns:a16="http://schemas.microsoft.com/office/drawing/2014/main" id="{B44B4D5E-F91E-4103-A78A-26CF02B36D5B}"/>
-              </a:ext>
-            </a:extLst>
-          </p:cNvPr>
+          <p:cNvPr id="19" name="Text 17"/>
           <p:cNvSpPr>
             <a:spLocks noGrp="1"/>
           </p:cNvSpPr>
@@ -15859,13 +14296,7 @@
       </p:sp>
       <p:sp>
         <p:nvSpPr>
-          <p:cNvPr id="20" name="Text 18">
-            <a:extLst>
-              <a:ext uri="{FF2B5EF4-FFF2-40B4-BE49-F238E27FC236}">
-                <a16:creationId xmlns:a16="http://schemas.microsoft.com/office/drawing/2014/main" id="{9A8CC07A-2745-4A38-968C-67C1110BA0FE}"/>
-              </a:ext>
-            </a:extLst>
-          </p:cNvPr>
+          <p:cNvPr id="20" name="Text 18"/>
           <p:cNvSpPr>
             <a:spLocks noGrp="1"/>
           </p:cNvSpPr>
@@ -15914,13 +14345,7 @@
       </p:sp>
       <p:sp>
         <p:nvSpPr>
-          <p:cNvPr id="21" name="Text 19">
-            <a:extLst>
-              <a:ext uri="{FF2B5EF4-FFF2-40B4-BE49-F238E27FC236}">
-                <a16:creationId xmlns:a16="http://schemas.microsoft.com/office/drawing/2014/main" id="{56E1B892-10D0-488D-8EB9-58DF0992513E}"/>
-              </a:ext>
-            </a:extLst>
-          </p:cNvPr>
+          <p:cNvPr id="21" name="Text 19"/>
           <p:cNvSpPr>
             <a:spLocks noGrp="1"/>
           </p:cNvSpPr>
@@ -15961,11 +14386,6 @@
         </p:txBody>
       </p:sp>
     </p:spTree>
-    <p:extLst>
-      <p:ext uri="{BB962C8B-B14F-4D97-AF65-F5344CB8AC3E}">
-        <p14:creationId xmlns:p14="http://schemas.microsoft.com/office/powerpoint/2010/main" val="1468793876"/>
-      </p:ext>
-    </p:extLst>
   </p:cSld>
   <p:clrMapOvr>
     <a:masterClrMapping/>
@@ -16000,13 +14420,7 @@
       </p:grpSpPr>
       <p:sp>
         <p:nvSpPr>
-          <p:cNvPr id="2" name="Text 0">
-            <a:extLst>
-              <a:ext uri="{FF2B5EF4-FFF2-40B4-BE49-F238E27FC236}">
-                <a16:creationId xmlns:a16="http://schemas.microsoft.com/office/drawing/2014/main" id="{3F6F91C6-C3E0-4198-B3E2-CC195CE45DC6}"/>
-              </a:ext>
-            </a:extLst>
-          </p:cNvPr>
+          <p:cNvPr id="2" name="Text 0"/>
           <p:cNvSpPr>
             <a:spLocks noGrp="1"/>
           </p:cNvSpPr>
@@ -16048,13 +14462,7 @@
       </p:sp>
       <p:sp>
         <p:nvSpPr>
-          <p:cNvPr id="3" name="Text 1">
-            <a:extLst>
-              <a:ext uri="{FF2B5EF4-FFF2-40B4-BE49-F238E27FC236}">
-                <a16:creationId xmlns:a16="http://schemas.microsoft.com/office/drawing/2014/main" id="{5709613B-8181-4CA5-885D-0B079A74AB55}"/>
-              </a:ext>
-            </a:extLst>
-          </p:cNvPr>
+          <p:cNvPr id="3" name="Text 1"/>
           <p:cNvSpPr>
             <a:spLocks noGrp="1"/>
           </p:cNvSpPr>
@@ -16096,13 +14504,7 @@
       </p:sp>
       <p:sp>
         <p:nvSpPr>
-          <p:cNvPr id="4" name="Text 2">
-            <a:extLst>
-              <a:ext uri="{FF2B5EF4-FFF2-40B4-BE49-F238E27FC236}">
-                <a16:creationId xmlns:a16="http://schemas.microsoft.com/office/drawing/2014/main" id="{0BD7F3CA-0A91-41AC-B3D4-D44363D18D1F}"/>
-              </a:ext>
-            </a:extLst>
-          </p:cNvPr>
+          <p:cNvPr id="4" name="Text 2"/>
           <p:cNvSpPr>
             <a:spLocks noGrp="1"/>
           </p:cNvSpPr>
@@ -16144,13 +14546,7 @@
       </p:sp>
       <p:sp>
         <p:nvSpPr>
-          <p:cNvPr id="5" name="Text 3">
-            <a:extLst>
-              <a:ext uri="{FF2B5EF4-FFF2-40B4-BE49-F238E27FC236}">
-                <a16:creationId xmlns:a16="http://schemas.microsoft.com/office/drawing/2014/main" id="{B56E9D22-C32C-4507-905E-894E35545D53}"/>
-              </a:ext>
-            </a:extLst>
-          </p:cNvPr>
+          <p:cNvPr id="5" name="Text 3"/>
           <p:cNvSpPr>
             <a:spLocks noGrp="1"/>
           </p:cNvSpPr>
@@ -16190,13 +14586,7 @@
       </p:sp>
       <p:sp>
         <p:nvSpPr>
-          <p:cNvPr id="6" name="Shape 4">
-            <a:extLst>
-              <a:ext uri="{FF2B5EF4-FFF2-40B4-BE49-F238E27FC236}">
-                <a16:creationId xmlns:a16="http://schemas.microsoft.com/office/drawing/2014/main" id="{8CC3BBBE-7485-4CD5-9022-B1E935A06ED4}"/>
-              </a:ext>
-            </a:extLst>
-          </p:cNvPr>
+          <p:cNvPr id="6" name="Shape 4"/>
           <p:cNvSpPr>
             <a:spLocks noGrp="1"/>
           </p:cNvSpPr>
@@ -16223,13 +14613,7 @@
       </p:sp>
       <p:sp>
         <p:nvSpPr>
-          <p:cNvPr id="7" name="Shape 5">
-            <a:extLst>
-              <a:ext uri="{FF2B5EF4-FFF2-40B4-BE49-F238E27FC236}">
-                <a16:creationId xmlns:a16="http://schemas.microsoft.com/office/drawing/2014/main" id="{5A81CCCF-0622-4307-BB3A-AAA85A37E94B}"/>
-              </a:ext>
-            </a:extLst>
-          </p:cNvPr>
+          <p:cNvPr id="7" name="Shape 5"/>
           <p:cNvSpPr>
             <a:spLocks noGrp="1"/>
           </p:cNvSpPr>
@@ -16254,13 +14638,7 @@
       </p:sp>
       <p:sp>
         <p:nvSpPr>
-          <p:cNvPr id="8" name="Text 6">
-            <a:extLst>
-              <a:ext uri="{FF2B5EF4-FFF2-40B4-BE49-F238E27FC236}">
-                <a16:creationId xmlns:a16="http://schemas.microsoft.com/office/drawing/2014/main" id="{894A11F5-F698-4381-874E-D2565779C3B3}"/>
-              </a:ext>
-            </a:extLst>
-          </p:cNvPr>
+          <p:cNvPr id="8" name="Text 6"/>
           <p:cNvSpPr>
             <a:spLocks noGrp="1"/>
           </p:cNvSpPr>
@@ -16302,13 +14680,7 @@
       </p:sp>
       <p:sp>
         <p:nvSpPr>
-          <p:cNvPr id="9" name="Text 7">
-            <a:extLst>
-              <a:ext uri="{FF2B5EF4-FFF2-40B4-BE49-F238E27FC236}">
-                <a16:creationId xmlns:a16="http://schemas.microsoft.com/office/drawing/2014/main" id="{5E12D467-4FBE-4563-8165-E97BA829FFAD}"/>
-              </a:ext>
-            </a:extLst>
-          </p:cNvPr>
+          <p:cNvPr id="9" name="Text 7"/>
           <p:cNvSpPr>
             <a:spLocks noGrp="1"/>
           </p:cNvSpPr>
@@ -16357,13 +14729,7 @@
       </p:sp>
       <p:sp>
         <p:nvSpPr>
-          <p:cNvPr id="10" name="Text 8">
-            <a:extLst>
-              <a:ext uri="{FF2B5EF4-FFF2-40B4-BE49-F238E27FC236}">
-                <a16:creationId xmlns:a16="http://schemas.microsoft.com/office/drawing/2014/main" id="{4DDEC913-82ED-48BB-9032-F9BD47FA80F4}"/>
-              </a:ext>
-            </a:extLst>
-          </p:cNvPr>
+          <p:cNvPr id="10" name="Text 8"/>
           <p:cNvSpPr>
             <a:spLocks noGrp="1"/>
           </p:cNvSpPr>
@@ -16412,13 +14778,7 @@
       </p:sp>
       <p:sp>
         <p:nvSpPr>
-          <p:cNvPr id="11" name="Text 9">
-            <a:extLst>
-              <a:ext uri="{FF2B5EF4-FFF2-40B4-BE49-F238E27FC236}">
-                <a16:creationId xmlns:a16="http://schemas.microsoft.com/office/drawing/2014/main" id="{0C4AA8BD-14F5-4FE8-9129-EB0203C847AF}"/>
-              </a:ext>
-            </a:extLst>
-          </p:cNvPr>
+          <p:cNvPr id="11" name="Text 9"/>
           <p:cNvSpPr>
             <a:spLocks noGrp="1"/>
           </p:cNvSpPr>
@@ -16467,13 +14827,7 @@
       </p:sp>
       <p:sp>
         <p:nvSpPr>
-          <p:cNvPr id="12" name="Text 10">
-            <a:extLst>
-              <a:ext uri="{FF2B5EF4-FFF2-40B4-BE49-F238E27FC236}">
-                <a16:creationId xmlns:a16="http://schemas.microsoft.com/office/drawing/2014/main" id="{1AD3EFC7-B7E3-4DC2-92BF-6737AEF7248B}"/>
-              </a:ext>
-            </a:extLst>
-          </p:cNvPr>
+          <p:cNvPr id="12" name="Text 10"/>
           <p:cNvSpPr>
             <a:spLocks noGrp="1"/>
           </p:cNvSpPr>
@@ -16522,13 +14876,7 @@
       </p:sp>
       <p:sp>
         <p:nvSpPr>
-          <p:cNvPr id="13" name="Text 11">
-            <a:extLst>
-              <a:ext uri="{FF2B5EF4-FFF2-40B4-BE49-F238E27FC236}">
-                <a16:creationId xmlns:a16="http://schemas.microsoft.com/office/drawing/2014/main" id="{8131F02B-F5D2-489D-9266-B8E1E18010A7}"/>
-              </a:ext>
-            </a:extLst>
-          </p:cNvPr>
+          <p:cNvPr id="13" name="Text 11"/>
           <p:cNvSpPr>
             <a:spLocks noGrp="1"/>
           </p:cNvSpPr>
@@ -16577,13 +14925,7 @@
       </p:sp>
       <p:sp>
         <p:nvSpPr>
-          <p:cNvPr id="14" name="Text 12">
-            <a:extLst>
-              <a:ext uri="{FF2B5EF4-FFF2-40B4-BE49-F238E27FC236}">
-                <a16:creationId xmlns:a16="http://schemas.microsoft.com/office/drawing/2014/main" id="{1B195CAC-4153-41B8-B73A-CAC178A7602F}"/>
-              </a:ext>
-            </a:extLst>
-          </p:cNvPr>
+          <p:cNvPr id="14" name="Text 12"/>
           <p:cNvSpPr>
             <a:spLocks noGrp="1"/>
           </p:cNvSpPr>
@@ -16676,13 +15018,7 @@
       </p:sp>
       <p:sp>
         <p:nvSpPr>
-          <p:cNvPr id="15" name="Text 13">
-            <a:extLst>
-              <a:ext uri="{FF2B5EF4-FFF2-40B4-BE49-F238E27FC236}">
-                <a16:creationId xmlns:a16="http://schemas.microsoft.com/office/drawing/2014/main" id="{3E485E96-64C1-4900-8F6D-19C91EC3A9C2}"/>
-              </a:ext>
-            </a:extLst>
-          </p:cNvPr>
+          <p:cNvPr id="15" name="Text 13"/>
           <p:cNvSpPr>
             <a:spLocks noGrp="1"/>
           </p:cNvSpPr>
@@ -16731,13 +15067,7 @@
       </p:sp>
       <p:sp>
         <p:nvSpPr>
-          <p:cNvPr id="16" name="Text 14">
-            <a:extLst>
-              <a:ext uri="{FF2B5EF4-FFF2-40B4-BE49-F238E27FC236}">
-                <a16:creationId xmlns:a16="http://schemas.microsoft.com/office/drawing/2014/main" id="{16A282ED-51F8-40DF-9F9F-A7DD47D4CCD0}"/>
-              </a:ext>
-            </a:extLst>
-          </p:cNvPr>
+          <p:cNvPr id="16" name="Text 14"/>
           <p:cNvSpPr>
             <a:spLocks noGrp="1"/>
           </p:cNvSpPr>
@@ -16786,13 +15116,7 @@
       </p:sp>
       <p:sp>
         <p:nvSpPr>
-          <p:cNvPr id="17" name="Text 15">
-            <a:extLst>
-              <a:ext uri="{FF2B5EF4-FFF2-40B4-BE49-F238E27FC236}">
-                <a16:creationId xmlns:a16="http://schemas.microsoft.com/office/drawing/2014/main" id="{CF5C6CEB-4FF9-4EA7-81CB-5D572C30AD6A}"/>
-              </a:ext>
-            </a:extLst>
-          </p:cNvPr>
+          <p:cNvPr id="17" name="Text 15"/>
           <p:cNvSpPr>
             <a:spLocks noGrp="1"/>
           </p:cNvSpPr>
@@ -16885,13 +15209,7 @@
       </p:sp>
       <p:sp>
         <p:nvSpPr>
-          <p:cNvPr id="18" name="Text 16">
-            <a:extLst>
-              <a:ext uri="{FF2B5EF4-FFF2-40B4-BE49-F238E27FC236}">
-                <a16:creationId xmlns:a16="http://schemas.microsoft.com/office/drawing/2014/main" id="{25B86B58-BA55-40AE-AC51-A76107B3F82A}"/>
-              </a:ext>
-            </a:extLst>
-          </p:cNvPr>
+          <p:cNvPr id="18" name="Text 16"/>
           <p:cNvSpPr>
             <a:spLocks noGrp="1"/>
           </p:cNvSpPr>
@@ -16940,13 +15258,7 @@
       </p:sp>
       <p:sp>
         <p:nvSpPr>
-          <p:cNvPr id="19" name="Text 17">
-            <a:extLst>
-              <a:ext uri="{FF2B5EF4-FFF2-40B4-BE49-F238E27FC236}">
-                <a16:creationId xmlns:a16="http://schemas.microsoft.com/office/drawing/2014/main" id="{1966283F-0516-4120-A08B-04F10AAB2306}"/>
-              </a:ext>
-            </a:extLst>
-          </p:cNvPr>
+          <p:cNvPr id="19" name="Text 17"/>
           <p:cNvSpPr>
             <a:spLocks noGrp="1"/>
           </p:cNvSpPr>
@@ -16995,13 +15307,7 @@
       </p:sp>
       <p:sp>
         <p:nvSpPr>
-          <p:cNvPr id="20" name="Text 18">
-            <a:extLst>
-              <a:ext uri="{FF2B5EF4-FFF2-40B4-BE49-F238E27FC236}">
-                <a16:creationId xmlns:a16="http://schemas.microsoft.com/office/drawing/2014/main" id="{E2AE5288-D1A3-48BD-9E5E-88AF5B2416E8}"/>
-              </a:ext>
-            </a:extLst>
-          </p:cNvPr>
+          <p:cNvPr id="20" name="Text 18"/>
           <p:cNvSpPr>
             <a:spLocks noGrp="1"/>
           </p:cNvSpPr>
@@ -17061,13 +15367,7 @@
       </p:sp>
       <p:sp>
         <p:nvSpPr>
-          <p:cNvPr id="21" name="Text 19">
-            <a:extLst>
-              <a:ext uri="{FF2B5EF4-FFF2-40B4-BE49-F238E27FC236}">
-                <a16:creationId xmlns:a16="http://schemas.microsoft.com/office/drawing/2014/main" id="{E66AB7CE-B7FE-471F-8DC1-65B7B5B880E5}"/>
-              </a:ext>
-            </a:extLst>
-          </p:cNvPr>
+          <p:cNvPr id="21" name="Text 19"/>
           <p:cNvSpPr>
             <a:spLocks noGrp="1"/>
           </p:cNvSpPr>
@@ -17116,13 +15416,7 @@
       </p:sp>
       <p:sp>
         <p:nvSpPr>
-          <p:cNvPr id="22" name="Text 20">
-            <a:extLst>
-              <a:ext uri="{FF2B5EF4-FFF2-40B4-BE49-F238E27FC236}">
-                <a16:creationId xmlns:a16="http://schemas.microsoft.com/office/drawing/2014/main" id="{55AE15F2-7CFA-43FC-9588-66B52FBCD2DA}"/>
-              </a:ext>
-            </a:extLst>
-          </p:cNvPr>
+          <p:cNvPr id="22" name="Text 20"/>
           <p:cNvSpPr>
             <a:spLocks noGrp="1"/>
           </p:cNvSpPr>
@@ -17171,13 +15465,7 @@
       </p:sp>
       <p:sp>
         <p:nvSpPr>
-          <p:cNvPr id="23" name="Text 21">
-            <a:extLst>
-              <a:ext uri="{FF2B5EF4-FFF2-40B4-BE49-F238E27FC236}">
-                <a16:creationId xmlns:a16="http://schemas.microsoft.com/office/drawing/2014/main" id="{95023D04-CF2B-4477-9DEF-ED89834A0523}"/>
-              </a:ext>
-            </a:extLst>
-          </p:cNvPr>
+          <p:cNvPr id="23" name="Text 21"/>
           <p:cNvSpPr>
             <a:spLocks noGrp="1"/>
           </p:cNvSpPr>
@@ -17237,13 +15525,7 @@
       </p:sp>
       <p:sp>
         <p:nvSpPr>
-          <p:cNvPr id="24" name="Text 22">
-            <a:extLst>
-              <a:ext uri="{FF2B5EF4-FFF2-40B4-BE49-F238E27FC236}">
-                <a16:creationId xmlns:a16="http://schemas.microsoft.com/office/drawing/2014/main" id="{B724C391-F294-4E6D-AC89-B26297AF5881}"/>
-              </a:ext>
-            </a:extLst>
-          </p:cNvPr>
+          <p:cNvPr id="24" name="Text 22"/>
           <p:cNvSpPr>
             <a:spLocks noGrp="1"/>
           </p:cNvSpPr>
@@ -17292,13 +15574,7 @@
       </p:sp>
       <p:sp>
         <p:nvSpPr>
-          <p:cNvPr id="25" name="Text 23">
-            <a:extLst>
-              <a:ext uri="{FF2B5EF4-FFF2-40B4-BE49-F238E27FC236}">
-                <a16:creationId xmlns:a16="http://schemas.microsoft.com/office/drawing/2014/main" id="{0D8EDEC6-BA81-47C9-B7E9-E10145ACE0A4}"/>
-              </a:ext>
-            </a:extLst>
-          </p:cNvPr>
+          <p:cNvPr id="25" name="Text 23"/>
           <p:cNvSpPr>
             <a:spLocks noGrp="1"/>
           </p:cNvSpPr>
@@ -17347,13 +15623,7 @@
       </p:sp>
       <p:sp>
         <p:nvSpPr>
-          <p:cNvPr id="26" name="Text 24">
-            <a:extLst>
-              <a:ext uri="{FF2B5EF4-FFF2-40B4-BE49-F238E27FC236}">
-                <a16:creationId xmlns:a16="http://schemas.microsoft.com/office/drawing/2014/main" id="{5C4C1A3E-4DA3-424E-A43B-E6B2A551317B}"/>
-              </a:ext>
-            </a:extLst>
-          </p:cNvPr>
+          <p:cNvPr id="26" name="Text 24"/>
           <p:cNvSpPr>
             <a:spLocks noGrp="1"/>
           </p:cNvSpPr>
@@ -17413,13 +15683,7 @@
       </p:sp>
       <p:sp>
         <p:nvSpPr>
-          <p:cNvPr id="27" name="Text 25">
-            <a:extLst>
-              <a:ext uri="{FF2B5EF4-FFF2-40B4-BE49-F238E27FC236}">
-                <a16:creationId xmlns:a16="http://schemas.microsoft.com/office/drawing/2014/main" id="{B1845018-D164-40BC-917D-9E5023BCA75D}"/>
-              </a:ext>
-            </a:extLst>
-          </p:cNvPr>
+          <p:cNvPr id="27" name="Text 25"/>
           <p:cNvSpPr>
             <a:spLocks noGrp="1"/>
           </p:cNvSpPr>
@@ -17468,13 +15732,7 @@
       </p:sp>
       <p:sp>
         <p:nvSpPr>
-          <p:cNvPr id="28" name="Text 26">
-            <a:extLst>
-              <a:ext uri="{FF2B5EF4-FFF2-40B4-BE49-F238E27FC236}">
-                <a16:creationId xmlns:a16="http://schemas.microsoft.com/office/drawing/2014/main" id="{EB757718-1B89-4299-85CD-9C9F017C0FA3}"/>
-              </a:ext>
-            </a:extLst>
-          </p:cNvPr>
+          <p:cNvPr id="28" name="Text 26"/>
           <p:cNvSpPr>
             <a:spLocks noGrp="1"/>
           </p:cNvSpPr>
@@ -17523,13 +15781,7 @@
       </p:sp>
       <p:sp>
         <p:nvSpPr>
-          <p:cNvPr id="29" name="Text 27">
-            <a:extLst>
-              <a:ext uri="{FF2B5EF4-FFF2-40B4-BE49-F238E27FC236}">
-                <a16:creationId xmlns:a16="http://schemas.microsoft.com/office/drawing/2014/main" id="{A5959F00-CA80-400B-8517-4188DFC2ADAA}"/>
-              </a:ext>
-            </a:extLst>
-          </p:cNvPr>
+          <p:cNvPr id="29" name="Text 27"/>
           <p:cNvSpPr>
             <a:spLocks noGrp="1"/>
           </p:cNvSpPr>
@@ -17589,13 +15841,7 @@
       </p:sp>
       <p:sp>
         <p:nvSpPr>
-          <p:cNvPr id="30" name="Text 28">
-            <a:extLst>
-              <a:ext uri="{FF2B5EF4-FFF2-40B4-BE49-F238E27FC236}">
-                <a16:creationId xmlns:a16="http://schemas.microsoft.com/office/drawing/2014/main" id="{2958F16D-877B-46BC-B6AC-5261E4D1E141}"/>
-              </a:ext>
-            </a:extLst>
-          </p:cNvPr>
+          <p:cNvPr id="30" name="Text 28"/>
           <p:cNvSpPr>
             <a:spLocks noGrp="1"/>
           </p:cNvSpPr>
@@ -17644,13 +15890,7 @@
       </p:sp>
       <p:sp>
         <p:nvSpPr>
-          <p:cNvPr id="31" name="Text 29">
-            <a:extLst>
-              <a:ext uri="{FF2B5EF4-FFF2-40B4-BE49-F238E27FC236}">
-                <a16:creationId xmlns:a16="http://schemas.microsoft.com/office/drawing/2014/main" id="{94A4E05C-3E55-4985-B041-4872B6D8DD9F}"/>
-              </a:ext>
-            </a:extLst>
-          </p:cNvPr>
+          <p:cNvPr id="31" name="Text 29"/>
           <p:cNvSpPr>
             <a:spLocks noGrp="1"/>
           </p:cNvSpPr>
@@ -17699,13 +15939,7 @@
       </p:sp>
       <p:sp>
         <p:nvSpPr>
-          <p:cNvPr id="32" name="Text 30">
-            <a:extLst>
-              <a:ext uri="{FF2B5EF4-FFF2-40B4-BE49-F238E27FC236}">
-                <a16:creationId xmlns:a16="http://schemas.microsoft.com/office/drawing/2014/main" id="{CC2EFB1E-0CE7-4681-B1BE-7874A815011C}"/>
-              </a:ext>
-            </a:extLst>
-          </p:cNvPr>
+          <p:cNvPr id="32" name="Text 30"/>
           <p:cNvSpPr>
             <a:spLocks noGrp="1"/>
           </p:cNvSpPr>
@@ -17765,13 +15999,7 @@
       </p:sp>
       <p:sp>
         <p:nvSpPr>
-          <p:cNvPr id="33" name="Text 31">
-            <a:extLst>
-              <a:ext uri="{FF2B5EF4-FFF2-40B4-BE49-F238E27FC236}">
-                <a16:creationId xmlns:a16="http://schemas.microsoft.com/office/drawing/2014/main" id="{A2A15E01-C9B5-45B9-BDE0-702EC97901D4}"/>
-              </a:ext>
-            </a:extLst>
-          </p:cNvPr>
+          <p:cNvPr id="33" name="Text 31"/>
           <p:cNvSpPr>
             <a:spLocks noGrp="1"/>
           </p:cNvSpPr>
@@ -17820,13 +16048,7 @@
       </p:sp>
       <p:sp>
         <p:nvSpPr>
-          <p:cNvPr id="34" name="Text 32">
-            <a:extLst>
-              <a:ext uri="{FF2B5EF4-FFF2-40B4-BE49-F238E27FC236}">
-                <a16:creationId xmlns:a16="http://schemas.microsoft.com/office/drawing/2014/main" id="{D7134499-ED6A-479D-B1DD-552A3D5119EB}"/>
-              </a:ext>
-            </a:extLst>
-          </p:cNvPr>
+          <p:cNvPr id="34" name="Text 32"/>
           <p:cNvSpPr>
             <a:spLocks noGrp="1"/>
           </p:cNvSpPr>
@@ -17867,11 +16089,6 @@
         </p:txBody>
       </p:sp>
     </p:spTree>
-    <p:extLst>
-      <p:ext uri="{BB962C8B-B14F-4D97-AF65-F5344CB8AC3E}">
-        <p14:creationId xmlns:p14="http://schemas.microsoft.com/office/powerpoint/2010/main" val="1379124923"/>
-      </p:ext>
-    </p:extLst>
   </p:cSld>
   <p:clrMapOvr>
     <a:masterClrMapping/>
@@ -17906,13 +16123,7 @@
       </p:grpSpPr>
       <p:sp>
         <p:nvSpPr>
-          <p:cNvPr id="2" name="Text 0">
-            <a:extLst>
-              <a:ext uri="{FF2B5EF4-FFF2-40B4-BE49-F238E27FC236}">
-                <a16:creationId xmlns:a16="http://schemas.microsoft.com/office/drawing/2014/main" id="{C04FFD0F-4C9C-41A1-9535-473CCF89E597}"/>
-              </a:ext>
-            </a:extLst>
-          </p:cNvPr>
+          <p:cNvPr id="2" name="Text 0"/>
           <p:cNvSpPr>
             <a:spLocks noGrp="1"/>
           </p:cNvSpPr>
@@ -17954,13 +16165,7 @@
       </p:sp>
       <p:sp>
         <p:nvSpPr>
-          <p:cNvPr id="3" name="Text 1">
-            <a:extLst>
-              <a:ext uri="{FF2B5EF4-FFF2-40B4-BE49-F238E27FC236}">
-                <a16:creationId xmlns:a16="http://schemas.microsoft.com/office/drawing/2014/main" id="{8C37C8FC-8B17-4AD1-9E17-0EE495646EC7}"/>
-              </a:ext>
-            </a:extLst>
-          </p:cNvPr>
+          <p:cNvPr id="3" name="Text 1"/>
           <p:cNvSpPr>
             <a:spLocks noGrp="1"/>
           </p:cNvSpPr>
@@ -18002,13 +16207,7 @@
       </p:sp>
       <p:sp>
         <p:nvSpPr>
-          <p:cNvPr id="4" name="Text 2">
-            <a:extLst>
-              <a:ext uri="{FF2B5EF4-FFF2-40B4-BE49-F238E27FC236}">
-                <a16:creationId xmlns:a16="http://schemas.microsoft.com/office/drawing/2014/main" id="{D1764195-5FAB-47F9-9221-2CF008273790}"/>
-              </a:ext>
-            </a:extLst>
-          </p:cNvPr>
+          <p:cNvPr id="4" name="Text 2"/>
           <p:cNvSpPr>
             <a:spLocks noGrp="1"/>
           </p:cNvSpPr>
@@ -18050,13 +16249,7 @@
       </p:sp>
       <p:sp>
         <p:nvSpPr>
-          <p:cNvPr id="5" name="Text 3">
-            <a:extLst>
-              <a:ext uri="{FF2B5EF4-FFF2-40B4-BE49-F238E27FC236}">
-                <a16:creationId xmlns:a16="http://schemas.microsoft.com/office/drawing/2014/main" id="{B03D062C-DB19-4653-8E6A-5E30833B2516}"/>
-              </a:ext>
-            </a:extLst>
-          </p:cNvPr>
+          <p:cNvPr id="5" name="Text 3"/>
           <p:cNvSpPr>
             <a:spLocks noGrp="1"/>
           </p:cNvSpPr>
@@ -18096,13 +16289,7 @@
       </p:sp>
       <p:sp>
         <p:nvSpPr>
-          <p:cNvPr id="6" name="Shape 4">
-            <a:extLst>
-              <a:ext uri="{FF2B5EF4-FFF2-40B4-BE49-F238E27FC236}">
-                <a16:creationId xmlns:a16="http://schemas.microsoft.com/office/drawing/2014/main" id="{E6F30423-8B39-4C24-AC3E-77B1B864616F}"/>
-              </a:ext>
-            </a:extLst>
-          </p:cNvPr>
+          <p:cNvPr id="6" name="Shape 4"/>
           <p:cNvSpPr>
             <a:spLocks noGrp="1"/>
           </p:cNvSpPr>
@@ -18129,13 +16316,7 @@
       </p:sp>
       <p:sp>
         <p:nvSpPr>
-          <p:cNvPr id="7" name="Shape 5">
-            <a:extLst>
-              <a:ext uri="{FF2B5EF4-FFF2-40B4-BE49-F238E27FC236}">
-                <a16:creationId xmlns:a16="http://schemas.microsoft.com/office/drawing/2014/main" id="{59D4EC8E-805D-4DB1-B0CB-E0D97E3123C7}"/>
-              </a:ext>
-            </a:extLst>
-          </p:cNvPr>
+          <p:cNvPr id="7" name="Shape 5"/>
           <p:cNvSpPr>
             <a:spLocks noGrp="1"/>
           </p:cNvSpPr>
@@ -18160,13 +16341,7 @@
       </p:sp>
       <p:sp>
         <p:nvSpPr>
-          <p:cNvPr id="8" name="Shape 6">
-            <a:extLst>
-              <a:ext uri="{FF2B5EF4-FFF2-40B4-BE49-F238E27FC236}">
-                <a16:creationId xmlns:a16="http://schemas.microsoft.com/office/drawing/2014/main" id="{986D2DFF-C91E-4684-A4A9-72BEB27D21DA}"/>
-              </a:ext>
-            </a:extLst>
-          </p:cNvPr>
+          <p:cNvPr id="8" name="Shape 6"/>
           <p:cNvSpPr>
             <a:spLocks noGrp="1"/>
           </p:cNvSpPr>
@@ -18193,13 +16368,7 @@
       </p:sp>
       <p:sp>
         <p:nvSpPr>
-          <p:cNvPr id="9" name="Shape 7">
-            <a:extLst>
-              <a:ext uri="{FF2B5EF4-FFF2-40B4-BE49-F238E27FC236}">
-                <a16:creationId xmlns:a16="http://schemas.microsoft.com/office/drawing/2014/main" id="{258903FA-7B6B-41AD-990A-AF1018E45313}"/>
-              </a:ext>
-            </a:extLst>
-          </p:cNvPr>
+          <p:cNvPr id="9" name="Shape 7"/>
           <p:cNvSpPr>
             <a:spLocks noGrp="1"/>
           </p:cNvSpPr>
@@ -18226,13 +16395,7 @@
       </p:sp>
       <p:sp>
         <p:nvSpPr>
-          <p:cNvPr id="10" name="Shape 8">
-            <a:extLst>
-              <a:ext uri="{FF2B5EF4-FFF2-40B4-BE49-F238E27FC236}">
-                <a16:creationId xmlns:a16="http://schemas.microsoft.com/office/drawing/2014/main" id="{34DFBACA-2802-4969-B77B-8DE274A668B4}"/>
-              </a:ext>
-            </a:extLst>
-          </p:cNvPr>
+          <p:cNvPr id="10" name="Shape 8"/>
           <p:cNvSpPr>
             <a:spLocks noGrp="1"/>
           </p:cNvSpPr>
@@ -18259,13 +16422,7 @@
       </p:sp>
       <p:sp>
         <p:nvSpPr>
-          <p:cNvPr id="11" name="Text 9">
-            <a:extLst>
-              <a:ext uri="{FF2B5EF4-FFF2-40B4-BE49-F238E27FC236}">
-                <a16:creationId xmlns:a16="http://schemas.microsoft.com/office/drawing/2014/main" id="{47C5D779-C84A-4650-987A-41444819C0D3}"/>
-              </a:ext>
-            </a:extLst>
-          </p:cNvPr>
+          <p:cNvPr id="11" name="Text 9"/>
           <p:cNvSpPr>
             <a:spLocks noGrp="1"/>
           </p:cNvSpPr>
@@ -18331,13 +16488,7 @@
       </p:sp>
       <p:sp>
         <p:nvSpPr>
-          <p:cNvPr id="12" name="Text 10">
-            <a:extLst>
-              <a:ext uri="{FF2B5EF4-FFF2-40B4-BE49-F238E27FC236}">
-                <a16:creationId xmlns:a16="http://schemas.microsoft.com/office/drawing/2014/main" id="{92086560-8F8A-47C5-B60D-A21914A686B3}"/>
-              </a:ext>
-            </a:extLst>
-          </p:cNvPr>
+          <p:cNvPr id="12" name="Text 10"/>
           <p:cNvSpPr>
             <a:spLocks noGrp="1"/>
           </p:cNvSpPr>
@@ -18403,13 +16554,7 @@
       </p:sp>
       <p:sp>
         <p:nvSpPr>
-          <p:cNvPr id="13" name="Text 11">
-            <a:extLst>
-              <a:ext uri="{FF2B5EF4-FFF2-40B4-BE49-F238E27FC236}">
-                <a16:creationId xmlns:a16="http://schemas.microsoft.com/office/drawing/2014/main" id="{935F1F31-37C3-4A76-8AA4-A2D477D65ABA}"/>
-              </a:ext>
-            </a:extLst>
-          </p:cNvPr>
+          <p:cNvPr id="13" name="Text 11"/>
           <p:cNvSpPr>
             <a:spLocks noGrp="1"/>
           </p:cNvSpPr>
@@ -18475,13 +16620,7 @@
       </p:sp>
       <p:sp>
         <p:nvSpPr>
-          <p:cNvPr id="14" name="Text 12">
-            <a:extLst>
-              <a:ext uri="{FF2B5EF4-FFF2-40B4-BE49-F238E27FC236}">
-                <a16:creationId xmlns:a16="http://schemas.microsoft.com/office/drawing/2014/main" id="{EBA43C4D-B4DE-40CC-BE7A-3B4A5654AB57}"/>
-              </a:ext>
-            </a:extLst>
-          </p:cNvPr>
+          <p:cNvPr id="14" name="Text 12"/>
           <p:cNvSpPr>
             <a:spLocks noGrp="1"/>
           </p:cNvSpPr>
@@ -18547,13 +16686,7 @@
       </p:sp>
       <p:sp>
         <p:nvSpPr>
-          <p:cNvPr id="15" name="Text 13">
-            <a:extLst>
-              <a:ext uri="{FF2B5EF4-FFF2-40B4-BE49-F238E27FC236}">
-                <a16:creationId xmlns:a16="http://schemas.microsoft.com/office/drawing/2014/main" id="{0EB673EC-A79D-467E-9CD6-0300460EDE1C}"/>
-              </a:ext>
-            </a:extLst>
-          </p:cNvPr>
+          <p:cNvPr id="15" name="Text 13"/>
           <p:cNvSpPr>
             <a:spLocks noGrp="1"/>
           </p:cNvSpPr>
@@ -18590,9 +16723,9 @@
                 <a:solidFill>
                   <a:srgbClr val="D9E7FF"/>
                 </a:solidFill>
-                <a:latin typeface="Consolas"/>
-                <a:ea typeface="Consolas"/>
-                <a:cs typeface="Consolas"/>
+                <a:latin typeface="Consolas" panose="020B0609020204030204"/>
+                <a:ea typeface="Consolas" panose="020B0609020204030204"/>
+                <a:cs typeface="Consolas" panose="020B0609020204030204"/>
               </a:rPr>
               <a:t>wait_ready</a:t>
             </a:r>
@@ -18601,9 +16734,9 @@
                 <a:solidFill>
                   <a:srgbClr val="D9E7FF"/>
                 </a:solidFill>
-                <a:latin typeface="Consolas"/>
-                <a:ea typeface="Consolas"/>
-                <a:cs typeface="Consolas"/>
+                <a:latin typeface="Consolas" panose="020B0609020204030204"/>
+                <a:ea typeface="Consolas" panose="020B0609020204030204"/>
+                <a:cs typeface="Consolas" panose="020B0609020204030204"/>
               </a:rPr>
               <a:t>:</a:t>
             </a:r>
@@ -18618,9 +16751,9 @@
                 <a:solidFill>
                   <a:srgbClr val="D9E7FF"/>
                 </a:solidFill>
-                <a:latin typeface="Consolas"/>
-                <a:ea typeface="Consolas"/>
-                <a:cs typeface="Consolas"/>
+                <a:latin typeface="Consolas" panose="020B0609020204030204"/>
+                <a:ea typeface="Consolas" panose="020B0609020204030204"/>
+                <a:cs typeface="Consolas" panose="020B0609020204030204"/>
               </a:rPr>
               <a:t>    </a:t>
             </a:r>
@@ -18629,9 +16762,9 @@
                 <a:solidFill>
                   <a:srgbClr val="D9E7FF"/>
                 </a:solidFill>
-                <a:latin typeface="Consolas"/>
-                <a:ea typeface="Consolas"/>
-                <a:cs typeface="Consolas"/>
+                <a:latin typeface="Consolas" panose="020B0609020204030204"/>
+                <a:ea typeface="Consolas" panose="020B0609020204030204"/>
+                <a:cs typeface="Consolas" panose="020B0609020204030204"/>
               </a:rPr>
               <a:t>lw</a:t>
             </a:r>
@@ -18640,9 +16773,9 @@
                 <a:solidFill>
                   <a:srgbClr val="D9E7FF"/>
                 </a:solidFill>
-                <a:latin typeface="Consolas"/>
-                <a:ea typeface="Consolas"/>
-                <a:cs typeface="Consolas"/>
+                <a:latin typeface="Consolas" panose="020B0609020204030204"/>
+                <a:ea typeface="Consolas" panose="020B0609020204030204"/>
+                <a:cs typeface="Consolas" panose="020B0609020204030204"/>
               </a:rPr>
               <a:t>   x12, 40(x10)      # LCD_STATUS</a:t>
             </a:r>
@@ -18657,9 +16790,9 @@
                 <a:solidFill>
                   <a:srgbClr val="D9E7FF"/>
                 </a:solidFill>
-                <a:latin typeface="Consolas"/>
-                <a:ea typeface="Consolas"/>
-                <a:cs typeface="Consolas"/>
+                <a:latin typeface="Consolas" panose="020B0609020204030204"/>
+                <a:ea typeface="Consolas" panose="020B0609020204030204"/>
+                <a:cs typeface="Consolas" panose="020B0609020204030204"/>
               </a:rPr>
               <a:t>    </a:t>
             </a:r>
@@ -18668,9 +16801,9 @@
                 <a:solidFill>
                   <a:srgbClr val="D9E7FF"/>
                 </a:solidFill>
-                <a:latin typeface="Consolas"/>
-                <a:ea typeface="Consolas"/>
-                <a:cs typeface="Consolas"/>
+                <a:latin typeface="Consolas" panose="020B0609020204030204"/>
+                <a:ea typeface="Consolas" panose="020B0609020204030204"/>
+                <a:cs typeface="Consolas" panose="020B0609020204030204"/>
               </a:rPr>
               <a:t>andi</a:t>
             </a:r>
@@ -18679,9 +16812,9 @@
                 <a:solidFill>
                   <a:srgbClr val="D9E7FF"/>
                 </a:solidFill>
-                <a:latin typeface="Consolas"/>
-                <a:ea typeface="Consolas"/>
-                <a:cs typeface="Consolas"/>
+                <a:latin typeface="Consolas" panose="020B0609020204030204"/>
+                <a:ea typeface="Consolas" panose="020B0609020204030204"/>
+                <a:cs typeface="Consolas" panose="020B0609020204030204"/>
               </a:rPr>
               <a:t> x12, x12, 1       # ready</a:t>
             </a:r>
@@ -18696,9 +16829,9 @@
                 <a:solidFill>
                   <a:srgbClr val="D9E7FF"/>
                 </a:solidFill>
-                <a:latin typeface="Consolas"/>
-                <a:ea typeface="Consolas"/>
-                <a:cs typeface="Consolas"/>
+                <a:latin typeface="Consolas" panose="020B0609020204030204"/>
+                <a:ea typeface="Consolas" panose="020B0609020204030204"/>
+                <a:cs typeface="Consolas" panose="020B0609020204030204"/>
               </a:rPr>
               <a:t>    </a:t>
             </a:r>
@@ -18707,9 +16840,9 @@
                 <a:solidFill>
                   <a:srgbClr val="D9E7FF"/>
                 </a:solidFill>
-                <a:latin typeface="Consolas"/>
-                <a:ea typeface="Consolas"/>
-                <a:cs typeface="Consolas"/>
+                <a:latin typeface="Consolas" panose="020B0609020204030204"/>
+                <a:ea typeface="Consolas" panose="020B0609020204030204"/>
+                <a:cs typeface="Consolas" panose="020B0609020204030204"/>
               </a:rPr>
               <a:t>beq</a:t>
             </a:r>
@@ -18718,9 +16851,9 @@
                 <a:solidFill>
                   <a:srgbClr val="D9E7FF"/>
                 </a:solidFill>
-                <a:latin typeface="Consolas"/>
-                <a:ea typeface="Consolas"/>
-                <a:cs typeface="Consolas"/>
+                <a:latin typeface="Consolas" panose="020B0609020204030204"/>
+                <a:ea typeface="Consolas" panose="020B0609020204030204"/>
+                <a:cs typeface="Consolas" panose="020B0609020204030204"/>
               </a:rPr>
               <a:t>  x12, x0, </a:t>
             </a:r>
@@ -18729,9 +16862,9 @@
                 <a:solidFill>
                   <a:srgbClr val="D9E7FF"/>
                 </a:solidFill>
-                <a:latin typeface="Consolas"/>
-                <a:ea typeface="Consolas"/>
-                <a:cs typeface="Consolas"/>
+                <a:latin typeface="Consolas" panose="020B0609020204030204"/>
+                <a:ea typeface="Consolas" panose="020B0609020204030204"/>
+                <a:cs typeface="Consolas" panose="020B0609020204030204"/>
               </a:rPr>
               <a:t>wait_ready</a:t>
             </a:r>
@@ -18746,9 +16879,9 @@
                 <a:solidFill>
                   <a:srgbClr val="D9E7FF"/>
                 </a:solidFill>
-                <a:latin typeface="Consolas"/>
-                <a:ea typeface="Consolas"/>
-                <a:cs typeface="Consolas"/>
+                <a:latin typeface="Consolas" panose="020B0609020204030204"/>
+                <a:ea typeface="Consolas" panose="020B0609020204030204"/>
+                <a:cs typeface="Consolas" panose="020B0609020204030204"/>
               </a:rPr>
               <a:t>    </a:t>
             </a:r>
@@ -18757,9 +16890,9 @@
                 <a:solidFill>
                   <a:srgbClr val="D9E7FF"/>
                 </a:solidFill>
-                <a:latin typeface="Consolas"/>
-                <a:ea typeface="Consolas"/>
-                <a:cs typeface="Consolas"/>
+                <a:latin typeface="Consolas" panose="020B0609020204030204"/>
+                <a:ea typeface="Consolas" panose="020B0609020204030204"/>
+                <a:cs typeface="Consolas" panose="020B0609020204030204"/>
               </a:rPr>
               <a:t>sw</a:t>
             </a:r>
@@ -18768,9 +16901,9 @@
                 <a:solidFill>
                   <a:srgbClr val="D9E7FF"/>
                 </a:solidFill>
-                <a:latin typeface="Consolas"/>
-                <a:ea typeface="Consolas"/>
-                <a:cs typeface="Consolas"/>
+                <a:latin typeface="Consolas" panose="020B0609020204030204"/>
+                <a:ea typeface="Consolas" panose="020B0609020204030204"/>
+                <a:cs typeface="Consolas" panose="020B0609020204030204"/>
               </a:rPr>
               <a:t>   x13, 32(x10)      # LCD_CMD</a:t>
             </a:r>
@@ -18780,13 +16913,7 @@
       </p:sp>
       <p:sp>
         <p:nvSpPr>
-          <p:cNvPr id="16" name="Text 14">
-            <a:extLst>
-              <a:ext uri="{FF2B5EF4-FFF2-40B4-BE49-F238E27FC236}">
-                <a16:creationId xmlns:a16="http://schemas.microsoft.com/office/drawing/2014/main" id="{A6D51864-35EC-4B6E-844D-0A276479221A}"/>
-              </a:ext>
-            </a:extLst>
-          </p:cNvPr>
+          <p:cNvPr id="16" name="Text 14"/>
           <p:cNvSpPr>
             <a:spLocks noGrp="1"/>
           </p:cNvSpPr>
@@ -18869,13 +16996,7 @@
       </p:sp>
       <p:sp>
         <p:nvSpPr>
-          <p:cNvPr id="17" name="Text 15">
-            <a:extLst>
-              <a:ext uri="{FF2B5EF4-FFF2-40B4-BE49-F238E27FC236}">
-                <a16:creationId xmlns:a16="http://schemas.microsoft.com/office/drawing/2014/main" id="{6FCFE431-007E-4379-913A-E2D8AD0B09FB}"/>
-              </a:ext>
-            </a:extLst>
-          </p:cNvPr>
+          <p:cNvPr id="17" name="Text 15"/>
           <p:cNvSpPr>
             <a:spLocks noGrp="1"/>
           </p:cNvSpPr>
@@ -18916,11 +17037,6 @@
         </p:txBody>
       </p:sp>
     </p:spTree>
-    <p:extLst>
-      <p:ext uri="{BB962C8B-B14F-4D97-AF65-F5344CB8AC3E}">
-        <p14:creationId xmlns:p14="http://schemas.microsoft.com/office/powerpoint/2010/main" val="1083397257"/>
-      </p:ext>
-    </p:extLst>
   </p:cSld>
   <p:clrMapOvr>
     <a:masterClrMapping/>
@@ -18955,13 +17071,7 @@
       </p:grpSpPr>
       <p:sp>
         <p:nvSpPr>
-          <p:cNvPr id="2" name="Text 0">
-            <a:extLst>
-              <a:ext uri="{FF2B5EF4-FFF2-40B4-BE49-F238E27FC236}">
-                <a16:creationId xmlns:a16="http://schemas.microsoft.com/office/drawing/2014/main" id="{38881682-785A-41C0-986A-0F75EB4A29E8}"/>
-              </a:ext>
-            </a:extLst>
-          </p:cNvPr>
+          <p:cNvPr id="2" name="Text 0"/>
           <p:cNvSpPr>
             <a:spLocks noGrp="1"/>
           </p:cNvSpPr>
@@ -19003,13 +17113,7 @@
       </p:sp>
       <p:sp>
         <p:nvSpPr>
-          <p:cNvPr id="3" name="Text 1">
-            <a:extLst>
-              <a:ext uri="{FF2B5EF4-FFF2-40B4-BE49-F238E27FC236}">
-                <a16:creationId xmlns:a16="http://schemas.microsoft.com/office/drawing/2014/main" id="{79B06B46-F390-4FDB-A431-B021E0ACF9AE}"/>
-              </a:ext>
-            </a:extLst>
-          </p:cNvPr>
+          <p:cNvPr id="3" name="Text 1"/>
           <p:cNvSpPr>
             <a:spLocks noGrp="1"/>
           </p:cNvSpPr>
@@ -19051,13 +17155,7 @@
       </p:sp>
       <p:sp>
         <p:nvSpPr>
-          <p:cNvPr id="4" name="Text 2">
-            <a:extLst>
-              <a:ext uri="{FF2B5EF4-FFF2-40B4-BE49-F238E27FC236}">
-                <a16:creationId xmlns:a16="http://schemas.microsoft.com/office/drawing/2014/main" id="{D0D94D53-8B19-45CB-9ECA-D6B68A1EA47A}"/>
-              </a:ext>
-            </a:extLst>
-          </p:cNvPr>
+          <p:cNvPr id="4" name="Text 2"/>
           <p:cNvSpPr>
             <a:spLocks noGrp="1"/>
           </p:cNvSpPr>
@@ -19099,13 +17197,7 @@
       </p:sp>
       <p:sp>
         <p:nvSpPr>
-          <p:cNvPr id="5" name="Text 3">
-            <a:extLst>
-              <a:ext uri="{FF2B5EF4-FFF2-40B4-BE49-F238E27FC236}">
-                <a16:creationId xmlns:a16="http://schemas.microsoft.com/office/drawing/2014/main" id="{4AC68DFB-DE81-4171-9CFB-CEF2621350C9}"/>
-              </a:ext>
-            </a:extLst>
-          </p:cNvPr>
+          <p:cNvPr id="5" name="Text 3"/>
           <p:cNvSpPr>
             <a:spLocks noGrp="1"/>
           </p:cNvSpPr>
@@ -19145,13 +17237,7 @@
       </p:sp>
       <p:sp>
         <p:nvSpPr>
-          <p:cNvPr id="6" name="Shape 4">
-            <a:extLst>
-              <a:ext uri="{FF2B5EF4-FFF2-40B4-BE49-F238E27FC236}">
-                <a16:creationId xmlns:a16="http://schemas.microsoft.com/office/drawing/2014/main" id="{ED7F99D0-491B-4497-B077-85833D46BF1E}"/>
-              </a:ext>
-            </a:extLst>
-          </p:cNvPr>
+          <p:cNvPr id="6" name="Shape 4"/>
           <p:cNvSpPr>
             <a:spLocks noGrp="1"/>
           </p:cNvSpPr>
@@ -19178,13 +17264,7 @@
       </p:sp>
       <p:sp>
         <p:nvSpPr>
-          <p:cNvPr id="7" name="Shape 5">
-            <a:extLst>
-              <a:ext uri="{FF2B5EF4-FFF2-40B4-BE49-F238E27FC236}">
-                <a16:creationId xmlns:a16="http://schemas.microsoft.com/office/drawing/2014/main" id="{2C313779-9D3F-4C0B-AFCA-E70D2A0CCC34}"/>
-              </a:ext>
-            </a:extLst>
-          </p:cNvPr>
+          <p:cNvPr id="7" name="Shape 5"/>
           <p:cNvSpPr>
             <a:spLocks noGrp="1"/>
           </p:cNvSpPr>
@@ -19209,13 +17289,7 @@
       </p:sp>
       <p:sp>
         <p:nvSpPr>
-          <p:cNvPr id="8" name="Text 6">
-            <a:extLst>
-              <a:ext uri="{FF2B5EF4-FFF2-40B4-BE49-F238E27FC236}">
-                <a16:creationId xmlns:a16="http://schemas.microsoft.com/office/drawing/2014/main" id="{21BC5AC3-DD3E-4DCE-90DE-A7A30B0B1C22}"/>
-              </a:ext>
-            </a:extLst>
-          </p:cNvPr>
+          <p:cNvPr id="8" name="Text 6"/>
           <p:cNvSpPr>
             <a:spLocks noGrp="1"/>
           </p:cNvSpPr>
@@ -19353,13 +17427,7 @@
       </p:sp>
       <p:sp>
         <p:nvSpPr>
-          <p:cNvPr id="9" name="Text 7">
-            <a:extLst>
-              <a:ext uri="{FF2B5EF4-FFF2-40B4-BE49-F238E27FC236}">
-                <a16:creationId xmlns:a16="http://schemas.microsoft.com/office/drawing/2014/main" id="{A5DE78C7-00C1-409A-A997-8C2FCD936F48}"/>
-              </a:ext>
-            </a:extLst>
-          </p:cNvPr>
+          <p:cNvPr id="9" name="Text 7"/>
           <p:cNvSpPr>
             <a:spLocks noGrp="1"/>
           </p:cNvSpPr>
@@ -19563,13 +17631,7 @@
       </p:sp>
       <p:sp>
         <p:nvSpPr>
-          <p:cNvPr id="10" name="Text 8">
-            <a:extLst>
-              <a:ext uri="{FF2B5EF4-FFF2-40B4-BE49-F238E27FC236}">
-                <a16:creationId xmlns:a16="http://schemas.microsoft.com/office/drawing/2014/main" id="{9618703C-38A2-49D4-8920-0AD93B663E1D}"/>
-              </a:ext>
-            </a:extLst>
-          </p:cNvPr>
+          <p:cNvPr id="10" name="Text 8"/>
           <p:cNvSpPr>
             <a:spLocks noGrp="1"/>
           </p:cNvSpPr>
@@ -19729,13 +17791,7 @@
       </p:sp>
       <p:sp>
         <p:nvSpPr>
-          <p:cNvPr id="11" name="Text 9">
-            <a:extLst>
-              <a:ext uri="{FF2B5EF4-FFF2-40B4-BE49-F238E27FC236}">
-                <a16:creationId xmlns:a16="http://schemas.microsoft.com/office/drawing/2014/main" id="{02986177-20FE-40F1-82EC-E4DDC65F1692}"/>
-              </a:ext>
-            </a:extLst>
-          </p:cNvPr>
+          <p:cNvPr id="11" name="Text 9"/>
           <p:cNvSpPr>
             <a:spLocks noGrp="1"/>
           </p:cNvSpPr>
@@ -19895,13 +17951,7 @@
       </p:sp>
       <p:sp>
         <p:nvSpPr>
-          <p:cNvPr id="12" name="Text 10">
-            <a:extLst>
-              <a:ext uri="{FF2B5EF4-FFF2-40B4-BE49-F238E27FC236}">
-                <a16:creationId xmlns:a16="http://schemas.microsoft.com/office/drawing/2014/main" id="{E76E0881-D40A-4AC3-8432-61176833A0A1}"/>
-              </a:ext>
-            </a:extLst>
-          </p:cNvPr>
+          <p:cNvPr id="12" name="Text 10"/>
           <p:cNvSpPr>
             <a:spLocks noGrp="1"/>
           </p:cNvSpPr>
@@ -19950,13 +18000,7 @@
       </p:sp>
       <p:sp>
         <p:nvSpPr>
-          <p:cNvPr id="13" name="Text 11">
-            <a:extLst>
-              <a:ext uri="{FF2B5EF4-FFF2-40B4-BE49-F238E27FC236}">
-                <a16:creationId xmlns:a16="http://schemas.microsoft.com/office/drawing/2014/main" id="{0305FBEC-747D-4797-9810-6BADF2F58B08}"/>
-              </a:ext>
-            </a:extLst>
-          </p:cNvPr>
+          <p:cNvPr id="13" name="Text 11"/>
           <p:cNvSpPr>
             <a:spLocks noGrp="1"/>
           </p:cNvSpPr>
@@ -20005,13 +18049,7 @@
       </p:sp>
       <p:sp>
         <p:nvSpPr>
-          <p:cNvPr id="14" name="Text 12">
-            <a:extLst>
-              <a:ext uri="{FF2B5EF4-FFF2-40B4-BE49-F238E27FC236}">
-                <a16:creationId xmlns:a16="http://schemas.microsoft.com/office/drawing/2014/main" id="{A2ADC5CF-6EBF-46E3-AA8C-B8257FB32B64}"/>
-              </a:ext>
-            </a:extLst>
-          </p:cNvPr>
+          <p:cNvPr id="14" name="Text 12"/>
           <p:cNvSpPr>
             <a:spLocks noGrp="1"/>
           </p:cNvSpPr>
@@ -20053,13 +18091,7 @@
       </p:sp>
       <p:sp>
         <p:nvSpPr>
-          <p:cNvPr id="15" name="Text 13">
-            <a:extLst>
-              <a:ext uri="{FF2B5EF4-FFF2-40B4-BE49-F238E27FC236}">
-                <a16:creationId xmlns:a16="http://schemas.microsoft.com/office/drawing/2014/main" id="{2FAFEDCE-AE7A-4858-8438-7DF9C1806521}"/>
-              </a:ext>
-            </a:extLst>
-          </p:cNvPr>
+          <p:cNvPr id="15" name="Text 13"/>
           <p:cNvSpPr>
             <a:spLocks noGrp="1"/>
           </p:cNvSpPr>
@@ -20100,11 +18132,6 @@
         </p:txBody>
       </p:sp>
     </p:spTree>
-    <p:extLst>
-      <p:ext uri="{BB962C8B-B14F-4D97-AF65-F5344CB8AC3E}">
-        <p14:creationId xmlns:p14="http://schemas.microsoft.com/office/powerpoint/2010/main" val="1805117169"/>
-      </p:ext>
-    </p:extLst>
   </p:cSld>
   <p:clrMapOvr>
     <a:masterClrMapping/>
@@ -20188,23 +18215,6 @@
         <a:font script="Viet" typeface="Times New Roman"/>
         <a:font script="Uigh" typeface="Microsoft Uighur"/>
         <a:font script="Geor" typeface="Sylfaen"/>
-        <a:font script="Armn" typeface="Arial"/>
-        <a:font script="Bugi" typeface="Leelawadee UI"/>
-        <a:font script="Bopo" typeface="Microsoft JhengHei"/>
-        <a:font script="Java" typeface="Javanese Text"/>
-        <a:font script="Lisu" typeface="Segoe UI"/>
-        <a:font script="Mymr" typeface="Myanmar Text"/>
-        <a:font script="Nkoo" typeface="Ebrima"/>
-        <a:font script="Olck" typeface="Nirmala UI"/>
-        <a:font script="Osma" typeface="Ebrima"/>
-        <a:font script="Phag" typeface="Phagspa"/>
-        <a:font script="Syrn" typeface="Estrangelo Edessa"/>
-        <a:font script="Syrj" typeface="Estrangelo Edessa"/>
-        <a:font script="Syre" typeface="Estrangelo Edessa"/>
-        <a:font script="Sora" typeface="Nirmala UI"/>
-        <a:font script="Tale" typeface="Microsoft Tai Le"/>
-        <a:font script="Talu" typeface="Microsoft New Tai Lue"/>
-        <a:font script="Tfng" typeface="Ebrima"/>
       </a:majorFont>
       <a:minorFont>
         <a:latin typeface="Microsoft YaHei"/>
@@ -20240,23 +18250,6 @@
         <a:font script="Viet" typeface="Arial"/>
         <a:font script="Uigh" typeface="Microsoft Uighur"/>
         <a:font script="Geor" typeface="Sylfaen"/>
-        <a:font script="Armn" typeface="Arial"/>
-        <a:font script="Bugi" typeface="Leelawadee UI"/>
-        <a:font script="Bopo" typeface="Microsoft JhengHei"/>
-        <a:font script="Java" typeface="Javanese Text"/>
-        <a:font script="Lisu" typeface="Segoe UI"/>
-        <a:font script="Mymr" typeface="Myanmar Text"/>
-        <a:font script="Nkoo" typeface="Ebrima"/>
-        <a:font script="Olck" typeface="Nirmala UI"/>
-        <a:font script="Osma" typeface="Ebrima"/>
-        <a:font script="Phag" typeface="Phagspa"/>
-        <a:font script="Syrn" typeface="Estrangelo Edessa"/>
-        <a:font script="Syrj" typeface="Estrangelo Edessa"/>
-        <a:font script="Syre" typeface="Estrangelo Edessa"/>
-        <a:font script="Sora" typeface="Nirmala UI"/>
-        <a:font script="Tale" typeface="Microsoft Tai Le"/>
-        <a:font script="Talu" typeface="Microsoft New Tai Lue"/>
-        <a:font script="Tfng" typeface="Ebrima"/>
       </a:minorFont>
     </a:fontScheme>
     <a:fmtScheme name="Office">
@@ -20394,8 +18387,11 @@
       </a:bgFillStyleLst>
     </a:fmtScheme>
   </a:themeElements>
-  <a:objectDefaults/>
-  <a:extraClrSchemeLst/>
+  <a:extLst>
+    <a:ext uri="{05A4C25C-085E-4340-85A3-A5531E510DB2}">
+      <thm15:themeFamily xmlns:thm15="http://schemas.microsoft.com/office/thememl/2012/main" name="Office Theme" id="{62F939B6-93AF-4DB8-9C6B-D6C7DFDC589F}" vid="{4A3C46E8-61CC-4603-A589-7422A47A8E4A}"/>
+    </a:ext>
+  </a:extLst>
 </a:theme>
 </file>
 
@@ -20475,23 +18471,6 @@
         <a:font script="Viet" typeface="Times New Roman"/>
         <a:font script="Uigh" typeface="Microsoft Uighur"/>
         <a:font script="Geor" typeface="Sylfaen"/>
-        <a:font script="Armn" typeface="Arial"/>
-        <a:font script="Bugi" typeface="Leelawadee UI"/>
-        <a:font script="Bopo" typeface="Microsoft JhengHei"/>
-        <a:font script="Java" typeface="Javanese Text"/>
-        <a:font script="Lisu" typeface="Segoe UI"/>
-        <a:font script="Mymr" typeface="Myanmar Text"/>
-        <a:font script="Nkoo" typeface="Ebrima"/>
-        <a:font script="Olck" typeface="Nirmala UI"/>
-        <a:font script="Osma" typeface="Ebrima"/>
-        <a:font script="Phag" typeface="Phagspa"/>
-        <a:font script="Syrn" typeface="Estrangelo Edessa"/>
-        <a:font script="Syrj" typeface="Estrangelo Edessa"/>
-        <a:font script="Syre" typeface="Estrangelo Edessa"/>
-        <a:font script="Sora" typeface="Nirmala UI"/>
-        <a:font script="Tale" typeface="Microsoft Tai Le"/>
-        <a:font script="Talu" typeface="Microsoft New Tai Lue"/>
-        <a:font script="Tfng" typeface="Ebrima"/>
       </a:majorFont>
       <a:minorFont>
         <a:latin typeface="Microsoft YaHei"/>
@@ -20527,23 +18506,6 @@
         <a:font script="Viet" typeface="Arial"/>
         <a:font script="Uigh" typeface="Microsoft Uighur"/>
         <a:font script="Geor" typeface="Sylfaen"/>
-        <a:font script="Armn" typeface="Arial"/>
-        <a:font script="Bugi" typeface="Leelawadee UI"/>
-        <a:font script="Bopo" typeface="Microsoft JhengHei"/>
-        <a:font script="Java" typeface="Javanese Text"/>
-        <a:font script="Lisu" typeface="Segoe UI"/>
-        <a:font script="Mymr" typeface="Myanmar Text"/>
-        <a:font script="Nkoo" typeface="Ebrima"/>
-        <a:font script="Olck" typeface="Nirmala UI"/>
-        <a:font script="Osma" typeface="Ebrima"/>
-        <a:font script="Phag" typeface="Phagspa"/>
-        <a:font script="Syrn" typeface="Estrangelo Edessa"/>
-        <a:font script="Syrj" typeface="Estrangelo Edessa"/>
-        <a:font script="Syre" typeface="Estrangelo Edessa"/>
-        <a:font script="Sora" typeface="Nirmala UI"/>
-        <a:font script="Tale" typeface="Microsoft Tai Le"/>
-        <a:font script="Talu" typeface="Microsoft New Tai Lue"/>
-        <a:font script="Tfng" typeface="Ebrima"/>
       </a:minorFont>
     </a:fontScheme>
     <a:fmtScheme name="Office">
@@ -20681,7 +18643,10 @@
       </a:bgFillStyleLst>
     </a:fmtScheme>
   </a:themeElements>
-  <a:objectDefaults/>
-  <a:extraClrSchemeLst/>
+  <a:extLst>
+    <a:ext uri="{05A4C25C-085E-4340-85A3-A5531E510DB2}">
+      <thm15:themeFamily xmlns:thm15="http://schemas.microsoft.com/office/thememl/2012/main" name="Office Theme" id="{62F939B6-93AF-4DB8-9C6B-D6C7DFDC589F}" vid="{4A3C46E8-61CC-4603-A589-7422A47A8E4A}"/>
+    </a:ext>
+  </a:extLst>
 </a:theme>
 </file>